--- a/Campus_Mart_Presentation.pptx
+++ b/Campus_Mart_Presentation.pptx
@@ -15,6 +15,10 @@
     <p:sldId id="263" r:id="rId14"/>
     <p:sldId id="264" r:id="rId15"/>
     <p:sldId id="265" r:id="rId16"/>
+    <p:sldId id="266" r:id="rId17"/>
+    <p:sldId id="267" r:id="rId18"/>
+    <p:sldId id="268" r:id="rId19"/>
+    <p:sldId id="269" r:id="rId20"/>
   </p:sldIdLst>
   <p:sldSz cx="12191695" cy="6858000" type="screen4x3"/>
   <p:notesSz cx="6858000" cy="9144000"/>
@@ -3112,12 +3116,10 @@
             <a:avLst/>
           </a:prstGeom>
           <a:solidFill>
-            <a:srgbClr val="0F172A"/>
+            <a:srgbClr val="0B1120"/>
           </a:solidFill>
           <a:ln>
-            <a:solidFill>
-              <a:srgbClr val="0F172A"/>
-            </a:solidFill>
+            <a:noFill/>
           </a:ln>
         </p:spPr>
         <p:style>
@@ -3144,68 +3146,14 @@
       </p:sp>
       <p:sp>
         <p:nvSpPr>
-          <p:cNvPr id="3" name="Rounded Rectangle 2"/>
-          <p:cNvSpPr/>
-          <p:nvPr/>
-        </p:nvSpPr>
-        <p:spPr>
-          <a:xfrm>
-            <a:off x="731520" y="822960"/>
-            <a:ext cx="2926080" cy="411480"/>
-          </a:xfrm>
-          <a:prstGeom prst="roundRect">
-            <a:avLst/>
-          </a:prstGeom>
-          <a:solidFill>
-            <a:srgbClr val="1E293B"/>
-          </a:solidFill>
-          <a:ln>
-            <a:solidFill>
-              <a:srgbClr val="EA580C"/>
-            </a:solidFill>
-          </a:ln>
-        </p:spPr>
-        <p:style>
-          <a:lnRef idx="1">
-            <a:schemeClr val="accent1"/>
-          </a:lnRef>
-          <a:fillRef idx="3">
-            <a:schemeClr val="accent1"/>
-          </a:fillRef>
-          <a:effectRef idx="2">
-            <a:schemeClr val="accent1"/>
-          </a:effectRef>
-          <a:fontRef idx="minor">
-            <a:schemeClr val="lt1"/>
-          </a:fontRef>
-        </p:style>
-        <p:txBody>
-          <a:bodyPr rtlCol="0" anchor="ctr"/>
-          <a:lstStyle/>
-          <a:p>
-            <a:pPr algn="ctr">
-              <a:defRPr sz="1150" b="1">
-                <a:solidFill>
-                  <a:srgbClr val="EA580C"/>
-                </a:solidFill>
-              </a:defRPr>
-            </a:pPr>
-            <a:r>
-              <a:t>★ BCA 2nd Year Minor Project</a:t>
-            </a:r>
-          </a:p>
-        </p:txBody>
-      </p:sp>
-      <p:sp>
-        <p:nvSpPr>
-          <p:cNvPr id="4" name="TextBox 3"/>
+          <p:cNvPr id="3" name="TextBox 2"/>
           <p:cNvSpPr txBox="1"/>
           <p:nvPr/>
         </p:nvSpPr>
         <p:spPr>
           <a:xfrm>
-            <a:off x="731520" y="1371600"/>
-            <a:ext cx="5943600" cy="2011680"/>
+            <a:off x="731520" y="731520"/>
+            <a:ext cx="6217920" cy="5303520"/>
           </a:xfrm>
           <a:prstGeom prst="rect">
             <a:avLst/>
@@ -3213,15 +3161,33 @@
           <a:noFill/>
         </p:spPr>
         <p:txBody>
-          <a:bodyPr wrap="none">
+          <a:bodyPr wrap="square">
             <a:spAutoFit/>
           </a:bodyPr>
           <a:lstStyle/>
           <a:p>
             <a:pPr>
-              <a:defRPr sz="5000" b="1">
-                <a:solidFill>
-                  <a:srgbClr val="FFFFFF"/>
+              <a:spcAft>
+                <a:spcPts val="1000"/>
+              </a:spcAft>
+              <a:defRPr sz="1100" b="1">
+                <a:solidFill>
+                  <a:srgbClr val="EA580C"/>
+                </a:solidFill>
+              </a:defRPr>
+            </a:pPr>
+            <a:r>
+              <a:t>★ BCA 2ND YEAR MINOR PROJECT  •  LIVE ON CAMPUSMART.ONLINE</a:t>
+            </a:r>
+          </a:p>
+          <a:p>
+            <a:pPr>
+              <a:spcAft>
+                <a:spcPts val="400"/>
+              </a:spcAft>
+              <a:defRPr sz="4200" b="1">
+                <a:solidFill>
+                  <a:srgbClr val="F8FAFC"/>
                 </a:solidFill>
               </a:defRPr>
             </a:pPr>
@@ -3231,120 +3197,96 @@
           </a:p>
           <a:p>
             <a:pPr>
-              <a:spcBef>
-                <a:spcPts val="800"/>
-              </a:spcBef>
-              <a:defRPr sz="1800">
-                <a:solidFill>
-                  <a:srgbClr val="FED7AA"/>
-                </a:solidFill>
-              </a:defRPr>
-            </a:pPr>
-            <a:r>
-              <a:t>Smart Food &amp; Daily Essentials Pre-Order Web Application</a:t>
-            </a:r>
-          </a:p>
-          <a:p>
-            <a:pPr>
-              <a:spcBef>
-                <a:spcPts val="800"/>
-              </a:spcBef>
-              <a:defRPr sz="1300">
-                <a:solidFill>
-                  <a:srgbClr val="CBD5E1"/>
-                </a:solidFill>
-              </a:defRPr>
-            </a:pPr>
-            <a:r>
-              <a:t>Order from Classroom • Skip Long Lines • Pick Up on Time!</a:t>
-            </a:r>
-          </a:p>
-        </p:txBody>
-      </p:sp>
-      <p:sp>
-        <p:nvSpPr>
-          <p:cNvPr id="5" name="Rounded Rectangle 4"/>
-          <p:cNvSpPr/>
-          <p:nvPr/>
-        </p:nvSpPr>
-        <p:spPr>
-          <a:xfrm>
-            <a:off x="731520" y="4297680"/>
-            <a:ext cx="5943600" cy="1737360"/>
-          </a:xfrm>
-          <a:prstGeom prst="roundRect">
-            <a:avLst/>
-          </a:prstGeom>
-          <a:solidFill>
-            <a:srgbClr val="1E293B"/>
-          </a:solidFill>
-          <a:ln>
-            <a:solidFill>
-              <a:srgbClr val="334155"/>
-            </a:solidFill>
-          </a:ln>
-        </p:spPr>
-        <p:style>
-          <a:lnRef idx="1">
-            <a:schemeClr val="accent1"/>
-          </a:lnRef>
-          <a:fillRef idx="3">
-            <a:schemeClr val="accent1"/>
-          </a:fillRef>
-          <a:effectRef idx="2">
-            <a:schemeClr val="accent1"/>
-          </a:effectRef>
-          <a:fontRef idx="minor">
-            <a:schemeClr val="lt1"/>
-          </a:fontRef>
-        </p:style>
-        <p:txBody>
-          <a:bodyPr rtlCol="0" anchor="ctr"/>
-          <a:lstStyle/>
-          <a:p>
-            <a:pPr algn="ctr">
-              <a:defRPr sz="1500" b="1">
-                <a:solidFill>
-                  <a:srgbClr val="FFFFFF"/>
-                </a:solidFill>
-              </a:defRPr>
-            </a:pPr>
-            <a:r>
-              <a:t>👤 Presented By: Deepak Sharma</a:t>
-            </a:r>
-          </a:p>
-          <a:p>
-            <a:pPr>
-              <a:spcBef>
-                <a:spcPts val="400"/>
-              </a:spcBef>
-              <a:defRPr sz="1200">
+              <a:spcAft>
+                <a:spcPts val="1200"/>
+              </a:spcAft>
+              <a:defRPr sz="1600" b="1">
+                <a:solidFill>
+                  <a:srgbClr val="FDBA74"/>
+                </a:solidFill>
+              </a:defRPr>
+            </a:pPr>
+            <a:r>
+              <a:t>Smart Multi-Vendor Pre-Order &amp; Campus Essentials Ecosystem</a:t>
+            </a:r>
+          </a:p>
+          <a:p>
+            <a:pPr>
+              <a:spcAft>
+                <a:spcPts val="2000"/>
+              </a:spcAft>
+              <a:defRPr sz="1150">
                 <a:solidFill>
                   <a:srgbClr val="94A3B8"/>
                 </a:solidFill>
               </a:defRPr>
             </a:pPr>
             <a:r>
-              <a:t>Roll No: TCA2568124 | Department of Computer Applications (BCA)</a:t>
-            </a:r>
-          </a:p>
-          <a:p>
-            <a:pPr>
-              <a:spcBef>
-                <a:spcPts val="400"/>
-              </a:spcBef>
+              <a:t>• Order food, snacks &amp; stationery from classroom on smartphone</a:t>
+            </a:r>
+            <a:br/>
+            <a:r>
+              <a:t>• Multi-shop counter order isolation (23 Outlets &amp; 1,555 Pure Veg items)</a:t>
+            </a:r>
+            <a:br/>
+            <a:r>
+              <a:t>• Live 20-min freshness countdown &amp; Web Audio pickup alerts</a:t>
+            </a:r>
+            <a:br/>
+            <a:r>
+              <a:t>• Gate No. 2 Parcel Concierge &amp; New Look Men's Salon integration</a:t>
+            </a:r>
+            <a:br/>
+            <a:r>
+              <a:t>• Automated Revenue Split (₹2.50 Platform Profit) &amp; Live Cash Ledger</a:t>
+            </a:r>
+          </a:p>
+          <a:p>
+            <a:pPr>
               <a:defRPr sz="1200" b="1">
                 <a:solidFill>
-                  <a:srgbClr val="EA580C"/>
-                </a:solidFill>
-              </a:defRPr>
-            </a:pPr>
-            <a:r>
-              <a:t>Technology: Python Flask + MongoDB NoSQL Database</a:t>
-            </a:r>
-          </a:p>
-        </p:txBody>
-      </p:sp>
+                  <a:srgbClr val="E2E8F0"/>
+                </a:solidFill>
+              </a:defRPr>
+            </a:pPr>
+            <a:r>
+              <a:t>👤 Presented By: Deepak Sharma   |   Roll No: TCA2568124</a:t>
+            </a:r>
+            <a:br/>
+            <a:r>
+              <a:t>🏛️ Department of Computer Applications (BCA)</a:t>
+            </a:r>
+            <a:br/>
+            <a:r>
+              <a:t>⚡ Tech: Python Flask REST API + MongoDB NoSQL + PWA / APK</a:t>
+            </a:r>
+          </a:p>
+        </p:txBody>
+      </p:sp>
+      <p:pic>
+        <p:nvPicPr>
+          <p:cNvPr id="4" name="Picture 3" descr="hero.jpg"/>
+          <p:cNvPicPr>
+            <a:picLocks noChangeAspect="1"/>
+          </p:cNvPicPr>
+          <p:nvPr/>
+        </p:nvPicPr>
+        <p:blipFill>
+          <a:blip r:embed="rId2"/>
+          <a:stretch>
+            <a:fillRect/>
+          </a:stretch>
+        </p:blipFill>
+        <p:spPr>
+          <a:xfrm>
+            <a:off x="7132320" y="1005840"/>
+            <a:ext cx="4297680" cy="4754880"/>
+          </a:xfrm>
+          <a:prstGeom prst="rect">
+            <a:avLst/>
+          </a:prstGeom>
+        </p:spPr>
+      </p:pic>
     </p:spTree>
   </p:cSld>
   <p:clrMapOvr>
@@ -3378,12 +3320,10 @@
             <a:avLst/>
           </a:prstGeom>
           <a:solidFill>
-            <a:srgbClr val="0F172A"/>
+            <a:srgbClr val="0B1120"/>
           </a:solidFill>
           <a:ln>
-            <a:solidFill>
-              <a:srgbClr val="0F172A"/>
-            </a:solidFill>
+            <a:noFill/>
           </a:ln>
         </p:spPr>
         <p:style>
@@ -3416,8 +3356,8 @@
         </p:nvSpPr>
         <p:spPr>
           <a:xfrm>
-            <a:off x="731520" y="1188720"/>
-            <a:ext cx="10698480" cy="1645920"/>
+            <a:off x="731520" y="320040"/>
+            <a:ext cx="10698480" cy="320040"/>
           </a:xfrm>
           <a:prstGeom prst="rect">
             <a:avLst/>
@@ -3425,49 +3365,389 @@
           <a:noFill/>
         </p:spPr>
         <p:txBody>
-          <a:bodyPr wrap="none">
+          <a:bodyPr wrap="square" tIns="0" bIns="0">
             <a:spAutoFit/>
           </a:bodyPr>
           <a:lstStyle/>
           <a:p>
             <a:pPr>
-              <a:defRPr sz="5400" b="1">
-                <a:solidFill>
-                  <a:srgbClr val="FFFFFF"/>
-                </a:solidFill>
-              </a:defRPr>
-            </a:pPr>
-            <a:r>
-              <a:t>Thank You!</a:t>
-            </a:r>
-          </a:p>
-          <a:p>
-            <a:pPr>
-              <a:spcBef>
-                <a:spcPts val="800"/>
-              </a:spcBef>
-              <a:defRPr sz="1600">
-                <a:solidFill>
-                  <a:srgbClr val="FED7AA"/>
-                </a:solidFill>
-              </a:defRPr>
-            </a:pPr>
-            <a:r>
-              <a:t>Campus Mart successfully demonstrates a modern, full-stack pre-ordering solution for smart college campuses.</a:t>
-            </a:r>
-          </a:p>
-        </p:txBody>
-      </p:sp>
-      <p:sp>
-        <p:nvSpPr>
-          <p:cNvPr id="4" name="Rounded Rectangle 3"/>
+              <a:defRPr sz="1100" b="1">
+                <a:solidFill>
+                  <a:srgbClr val="EA580C"/>
+                </a:solidFill>
+              </a:defRPr>
+            </a:pPr>
+            <a:r>
+              <a:t>CUSTOMER FEEDBACK &amp; QUALITY CONTROL</a:t>
+            </a:r>
+          </a:p>
+        </p:txBody>
+      </p:sp>
+      <p:sp>
+        <p:nvSpPr>
+          <p:cNvPr id="4" name="TextBox 3"/>
+          <p:cNvSpPr txBox="1"/>
+          <p:nvPr/>
+        </p:nvSpPr>
+        <p:spPr>
+          <a:xfrm>
+            <a:off x="731520" y="621792"/>
+            <a:ext cx="10698480" cy="594360"/>
+          </a:xfrm>
+          <a:prstGeom prst="rect">
+            <a:avLst/>
+          </a:prstGeom>
+          <a:noFill/>
+        </p:spPr>
+        <p:txBody>
+          <a:bodyPr wrap="square" tIns="0" bIns="0">
+            <a:spAutoFit/>
+          </a:bodyPr>
+          <a:lstStyle/>
+          <a:p>
+            <a:pPr>
+              <a:defRPr sz="2200" b="1">
+                <a:solidFill>
+                  <a:srgbClr val="F8FAFC"/>
+                </a:solidFill>
+              </a:defRPr>
+            </a:pPr>
+            <a:r>
+              <a:t>Student Star Ratings &amp; Sentiment Analytics</a:t>
+            </a:r>
+          </a:p>
+        </p:txBody>
+      </p:sp>
+      <p:sp>
+        <p:nvSpPr>
+          <p:cNvPr id="5" name="TextBox 4"/>
+          <p:cNvSpPr txBox="1"/>
+          <p:nvPr/>
+        </p:nvSpPr>
+        <p:spPr>
+          <a:xfrm>
+            <a:off x="731520" y="1143000"/>
+            <a:ext cx="10698480" cy="320040"/>
+          </a:xfrm>
+          <a:prstGeom prst="rect">
+            <a:avLst/>
+          </a:prstGeom>
+          <a:noFill/>
+        </p:spPr>
+        <p:txBody>
+          <a:bodyPr wrap="square" tIns="0" bIns="0">
+            <a:spAutoFit/>
+          </a:bodyPr>
+          <a:lstStyle/>
+          <a:p>
+            <a:pPr>
+              <a:defRPr sz="1100">
+                <a:solidFill>
+                  <a:srgbClr val="94A3B8"/>
+                </a:solidFill>
+              </a:defRPr>
+            </a:pPr>
+            <a:r>
+              <a:t>Maintaining high food quality and hygiene standards across campus outlets</a:t>
+            </a:r>
+          </a:p>
+        </p:txBody>
+      </p:sp>
+      <p:sp>
+        <p:nvSpPr>
+          <p:cNvPr id="6" name="Rounded Rectangle 5"/>
           <p:cNvSpPr/>
           <p:nvPr/>
         </p:nvSpPr>
         <p:spPr>
           <a:xfrm>
-            <a:off x="731520" y="3291840"/>
-            <a:ext cx="10698480" cy="2560320"/>
+            <a:off x="731520" y="1645920"/>
+            <a:ext cx="5669280" cy="1325880"/>
+          </a:xfrm>
+          <a:prstGeom prst="roundRect">
+            <a:avLst/>
+          </a:prstGeom>
+          <a:solidFill>
+            <a:srgbClr val="1E293B"/>
+          </a:solidFill>
+          <a:ln w="12700">
+            <a:solidFill>
+              <a:srgbClr val="334155"/>
+            </a:solidFill>
+          </a:ln>
+        </p:spPr>
+        <p:style>
+          <a:lnRef idx="1">
+            <a:schemeClr val="accent1"/>
+          </a:lnRef>
+          <a:fillRef idx="3">
+            <a:schemeClr val="accent1"/>
+          </a:fillRef>
+          <a:effectRef idx="2">
+            <a:schemeClr val="accent1"/>
+          </a:effectRef>
+          <a:fontRef idx="minor">
+            <a:schemeClr val="lt1"/>
+          </a:fontRef>
+        </p:style>
+        <p:txBody>
+          <a:bodyPr rtlCol="0" anchor="ctr"/>
+          <a:lstStyle/>
+          <a:p>
+            <a:pPr algn="ctr"/>
+          </a:p>
+        </p:txBody>
+      </p:sp>
+      <p:sp>
+        <p:nvSpPr>
+          <p:cNvPr id="7" name="TextBox 6"/>
+          <p:cNvSpPr txBox="1"/>
+          <p:nvPr/>
+        </p:nvSpPr>
+        <p:spPr>
+          <a:xfrm>
+            <a:off x="896112" y="1773936"/>
+            <a:ext cx="5340096" cy="1069848"/>
+          </a:xfrm>
+          <a:prstGeom prst="rect">
+            <a:avLst/>
+          </a:prstGeom>
+          <a:noFill/>
+        </p:spPr>
+        <p:txBody>
+          <a:bodyPr wrap="square" lIns="0" rIns="0" tIns="0" bIns="0">
+            <a:spAutoFit/>
+          </a:bodyPr>
+          <a:lstStyle/>
+          <a:p>
+            <a:pPr>
+              <a:spcAft>
+                <a:spcPts val="400"/>
+              </a:spcAft>
+              <a:defRPr sz="1400" b="1">
+                <a:solidFill>
+                  <a:srgbClr val="F59E0B"/>
+                </a:solidFill>
+              </a:defRPr>
+            </a:pPr>
+            <a:r>
+              <a:t>⭐ 1-5 Star Interactive Ratings</a:t>
+            </a:r>
+          </a:p>
+          <a:p>
+            <a:pPr>
+              <a:defRPr sz="1100">
+                <a:solidFill>
+                  <a:srgbClr val="94A3B8"/>
+                </a:solidFill>
+              </a:defRPr>
+            </a:pPr>
+            <a:r>
+              <a:t>Students can rate each completed meal with interactive gold stars directly from their order history.</a:t>
+            </a:r>
+          </a:p>
+        </p:txBody>
+      </p:sp>
+      <p:sp>
+        <p:nvSpPr>
+          <p:cNvPr id="8" name="Rounded Rectangle 7"/>
+          <p:cNvSpPr/>
+          <p:nvPr/>
+        </p:nvSpPr>
+        <p:spPr>
+          <a:xfrm>
+            <a:off x="731520" y="3154680"/>
+            <a:ext cx="5669280" cy="1325880"/>
+          </a:xfrm>
+          <a:prstGeom prst="roundRect">
+            <a:avLst/>
+          </a:prstGeom>
+          <a:solidFill>
+            <a:srgbClr val="1E293B"/>
+          </a:solidFill>
+          <a:ln w="12700">
+            <a:solidFill>
+              <a:srgbClr val="334155"/>
+            </a:solidFill>
+          </a:ln>
+        </p:spPr>
+        <p:style>
+          <a:lnRef idx="1">
+            <a:schemeClr val="accent1"/>
+          </a:lnRef>
+          <a:fillRef idx="3">
+            <a:schemeClr val="accent1"/>
+          </a:fillRef>
+          <a:effectRef idx="2">
+            <a:schemeClr val="accent1"/>
+          </a:effectRef>
+          <a:fontRef idx="minor">
+            <a:schemeClr val="lt1"/>
+          </a:fontRef>
+        </p:style>
+        <p:txBody>
+          <a:bodyPr rtlCol="0" anchor="ctr"/>
+          <a:lstStyle/>
+          <a:p>
+            <a:pPr algn="ctr"/>
+          </a:p>
+        </p:txBody>
+      </p:sp>
+      <p:sp>
+        <p:nvSpPr>
+          <p:cNvPr id="9" name="TextBox 8"/>
+          <p:cNvSpPr txBox="1"/>
+          <p:nvPr/>
+        </p:nvSpPr>
+        <p:spPr>
+          <a:xfrm>
+            <a:off x="896112" y="3282696"/>
+            <a:ext cx="5340096" cy="1069848"/>
+          </a:xfrm>
+          <a:prstGeom prst="rect">
+            <a:avLst/>
+          </a:prstGeom>
+          <a:noFill/>
+        </p:spPr>
+        <p:txBody>
+          <a:bodyPr wrap="square" lIns="0" rIns="0" tIns="0" bIns="0">
+            <a:spAutoFit/>
+          </a:bodyPr>
+          <a:lstStyle/>
+          <a:p>
+            <a:pPr>
+              <a:spcAft>
+                <a:spcPts val="400"/>
+              </a:spcAft>
+              <a:defRPr sz="1400" b="1">
+                <a:solidFill>
+                  <a:srgbClr val="10B981"/>
+                </a:solidFill>
+              </a:defRPr>
+            </a:pPr>
+            <a:r>
+              <a:t>🏷️ 1-Tap Sentiment Tags</a:t>
+            </a:r>
+          </a:p>
+          <a:p>
+            <a:pPr>
+              <a:defRPr sz="1100">
+                <a:solidFill>
+                  <a:srgbClr val="94A3B8"/>
+                </a:solidFill>
+              </a:defRPr>
+            </a:pPr>
+            <a:r>
+              <a:t>Quick impression feedback tags: '⚡ Fast Pickup', '🍲 Delicious Taste', '✨ Hygienic &amp; Fresh', '📦 Good Packaging'.</a:t>
+            </a:r>
+          </a:p>
+        </p:txBody>
+      </p:sp>
+      <p:sp>
+        <p:nvSpPr>
+          <p:cNvPr id="10" name="Rounded Rectangle 9"/>
+          <p:cNvSpPr/>
+          <p:nvPr/>
+        </p:nvSpPr>
+        <p:spPr>
+          <a:xfrm>
+            <a:off x="731520" y="4663440"/>
+            <a:ext cx="5669280" cy="1325880"/>
+          </a:xfrm>
+          <a:prstGeom prst="roundRect">
+            <a:avLst/>
+          </a:prstGeom>
+          <a:solidFill>
+            <a:srgbClr val="1E293B"/>
+          </a:solidFill>
+          <a:ln w="12700">
+            <a:solidFill>
+              <a:srgbClr val="334155"/>
+            </a:solidFill>
+          </a:ln>
+        </p:spPr>
+        <p:style>
+          <a:lnRef idx="1">
+            <a:schemeClr val="accent1"/>
+          </a:lnRef>
+          <a:fillRef idx="3">
+            <a:schemeClr val="accent1"/>
+          </a:fillRef>
+          <a:effectRef idx="2">
+            <a:schemeClr val="accent1"/>
+          </a:effectRef>
+          <a:fontRef idx="minor">
+            <a:schemeClr val="lt1"/>
+          </a:fontRef>
+        </p:style>
+        <p:txBody>
+          <a:bodyPr rtlCol="0" anchor="ctr"/>
+          <a:lstStyle/>
+          <a:p>
+            <a:pPr algn="ctr"/>
+          </a:p>
+        </p:txBody>
+      </p:sp>
+      <p:sp>
+        <p:nvSpPr>
+          <p:cNvPr id="11" name="TextBox 10"/>
+          <p:cNvSpPr txBox="1"/>
+          <p:nvPr/>
+        </p:nvSpPr>
+        <p:spPr>
+          <a:xfrm>
+            <a:off x="896112" y="4791455"/>
+            <a:ext cx="5340096" cy="1069848"/>
+          </a:xfrm>
+          <a:prstGeom prst="rect">
+            <a:avLst/>
+          </a:prstGeom>
+          <a:noFill/>
+        </p:spPr>
+        <p:txBody>
+          <a:bodyPr wrap="square" lIns="0" rIns="0" tIns="0" bIns="0">
+            <a:spAutoFit/>
+          </a:bodyPr>
+          <a:lstStyle/>
+          <a:p>
+            <a:pPr>
+              <a:spcAft>
+                <a:spcPts val="400"/>
+              </a:spcAft>
+              <a:defRPr sz="1400" b="1">
+                <a:solidFill>
+                  <a:srgbClr val="0284C7"/>
+                </a:solidFill>
+              </a:defRPr>
+            </a:pPr>
+            <a:r>
+              <a:t>📊 Admin Quality Analytics</a:t>
+            </a:r>
+          </a:p>
+          <a:p>
+            <a:pPr>
+              <a:defRPr sz="1100">
+                <a:solidFill>
+                  <a:srgbClr val="94A3B8"/>
+                </a:solidFill>
+              </a:defRPr>
+            </a:pPr>
+            <a:r>
+              <a:t>Admin analytics dashboard displays satisfaction trends, total review counts, and 5-star distribution graphs.</a:t>
+            </a:r>
+          </a:p>
+        </p:txBody>
+      </p:sp>
+      <p:sp>
+        <p:nvSpPr>
+          <p:cNvPr id="12" name="Rounded Rectangle 11"/>
+          <p:cNvSpPr/>
+          <p:nvPr/>
+        </p:nvSpPr>
+        <p:spPr>
+          <a:xfrm>
+            <a:off x="6766560" y="1645920"/>
+            <a:ext cx="4663440" cy="4343400"/>
           </a:xfrm>
           <a:prstGeom prst="roundRect">
             <a:avLst/>
@@ -3477,7 +3757,7 @@
           </a:solidFill>
           <a:ln w="25400">
             <a:solidFill>
-              <a:srgbClr val="EA580C"/>
+              <a:srgbClr val="F59E0B"/>
             </a:solidFill>
           </a:ln>
         </p:spPr>
@@ -3499,45 +3779,1622 @@
           <a:bodyPr rtlCol="0" anchor="ctr"/>
           <a:lstStyle/>
           <a:p>
+            <a:pPr algn="ctr"/>
+          </a:p>
+        </p:txBody>
+      </p:sp>
+      <p:sp>
+        <p:nvSpPr>
+          <p:cNvPr id="13" name="TextBox 12"/>
+          <p:cNvSpPr txBox="1"/>
+          <p:nvPr/>
+        </p:nvSpPr>
+        <p:spPr>
+          <a:xfrm>
+            <a:off x="6949440" y="2011680"/>
+            <a:ext cx="4297680" cy="3657600"/>
+          </a:xfrm>
+          <a:prstGeom prst="rect">
+            <a:avLst/>
+          </a:prstGeom>
+          <a:noFill/>
+        </p:spPr>
+        <p:txBody>
+          <a:bodyPr wrap="square">
+            <a:spAutoFit/>
+          </a:bodyPr>
+          <a:lstStyle/>
+          <a:p>
             <a:pPr algn="ctr">
+              <a:defRPr sz="4000" b="1">
+                <a:solidFill>
+                  <a:srgbClr val="F8FAFC"/>
+                </a:solidFill>
+              </a:defRPr>
+            </a:pPr>
+            <a:r>
+              <a:t>4.9 / 5.0</a:t>
+            </a:r>
+          </a:p>
+          <a:p>
+            <a:pPr algn="ctr">
+              <a:spcAft>
+                <a:spcPts val="1200"/>
+              </a:spcAft>
+              <a:defRPr sz="2800">
+                <a:solidFill>
+                  <a:srgbClr val="F59E0B"/>
+                </a:solidFill>
+              </a:defRPr>
+            </a:pPr>
+            <a:r>
+              <a:t>★★★★★</a:t>
+            </a:r>
+          </a:p>
+          <a:p>
+            <a:pPr algn="ctr">
+              <a:spcAft>
+                <a:spcPts val="1600"/>
+              </a:spcAft>
+              <a:defRPr sz="1300">
+                <a:solidFill>
+                  <a:srgbClr val="94A3B8"/>
+                </a:solidFill>
+              </a:defRPr>
+            </a:pPr>
+            <a:r>
+              <a:t>Verified Campus Rating Score</a:t>
+            </a:r>
+            <a:br/>
+            <a:r>
+              <a:t>Based on 100% Real Student Feedback</a:t>
+            </a:r>
+          </a:p>
+          <a:p>
+            <a:pPr algn="ctr">
+              <a:defRPr sz="1200" b="1">
+                <a:solidFill>
+                  <a:srgbClr val="10B981"/>
+                </a:solidFill>
+              </a:defRPr>
+            </a:pPr>
+            <a:r>
+              <a:t>[⚡ Fast Pickup]  [🍲 Delicious]  [✨ Hygienic]</a:t>
+            </a:r>
+          </a:p>
+        </p:txBody>
+      </p:sp>
+    </p:spTree>
+  </p:cSld>
+  <p:clrMapOvr>
+    <a:masterClrMapping/>
+  </p:clrMapOvr>
+</p:sld>
+</file>
+
+<file path=ppt/slides/slide11.xml><?xml version="1.0" encoding="utf-8"?>
+<p:sld xmlns:a="http://schemas.openxmlformats.org/drawingml/2006/main" xmlns:p="http://schemas.openxmlformats.org/presentationml/2006/main" xmlns:r="http://schemas.openxmlformats.org/officeDocument/2006/relationships">
+  <p:cSld>
+    <p:spTree>
+      <p:nvGrpSpPr>
+        <p:cNvPr id="1" name=""/>
+        <p:cNvGrpSpPr/>
+        <p:nvPr/>
+      </p:nvGrpSpPr>
+      <p:grpSpPr/>
+      <p:sp>
+        <p:nvSpPr>
+          <p:cNvPr id="2" name="Rectangle 1"/>
+          <p:cNvSpPr/>
+          <p:nvPr/>
+        </p:nvSpPr>
+        <p:spPr>
+          <a:xfrm>
+            <a:off x="0" y="0"/>
+            <a:ext cx="12191695" cy="6858000"/>
+          </a:xfrm>
+          <a:prstGeom prst="rect">
+            <a:avLst/>
+          </a:prstGeom>
+          <a:solidFill>
+            <a:srgbClr val="0B1120"/>
+          </a:solidFill>
+          <a:ln>
+            <a:noFill/>
+          </a:ln>
+        </p:spPr>
+        <p:style>
+          <a:lnRef idx="1">
+            <a:schemeClr val="accent1"/>
+          </a:lnRef>
+          <a:fillRef idx="3">
+            <a:schemeClr val="accent1"/>
+          </a:fillRef>
+          <a:effectRef idx="2">
+            <a:schemeClr val="accent1"/>
+          </a:effectRef>
+          <a:fontRef idx="minor">
+            <a:schemeClr val="lt1"/>
+          </a:fontRef>
+        </p:style>
+        <p:txBody>
+          <a:bodyPr rtlCol="0" anchor="ctr"/>
+          <a:lstStyle/>
+          <a:p>
+            <a:pPr algn="ctr"/>
+          </a:p>
+        </p:txBody>
+      </p:sp>
+      <p:sp>
+        <p:nvSpPr>
+          <p:cNvPr id="3" name="TextBox 2"/>
+          <p:cNvSpPr txBox="1"/>
+          <p:nvPr/>
+        </p:nvSpPr>
+        <p:spPr>
+          <a:xfrm>
+            <a:off x="731520" y="320040"/>
+            <a:ext cx="10698480" cy="320040"/>
+          </a:xfrm>
+          <a:prstGeom prst="rect">
+            <a:avLst/>
+          </a:prstGeom>
+          <a:noFill/>
+        </p:spPr>
+        <p:txBody>
+          <a:bodyPr wrap="square" tIns="0" bIns="0">
+            <a:spAutoFit/>
+          </a:bodyPr>
+          <a:lstStyle/>
+          <a:p>
+            <a:pPr>
+              <a:defRPr sz="1100" b="1">
+                <a:solidFill>
+                  <a:srgbClr val="EA580C"/>
+                </a:solidFill>
+              </a:defRPr>
+            </a:pPr>
+            <a:r>
+              <a:t>ENGINEERING &amp; SYSTEM ARCHITECTURE</a:t>
+            </a:r>
+          </a:p>
+        </p:txBody>
+      </p:sp>
+      <p:sp>
+        <p:nvSpPr>
+          <p:cNvPr id="4" name="TextBox 3"/>
+          <p:cNvSpPr txBox="1"/>
+          <p:nvPr/>
+        </p:nvSpPr>
+        <p:spPr>
+          <a:xfrm>
+            <a:off x="731520" y="621792"/>
+            <a:ext cx="10698480" cy="594360"/>
+          </a:xfrm>
+          <a:prstGeom prst="rect">
+            <a:avLst/>
+          </a:prstGeom>
+          <a:noFill/>
+        </p:spPr>
+        <p:txBody>
+          <a:bodyPr wrap="square" tIns="0" bIns="0">
+            <a:spAutoFit/>
+          </a:bodyPr>
+          <a:lstStyle/>
+          <a:p>
+            <a:pPr>
               <a:defRPr sz="2200" b="1">
                 <a:solidFill>
+                  <a:srgbClr val="F8FAFC"/>
+                </a:solidFill>
+              </a:defRPr>
+            </a:pPr>
+            <a:r>
+              <a:t>Lightweight, Modern Full-Stack Technology</a:t>
+            </a:r>
+          </a:p>
+        </p:txBody>
+      </p:sp>
+      <p:sp>
+        <p:nvSpPr>
+          <p:cNvPr id="5" name="TextBox 4"/>
+          <p:cNvSpPr txBox="1"/>
+          <p:nvPr/>
+        </p:nvSpPr>
+        <p:spPr>
+          <a:xfrm>
+            <a:off x="731520" y="1143000"/>
+            <a:ext cx="10698480" cy="320040"/>
+          </a:xfrm>
+          <a:prstGeom prst="rect">
+            <a:avLst/>
+          </a:prstGeom>
+          <a:noFill/>
+        </p:spPr>
+        <p:txBody>
+          <a:bodyPr wrap="square" tIns="0" bIns="0">
+            <a:spAutoFit/>
+          </a:bodyPr>
+          <a:lstStyle/>
+          <a:p>
+            <a:pPr>
+              <a:defRPr sz="1100">
+                <a:solidFill>
+                  <a:srgbClr val="94A3B8"/>
+                </a:solidFill>
+              </a:defRPr>
+            </a:pPr>
+            <a:r>
+              <a:t>Zero client-side build complexity; ultra-fast response times on campus Wi-Fi / 4G</a:t>
+            </a:r>
+          </a:p>
+        </p:txBody>
+      </p:sp>
+      <p:sp>
+        <p:nvSpPr>
+          <p:cNvPr id="6" name="Rounded Rectangle 5"/>
+          <p:cNvSpPr/>
+          <p:nvPr/>
+        </p:nvSpPr>
+        <p:spPr>
+          <a:xfrm>
+            <a:off x="731520" y="1645920"/>
+            <a:ext cx="5669280" cy="1234440"/>
+          </a:xfrm>
+          <a:prstGeom prst="roundRect">
+            <a:avLst/>
+          </a:prstGeom>
+          <a:solidFill>
+            <a:srgbClr val="1E293B"/>
+          </a:solidFill>
+          <a:ln w="12700">
+            <a:solidFill>
+              <a:srgbClr val="334155"/>
+            </a:solidFill>
+          </a:ln>
+        </p:spPr>
+        <p:style>
+          <a:lnRef idx="1">
+            <a:schemeClr val="accent1"/>
+          </a:lnRef>
+          <a:fillRef idx="3">
+            <a:schemeClr val="accent1"/>
+          </a:fillRef>
+          <a:effectRef idx="2">
+            <a:schemeClr val="accent1"/>
+          </a:effectRef>
+          <a:fontRef idx="minor">
+            <a:schemeClr val="lt1"/>
+          </a:fontRef>
+        </p:style>
+        <p:txBody>
+          <a:bodyPr rtlCol="0" anchor="ctr"/>
+          <a:lstStyle/>
+          <a:p>
+            <a:pPr algn="ctr"/>
+          </a:p>
+        </p:txBody>
+      </p:sp>
+      <p:sp>
+        <p:nvSpPr>
+          <p:cNvPr id="7" name="TextBox 6"/>
+          <p:cNvSpPr txBox="1"/>
+          <p:nvPr/>
+        </p:nvSpPr>
+        <p:spPr>
+          <a:xfrm>
+            <a:off x="896112" y="1773936"/>
+            <a:ext cx="5340096" cy="978408"/>
+          </a:xfrm>
+          <a:prstGeom prst="rect">
+            <a:avLst/>
+          </a:prstGeom>
+          <a:noFill/>
+        </p:spPr>
+        <p:txBody>
+          <a:bodyPr wrap="square" lIns="0" rIns="0" tIns="0" bIns="0">
+            <a:spAutoFit/>
+          </a:bodyPr>
+          <a:lstStyle/>
+          <a:p>
+            <a:pPr>
+              <a:spcAft>
+                <a:spcPts val="400"/>
+              </a:spcAft>
+              <a:defRPr sz="1400" b="1">
+                <a:solidFill>
                   <a:srgbClr val="EA580C"/>
                 </a:solidFill>
               </a:defRPr>
             </a:pPr>
             <a:r>
-              <a:t>💬 Questions &amp; Live Demonstration</a:t>
-            </a:r>
-          </a:p>
+              <a:t>🌐  Frontend: HTML5 + CSS3 + Vanilla JS</a:t>
+            </a:r>
+          </a:p>
+          <a:p>
+            <a:pPr>
+              <a:defRPr sz="1100">
+                <a:solidFill>
+                  <a:srgbClr val="94A3B8"/>
+                </a:solidFill>
+              </a:defRPr>
+            </a:pPr>
+            <a:r>
+              <a:t>Clean mobile-first glassmorphism UI; instant page load without downloading 100MB+ node_modules.</a:t>
+            </a:r>
+          </a:p>
+        </p:txBody>
+      </p:sp>
+      <p:sp>
+        <p:nvSpPr>
+          <p:cNvPr id="8" name="Rounded Rectangle 7"/>
+          <p:cNvSpPr/>
+          <p:nvPr/>
+        </p:nvSpPr>
+        <p:spPr>
+          <a:xfrm>
+            <a:off x="731520" y="2971800"/>
+            <a:ext cx="5669280" cy="1234440"/>
+          </a:xfrm>
+          <a:prstGeom prst="roundRect">
+            <a:avLst/>
+          </a:prstGeom>
+          <a:solidFill>
+            <a:srgbClr val="1E293B"/>
+          </a:solidFill>
+          <a:ln w="12700">
+            <a:solidFill>
+              <a:srgbClr val="334155"/>
+            </a:solidFill>
+          </a:ln>
+        </p:spPr>
+        <p:style>
+          <a:lnRef idx="1">
+            <a:schemeClr val="accent1"/>
+          </a:lnRef>
+          <a:fillRef idx="3">
+            <a:schemeClr val="accent1"/>
+          </a:fillRef>
+          <a:effectRef idx="2">
+            <a:schemeClr val="accent1"/>
+          </a:effectRef>
+          <a:fontRef idx="minor">
+            <a:schemeClr val="lt1"/>
+          </a:fontRef>
+        </p:style>
+        <p:txBody>
+          <a:bodyPr rtlCol="0" anchor="ctr"/>
+          <a:lstStyle/>
+          <a:p>
+            <a:pPr algn="ctr"/>
+          </a:p>
+        </p:txBody>
+      </p:sp>
+      <p:sp>
+        <p:nvSpPr>
+          <p:cNvPr id="9" name="TextBox 8"/>
+          <p:cNvSpPr txBox="1"/>
+          <p:nvPr/>
+        </p:nvSpPr>
+        <p:spPr>
+          <a:xfrm>
+            <a:off x="896112" y="3099816"/>
+            <a:ext cx="5340096" cy="978408"/>
+          </a:xfrm>
+          <a:prstGeom prst="rect">
+            <a:avLst/>
+          </a:prstGeom>
+          <a:noFill/>
+        </p:spPr>
+        <p:txBody>
+          <a:bodyPr wrap="square" lIns="0" rIns="0" tIns="0" bIns="0">
+            <a:spAutoFit/>
+          </a:bodyPr>
+          <a:lstStyle/>
+          <a:p>
+            <a:pPr>
+              <a:spcAft>
+                <a:spcPts val="400"/>
+              </a:spcAft>
+              <a:defRPr sz="1400" b="1">
+                <a:solidFill>
+                  <a:srgbClr val="0284C7"/>
+                </a:solidFill>
+              </a:defRPr>
+            </a:pPr>
+            <a:r>
+              <a:t>⚡  Backend: Python Flask REST API</a:t>
+            </a:r>
+          </a:p>
+          <a:p>
+            <a:pPr>
+              <a:defRPr sz="1100">
+                <a:solidFill>
+                  <a:srgbClr val="94A3B8"/>
+                </a:solidFill>
+              </a:defRPr>
+            </a:pPr>
+            <a:r>
+              <a:t>24/7 Render Cloud API serving 1,555+ items, orders pipeline, split engine &amp; RBAC.</a:t>
+            </a:r>
+          </a:p>
+        </p:txBody>
+      </p:sp>
+      <p:sp>
+        <p:nvSpPr>
+          <p:cNvPr id="10" name="Rounded Rectangle 9"/>
+          <p:cNvSpPr/>
+          <p:nvPr/>
+        </p:nvSpPr>
+        <p:spPr>
+          <a:xfrm>
+            <a:off x="731520" y="4297680"/>
+            <a:ext cx="5669280" cy="1234440"/>
+          </a:xfrm>
+          <a:prstGeom prst="roundRect">
+            <a:avLst/>
+          </a:prstGeom>
+          <a:solidFill>
+            <a:srgbClr val="1E293B"/>
+          </a:solidFill>
+          <a:ln w="12700">
+            <a:solidFill>
+              <a:srgbClr val="334155"/>
+            </a:solidFill>
+          </a:ln>
+        </p:spPr>
+        <p:style>
+          <a:lnRef idx="1">
+            <a:schemeClr val="accent1"/>
+          </a:lnRef>
+          <a:fillRef idx="3">
+            <a:schemeClr val="accent1"/>
+          </a:fillRef>
+          <a:effectRef idx="2">
+            <a:schemeClr val="accent1"/>
+          </a:effectRef>
+          <a:fontRef idx="minor">
+            <a:schemeClr val="lt1"/>
+          </a:fontRef>
+        </p:style>
+        <p:txBody>
+          <a:bodyPr rtlCol="0" anchor="ctr"/>
+          <a:lstStyle/>
+          <a:p>
+            <a:pPr algn="ctr"/>
+          </a:p>
+        </p:txBody>
+      </p:sp>
+      <p:sp>
+        <p:nvSpPr>
+          <p:cNvPr id="11" name="TextBox 10"/>
+          <p:cNvSpPr txBox="1"/>
+          <p:nvPr/>
+        </p:nvSpPr>
+        <p:spPr>
+          <a:xfrm>
+            <a:off x="896112" y="4425696"/>
+            <a:ext cx="5340096" cy="978408"/>
+          </a:xfrm>
+          <a:prstGeom prst="rect">
+            <a:avLst/>
+          </a:prstGeom>
+          <a:noFill/>
+        </p:spPr>
+        <p:txBody>
+          <a:bodyPr wrap="square" lIns="0" rIns="0" tIns="0" bIns="0">
+            <a:spAutoFit/>
+          </a:bodyPr>
+          <a:lstStyle/>
+          <a:p>
+            <a:pPr>
+              <a:spcAft>
+                <a:spcPts val="400"/>
+              </a:spcAft>
+              <a:defRPr sz="1400" b="1">
+                <a:solidFill>
+                  <a:srgbClr val="10B981"/>
+                </a:solidFill>
+              </a:defRPr>
+            </a:pPr>
+            <a:r>
+              <a:t>🍃  Database: MongoDB NoSQL JSON Store</a:t>
+            </a:r>
+          </a:p>
+          <a:p>
+            <a:pPr>
+              <a:defRPr sz="1100">
+                <a:solidFill>
+                  <a:srgbClr val="94A3B8"/>
+                </a:solidFill>
+              </a:defRPr>
+            </a:pPr>
+            <a:r>
+              <a:t>Flexible JSON document persistence for 26 accounts, 1,555 pure veg food items &amp; 23 shops.</a:t>
+            </a:r>
+          </a:p>
+        </p:txBody>
+      </p:sp>
+      <p:sp>
+        <p:nvSpPr>
+          <p:cNvPr id="12" name="Rounded Rectangle 11"/>
+          <p:cNvSpPr/>
+          <p:nvPr/>
+        </p:nvSpPr>
+        <p:spPr>
+          <a:xfrm>
+            <a:off x="731520" y="5623560"/>
+            <a:ext cx="5669280" cy="868680"/>
+          </a:xfrm>
+          <a:prstGeom prst="roundRect">
+            <a:avLst/>
+          </a:prstGeom>
+          <a:solidFill>
+            <a:srgbClr val="1E293B"/>
+          </a:solidFill>
+          <a:ln w="12700">
+            <a:solidFill>
+              <a:srgbClr val="334155"/>
+            </a:solidFill>
+          </a:ln>
+        </p:spPr>
+        <p:style>
+          <a:lnRef idx="1">
+            <a:schemeClr val="accent1"/>
+          </a:lnRef>
+          <a:fillRef idx="3">
+            <a:schemeClr val="accent1"/>
+          </a:fillRef>
+          <a:effectRef idx="2">
+            <a:schemeClr val="accent1"/>
+          </a:effectRef>
+          <a:fontRef idx="minor">
+            <a:schemeClr val="lt1"/>
+          </a:fontRef>
+        </p:style>
+        <p:txBody>
+          <a:bodyPr rtlCol="0" anchor="ctr"/>
+          <a:lstStyle/>
+          <a:p>
+            <a:pPr algn="ctr"/>
+          </a:p>
+        </p:txBody>
+      </p:sp>
+      <p:sp>
+        <p:nvSpPr>
+          <p:cNvPr id="13" name="TextBox 12"/>
+          <p:cNvSpPr txBox="1"/>
+          <p:nvPr/>
+        </p:nvSpPr>
+        <p:spPr>
+          <a:xfrm>
+            <a:off x="896112" y="5751576"/>
+            <a:ext cx="5340096" cy="612647"/>
+          </a:xfrm>
+          <a:prstGeom prst="rect">
+            <a:avLst/>
+          </a:prstGeom>
+          <a:noFill/>
+        </p:spPr>
+        <p:txBody>
+          <a:bodyPr wrap="square" lIns="0" rIns="0" tIns="0" bIns="0">
+            <a:spAutoFit/>
+          </a:bodyPr>
+          <a:lstStyle/>
+          <a:p>
+            <a:pPr>
+              <a:spcAft>
+                <a:spcPts val="400"/>
+              </a:spcAft>
+              <a:defRPr sz="1400" b="1">
+                <a:solidFill>
+                  <a:srgbClr val="A855F7"/>
+                </a:solidFill>
+              </a:defRPr>
+            </a:pPr>
+            <a:r>
+              <a:t>🔊  Audio Engine: Web Audio API &amp; TTS</a:t>
+            </a:r>
+          </a:p>
+          <a:p>
+            <a:pPr>
+              <a:defRPr sz="1100">
+                <a:solidFill>
+                  <a:srgbClr val="94A3B8"/>
+                </a:solidFill>
+              </a:defRPr>
+            </a:pPr>
+            <a:r>
+              <a:t>Browser-native oscillator chime synthesizer and Text-To-Speech speech synthesis engine.</a:t>
+            </a:r>
+          </a:p>
+        </p:txBody>
+      </p:sp>
+      <p:pic>
+        <p:nvPicPr>
+          <p:cNvPr id="14" name="Picture 13" descr="tech.jpg"/>
+          <p:cNvPicPr>
+            <a:picLocks noChangeAspect="1"/>
+          </p:cNvPicPr>
+          <p:nvPr/>
+        </p:nvPicPr>
+        <p:blipFill>
+          <a:blip r:embed="rId2"/>
+          <a:stretch>
+            <a:fillRect/>
+          </a:stretch>
+        </p:blipFill>
+        <p:spPr>
+          <a:xfrm>
+            <a:off x="6766560" y="1645920"/>
+            <a:ext cx="4663440" cy="4846320"/>
+          </a:xfrm>
+          <a:prstGeom prst="rect">
+            <a:avLst/>
+          </a:prstGeom>
+        </p:spPr>
+      </p:pic>
+    </p:spTree>
+  </p:cSld>
+  <p:clrMapOvr>
+    <a:masterClrMapping/>
+  </p:clrMapOvr>
+</p:sld>
+</file>
+
+<file path=ppt/slides/slide12.xml><?xml version="1.0" encoding="utf-8"?>
+<p:sld xmlns:a="http://schemas.openxmlformats.org/drawingml/2006/main" xmlns:p="http://schemas.openxmlformats.org/presentationml/2006/main" xmlns:r="http://schemas.openxmlformats.org/officeDocument/2006/relationships">
+  <p:cSld>
+    <p:spTree>
+      <p:nvGrpSpPr>
+        <p:cNvPr id="1" name=""/>
+        <p:cNvGrpSpPr/>
+        <p:nvPr/>
+      </p:nvGrpSpPr>
+      <p:grpSpPr/>
+      <p:sp>
+        <p:nvSpPr>
+          <p:cNvPr id="2" name="Rectangle 1"/>
+          <p:cNvSpPr/>
+          <p:nvPr/>
+        </p:nvSpPr>
+        <p:spPr>
+          <a:xfrm>
+            <a:off x="0" y="0"/>
+            <a:ext cx="12191695" cy="6858000"/>
+          </a:xfrm>
+          <a:prstGeom prst="rect">
+            <a:avLst/>
+          </a:prstGeom>
+          <a:solidFill>
+            <a:srgbClr val="0B1120"/>
+          </a:solidFill>
+          <a:ln>
+            <a:noFill/>
+          </a:ln>
+        </p:spPr>
+        <p:style>
+          <a:lnRef idx="1">
+            <a:schemeClr val="accent1"/>
+          </a:lnRef>
+          <a:fillRef idx="3">
+            <a:schemeClr val="accent1"/>
+          </a:fillRef>
+          <a:effectRef idx="2">
+            <a:schemeClr val="accent1"/>
+          </a:effectRef>
+          <a:fontRef idx="minor">
+            <a:schemeClr val="lt1"/>
+          </a:fontRef>
+        </p:style>
+        <p:txBody>
+          <a:bodyPr rtlCol="0" anchor="ctr"/>
+          <a:lstStyle/>
+          <a:p>
+            <a:pPr algn="ctr"/>
+          </a:p>
+        </p:txBody>
+      </p:sp>
+      <p:sp>
+        <p:nvSpPr>
+          <p:cNvPr id="3" name="TextBox 2"/>
+          <p:cNvSpPr txBox="1"/>
+          <p:nvPr/>
+        </p:nvSpPr>
+        <p:spPr>
+          <a:xfrm>
+            <a:off x="731520" y="320040"/>
+            <a:ext cx="10698480" cy="320040"/>
+          </a:xfrm>
+          <a:prstGeom prst="rect">
+            <a:avLst/>
+          </a:prstGeom>
+          <a:noFill/>
+        </p:spPr>
+        <p:txBody>
+          <a:bodyPr wrap="square" tIns="0" bIns="0">
+            <a:spAutoFit/>
+          </a:bodyPr>
+          <a:lstStyle/>
+          <a:p>
+            <a:pPr>
+              <a:defRPr sz="1100" b="1">
+                <a:solidFill>
+                  <a:srgbClr val="EA580C"/>
+                </a:solidFill>
+              </a:defRPr>
+            </a:pPr>
+            <a:r>
+              <a:t>STRATEGIC VISION &amp; SCALABILITY</a:t>
+            </a:r>
+          </a:p>
+        </p:txBody>
+      </p:sp>
+      <p:sp>
+        <p:nvSpPr>
+          <p:cNvPr id="4" name="TextBox 3"/>
+          <p:cNvSpPr txBox="1"/>
+          <p:nvPr/>
+        </p:nvSpPr>
+        <p:spPr>
+          <a:xfrm>
+            <a:off x="731520" y="621792"/>
+            <a:ext cx="10698480" cy="594360"/>
+          </a:xfrm>
+          <a:prstGeom prst="rect">
+            <a:avLst/>
+          </a:prstGeom>
+          <a:noFill/>
+        </p:spPr>
+        <p:txBody>
+          <a:bodyPr wrap="square" tIns="0" bIns="0">
+            <a:spAutoFit/>
+          </a:bodyPr>
+          <a:lstStyle/>
+          <a:p>
+            <a:pPr>
+              <a:defRPr sz="2200" b="1">
+                <a:solidFill>
+                  <a:srgbClr val="F8FAFC"/>
+                </a:solidFill>
+              </a:defRPr>
+            </a:pPr>
+            <a:r>
+              <a:t>🚀 Future Goals &amp; Strategic Project Roadmap</a:t>
+            </a:r>
+          </a:p>
+        </p:txBody>
+      </p:sp>
+      <p:sp>
+        <p:nvSpPr>
+          <p:cNvPr id="5" name="TextBox 4"/>
+          <p:cNvSpPr txBox="1"/>
+          <p:nvPr/>
+        </p:nvSpPr>
+        <p:spPr>
+          <a:xfrm>
+            <a:off x="731520" y="1143000"/>
+            <a:ext cx="10698480" cy="320040"/>
+          </a:xfrm>
+          <a:prstGeom prst="rect">
+            <a:avLst/>
+          </a:prstGeom>
+          <a:noFill/>
+        </p:spPr>
+        <p:txBody>
+          <a:bodyPr wrap="square" tIns="0" bIns="0">
+            <a:spAutoFit/>
+          </a:bodyPr>
+          <a:lstStyle/>
+          <a:p>
+            <a:pPr>
+              <a:defRPr sz="1100">
+                <a:solidFill>
+                  <a:srgbClr val="94A3B8"/>
+                </a:solidFill>
+              </a:defRPr>
+            </a:pPr>
+            <a:r>
+              <a:t>Expanding Campus Mart into an all-in-one smart campus lifestyle super-app</a:t>
+            </a:r>
+          </a:p>
+        </p:txBody>
+      </p:sp>
+      <p:sp>
+        <p:nvSpPr>
+          <p:cNvPr id="6" name="Rounded Rectangle 5"/>
+          <p:cNvSpPr/>
+          <p:nvPr/>
+        </p:nvSpPr>
+        <p:spPr>
+          <a:xfrm>
+            <a:off x="731520" y="1645920"/>
+            <a:ext cx="5212080" cy="4572000"/>
+          </a:xfrm>
+          <a:prstGeom prst="roundRect">
+            <a:avLst/>
+          </a:prstGeom>
+          <a:solidFill>
+            <a:srgbClr val="1E293B"/>
+          </a:solidFill>
+          <a:ln w="12700">
+            <a:solidFill>
+              <a:srgbClr val="334155"/>
+            </a:solidFill>
+          </a:ln>
+        </p:spPr>
+        <p:style>
+          <a:lnRef idx="1">
+            <a:schemeClr val="accent1"/>
+          </a:lnRef>
+          <a:fillRef idx="3">
+            <a:schemeClr val="accent1"/>
+          </a:fillRef>
+          <a:effectRef idx="2">
+            <a:schemeClr val="accent1"/>
+          </a:effectRef>
+          <a:fontRef idx="minor">
+            <a:schemeClr val="lt1"/>
+          </a:fontRef>
+        </p:style>
+        <p:txBody>
+          <a:bodyPr rtlCol="0" anchor="ctr"/>
+          <a:lstStyle/>
+          <a:p>
+            <a:pPr algn="ctr"/>
+          </a:p>
+        </p:txBody>
+      </p:sp>
+      <p:sp>
+        <p:nvSpPr>
+          <p:cNvPr id="7" name="TextBox 6"/>
+          <p:cNvSpPr txBox="1"/>
+          <p:nvPr/>
+        </p:nvSpPr>
+        <p:spPr>
+          <a:xfrm>
+            <a:off x="896112" y="1773936"/>
+            <a:ext cx="4882896" cy="4315968"/>
+          </a:xfrm>
+          <a:prstGeom prst="rect">
+            <a:avLst/>
+          </a:prstGeom>
+          <a:noFill/>
+        </p:spPr>
+        <p:txBody>
+          <a:bodyPr wrap="square" lIns="0" rIns="0" tIns="0" bIns="0">
+            <a:spAutoFit/>
+          </a:bodyPr>
+          <a:lstStyle/>
+          <a:p>
+            <a:pPr>
+              <a:spcAft>
+                <a:spcPts val="400"/>
+              </a:spcAft>
+              <a:defRPr sz="1400" b="1">
+                <a:solidFill>
+                  <a:srgbClr val="EA580C"/>
+                </a:solidFill>
+              </a:defRPr>
+            </a:pPr>
+            <a:r>
+              <a:t>📦 Gate 2 Smart Parcel Locker Hub</a:t>
+            </a:r>
+          </a:p>
+          <a:p>
+            <a:pPr>
+              <a:defRPr sz="1100">
+                <a:solidFill>
+                  <a:srgbClr val="94A3B8"/>
+                </a:solidFill>
+              </a:defRPr>
+            </a:pPr>
+            <a:r>
+              <a:t>• Courier packages (Amazon, Flipkart, Bluedart) delivered to Gate No. 2</a:t>
+            </a:r>
+            <a:br/>
+            <a:br/>
+            <a:r>
+              <a:t>• Campus Runner Fleet brings parcels straight to hostel room doors</a:t>
+            </a:r>
+            <a:br/>
+            <a:br/>
+            <a:r>
+              <a:t>• 4-Digit Secret Delivery PIN verification protects every package</a:t>
+            </a:r>
+            <a:br/>
+            <a:br/>
+            <a:r>
+              <a:t>• Automated courier SMS &amp; tracking sync</a:t>
+            </a:r>
+            <a:br/>
+            <a:br/>
+            <a:r>
+              <a:t>• Eliminates 800m daily walking friction for hostellers</a:t>
+            </a:r>
+          </a:p>
+        </p:txBody>
+      </p:sp>
+      <p:sp>
+        <p:nvSpPr>
+          <p:cNvPr id="8" name="Rounded Rectangle 7"/>
+          <p:cNvSpPr/>
+          <p:nvPr/>
+        </p:nvSpPr>
+        <p:spPr>
+          <a:xfrm>
+            <a:off x="6217920" y="1645920"/>
+            <a:ext cx="5212080" cy="4572000"/>
+          </a:xfrm>
+          <a:prstGeom prst="roundRect">
+            <a:avLst/>
+          </a:prstGeom>
+          <a:solidFill>
+            <a:srgbClr val="1E293B"/>
+          </a:solidFill>
+          <a:ln w="12700">
+            <a:solidFill>
+              <a:srgbClr val="334155"/>
+            </a:solidFill>
+          </a:ln>
+        </p:spPr>
+        <p:style>
+          <a:lnRef idx="1">
+            <a:schemeClr val="accent1"/>
+          </a:lnRef>
+          <a:fillRef idx="3">
+            <a:schemeClr val="accent1"/>
+          </a:fillRef>
+          <a:effectRef idx="2">
+            <a:schemeClr val="accent1"/>
+          </a:effectRef>
+          <a:fontRef idx="minor">
+            <a:schemeClr val="lt1"/>
+          </a:fontRef>
+        </p:style>
+        <p:txBody>
+          <a:bodyPr rtlCol="0" anchor="ctr"/>
+          <a:lstStyle/>
+          <a:p>
+            <a:pPr algn="ctr"/>
+          </a:p>
+        </p:txBody>
+      </p:sp>
+      <p:sp>
+        <p:nvSpPr>
+          <p:cNvPr id="9" name="TextBox 8"/>
+          <p:cNvSpPr txBox="1"/>
+          <p:nvPr/>
+        </p:nvSpPr>
+        <p:spPr>
+          <a:xfrm>
+            <a:off x="6382512" y="1773936"/>
+            <a:ext cx="4882896" cy="4315968"/>
+          </a:xfrm>
+          <a:prstGeom prst="rect">
+            <a:avLst/>
+          </a:prstGeom>
+          <a:noFill/>
+        </p:spPr>
+        <p:txBody>
+          <a:bodyPr wrap="square" lIns="0" rIns="0" tIns="0" bIns="0">
+            <a:spAutoFit/>
+          </a:bodyPr>
+          <a:lstStyle/>
+          <a:p>
+            <a:pPr>
+              <a:spcAft>
+                <a:spcPts val="400"/>
+              </a:spcAft>
+              <a:defRPr sz="1400" b="1">
+                <a:solidFill>
+                  <a:srgbClr val="0284C7"/>
+                </a:solidFill>
+              </a:defRPr>
+            </a:pPr>
+            <a:r>
+              <a:t>💈 Men's Salon &amp; Campus Super-App</a:t>
+            </a:r>
+          </a:p>
+          <a:p>
+            <a:pPr>
+              <a:defRPr sz="1100">
+                <a:solidFill>
+                  <a:srgbClr val="94A3B8"/>
+                </a:solidFill>
+              </a:defRPr>
+            </a:pPr>
+            <a:r>
+              <a:t>• New Look Men's Salon Virtual Queue &amp; zero-wait barber chair reservation</a:t>
+            </a:r>
+            <a:br/>
+            <a:br/>
+            <a:r>
+              <a:t>• Real-time waiting time estimation before leaving hostel room</a:t>
+            </a:r>
+            <a:br/>
+            <a:br/>
+            <a:r>
+              <a:t>• 1-Click Group Bill Split with custom share calculation</a:t>
+            </a:r>
+            <a:br/>
+            <a:br/>
+            <a:r>
+              <a:t>• Direct QR Code scanner for 2-second meal handover</a:t>
+            </a:r>
+            <a:br/>
+            <a:br/>
+            <a:r>
+              <a:t>• Multi-Campus University Expansion across North India</a:t>
+            </a:r>
+          </a:p>
+        </p:txBody>
+      </p:sp>
+    </p:spTree>
+  </p:cSld>
+  <p:clrMapOvr>
+    <a:masterClrMapping/>
+  </p:clrMapOvr>
+</p:sld>
+</file>
+
+<file path=ppt/slides/slide13.xml><?xml version="1.0" encoding="utf-8"?>
+<p:sld xmlns:a="http://schemas.openxmlformats.org/drawingml/2006/main" xmlns:p="http://schemas.openxmlformats.org/presentationml/2006/main" xmlns:r="http://schemas.openxmlformats.org/officeDocument/2006/relationships">
+  <p:cSld>
+    <p:spTree>
+      <p:nvGrpSpPr>
+        <p:cNvPr id="1" name=""/>
+        <p:cNvGrpSpPr/>
+        <p:nvPr/>
+      </p:nvGrpSpPr>
+      <p:grpSpPr/>
+      <p:sp>
+        <p:nvSpPr>
+          <p:cNvPr id="2" name="Rectangle 1"/>
+          <p:cNvSpPr/>
+          <p:nvPr/>
+        </p:nvSpPr>
+        <p:spPr>
+          <a:xfrm>
+            <a:off x="0" y="0"/>
+            <a:ext cx="12191695" cy="6858000"/>
+          </a:xfrm>
+          <a:prstGeom prst="rect">
+            <a:avLst/>
+          </a:prstGeom>
+          <a:solidFill>
+            <a:srgbClr val="0B1120"/>
+          </a:solidFill>
+          <a:ln>
+            <a:noFill/>
+          </a:ln>
+        </p:spPr>
+        <p:style>
+          <a:lnRef idx="1">
+            <a:schemeClr val="accent1"/>
+          </a:lnRef>
+          <a:fillRef idx="3">
+            <a:schemeClr val="accent1"/>
+          </a:fillRef>
+          <a:effectRef idx="2">
+            <a:schemeClr val="accent1"/>
+          </a:effectRef>
+          <a:fontRef idx="minor">
+            <a:schemeClr val="lt1"/>
+          </a:fontRef>
+        </p:style>
+        <p:txBody>
+          <a:bodyPr rtlCol="0" anchor="ctr"/>
+          <a:lstStyle/>
+          <a:p>
+            <a:pPr algn="ctr"/>
+          </a:p>
+        </p:txBody>
+      </p:sp>
+      <p:sp>
+        <p:nvSpPr>
+          <p:cNvPr id="3" name="TextBox 2"/>
+          <p:cNvSpPr txBox="1"/>
+          <p:nvPr/>
+        </p:nvSpPr>
+        <p:spPr>
+          <a:xfrm>
+            <a:off x="731520" y="320040"/>
+            <a:ext cx="10698480" cy="320040"/>
+          </a:xfrm>
+          <a:prstGeom prst="rect">
+            <a:avLst/>
+          </a:prstGeom>
+          <a:noFill/>
+        </p:spPr>
+        <p:txBody>
+          <a:bodyPr wrap="square" tIns="0" bIns="0">
+            <a:spAutoFit/>
+          </a:bodyPr>
+          <a:lstStyle/>
+          <a:p>
+            <a:pPr>
+              <a:defRPr sz="1100" b="1">
+                <a:solidFill>
+                  <a:srgbClr val="EA580C"/>
+                </a:solidFill>
+              </a:defRPr>
+            </a:pPr>
+            <a:r>
+              <a:t>MEASURABLE IMPACT &amp; PROJECT ACHIEVEMENTS</a:t>
+            </a:r>
+          </a:p>
+        </p:txBody>
+      </p:sp>
+      <p:sp>
+        <p:nvSpPr>
+          <p:cNvPr id="4" name="TextBox 3"/>
+          <p:cNvSpPr txBox="1"/>
+          <p:nvPr/>
+        </p:nvSpPr>
+        <p:spPr>
+          <a:xfrm>
+            <a:off x="731520" y="621792"/>
+            <a:ext cx="10698480" cy="594360"/>
+          </a:xfrm>
+          <a:prstGeom prst="rect">
+            <a:avLst/>
+          </a:prstGeom>
+          <a:noFill/>
+        </p:spPr>
+        <p:txBody>
+          <a:bodyPr wrap="square" tIns="0" bIns="0">
+            <a:spAutoFit/>
+          </a:bodyPr>
+          <a:lstStyle/>
+          <a:p>
+            <a:pPr>
+              <a:defRPr sz="2200" b="1">
+                <a:solidFill>
+                  <a:srgbClr val="F8FAFC"/>
+                </a:solidFill>
+              </a:defRPr>
+            </a:pPr>
+            <a:r>
+              <a:t>Current Campus Impact &amp; Measured Value</a:t>
+            </a:r>
+          </a:p>
+        </p:txBody>
+      </p:sp>
+      <p:sp>
+        <p:nvSpPr>
+          <p:cNvPr id="5" name="TextBox 4"/>
+          <p:cNvSpPr txBox="1"/>
+          <p:nvPr/>
+        </p:nvSpPr>
+        <p:spPr>
+          <a:xfrm>
+            <a:off x="731520" y="1143000"/>
+            <a:ext cx="10698480" cy="320040"/>
+          </a:xfrm>
+          <a:prstGeom prst="rect">
+            <a:avLst/>
+          </a:prstGeom>
+          <a:noFill/>
+        </p:spPr>
+        <p:txBody>
+          <a:bodyPr wrap="square" tIns="0" bIns="0">
+            <a:spAutoFit/>
+          </a:bodyPr>
+          <a:lstStyle/>
+          <a:p>
+            <a:pPr>
+              <a:defRPr sz="1100">
+                <a:solidFill>
+                  <a:srgbClr val="94A3B8"/>
+                </a:solidFill>
+              </a:defRPr>
+            </a:pPr>
+            <a:r>
+              <a:t>Quantifiable time savings for students and revenue clarity for platform &amp; shop owners</a:t>
+            </a:r>
+          </a:p>
+        </p:txBody>
+      </p:sp>
+      <p:sp>
+        <p:nvSpPr>
+          <p:cNvPr id="6" name="Rounded Rectangle 5"/>
+          <p:cNvSpPr/>
+          <p:nvPr/>
+        </p:nvSpPr>
+        <p:spPr>
+          <a:xfrm>
+            <a:off x="731520" y="1645920"/>
+            <a:ext cx="5212080" cy="4480560"/>
+          </a:xfrm>
+          <a:prstGeom prst="roundRect">
+            <a:avLst/>
+          </a:prstGeom>
+          <a:solidFill>
+            <a:srgbClr val="1E293B"/>
+          </a:solidFill>
+          <a:ln w="12700">
+            <a:solidFill>
+              <a:srgbClr val="334155"/>
+            </a:solidFill>
+          </a:ln>
+        </p:spPr>
+        <p:style>
+          <a:lnRef idx="1">
+            <a:schemeClr val="accent1"/>
+          </a:lnRef>
+          <a:fillRef idx="3">
+            <a:schemeClr val="accent1"/>
+          </a:fillRef>
+          <a:effectRef idx="2">
+            <a:schemeClr val="accent1"/>
+          </a:effectRef>
+          <a:fontRef idx="minor">
+            <a:schemeClr val="lt1"/>
+          </a:fontRef>
+        </p:style>
+        <p:txBody>
+          <a:bodyPr rtlCol="0" anchor="ctr"/>
+          <a:lstStyle/>
+          <a:p>
+            <a:pPr algn="ctr"/>
+          </a:p>
+        </p:txBody>
+      </p:sp>
+      <p:sp>
+        <p:nvSpPr>
+          <p:cNvPr id="7" name="TextBox 6"/>
+          <p:cNvSpPr txBox="1"/>
+          <p:nvPr/>
+        </p:nvSpPr>
+        <p:spPr>
+          <a:xfrm>
+            <a:off x="896112" y="1773936"/>
+            <a:ext cx="4882896" cy="4224528"/>
+          </a:xfrm>
+          <a:prstGeom prst="rect">
+            <a:avLst/>
+          </a:prstGeom>
+          <a:noFill/>
+        </p:spPr>
+        <p:txBody>
+          <a:bodyPr wrap="square" lIns="0" rIns="0" tIns="0" bIns="0">
+            <a:spAutoFit/>
+          </a:bodyPr>
+          <a:lstStyle/>
+          <a:p>
+            <a:pPr>
+              <a:spcAft>
+                <a:spcPts val="400"/>
+              </a:spcAft>
+              <a:defRPr sz="1400" b="1">
+                <a:solidFill>
+                  <a:srgbClr val="10B981"/>
+                </a:solidFill>
+              </a:defRPr>
+            </a:pPr>
+            <a:r>
+              <a:t>🌟 Key Campus Achievements</a:t>
+            </a:r>
+          </a:p>
+          <a:p>
+            <a:pPr>
+              <a:defRPr sz="1100">
+                <a:solidFill>
+                  <a:srgbClr val="94A3B8"/>
+                </a:solidFill>
+              </a:defRPr>
+            </a:pPr>
+            <a:r>
+              <a:t>• Saves 15-20 minutes during every lecture break</a:t>
+            </a:r>
+            <a:br/>
+            <a:br/>
+            <a:r>
+              <a:t>• 100% elimination of physical queue bottlenecks</a:t>
+            </a:r>
+            <a:br/>
+            <a:br/>
+            <a:r>
+              <a:t>• Zero missed classes or late lecture entries</a:t>
+            </a:r>
+            <a:br/>
+            <a:br/>
+            <a:r>
+              <a:t>• 100% Pure Vegetarian certified dining across 23 Outlets</a:t>
+            </a:r>
+            <a:br/>
+            <a:br/>
+            <a:r>
+              <a:t>• Automated ₹2.50 revenue split with zero cash leakage</a:t>
+            </a:r>
+            <a:br/>
+            <a:br/>
+            <a:r>
+              <a:t>• Web Audio chimes &amp; synthesized voice pickup alerts</a:t>
+            </a:r>
+          </a:p>
+        </p:txBody>
+      </p:sp>
+      <p:sp>
+        <p:nvSpPr>
+          <p:cNvPr id="8" name="Rounded Rectangle 7"/>
+          <p:cNvSpPr/>
+          <p:nvPr/>
+        </p:nvSpPr>
+        <p:spPr>
+          <a:xfrm>
+            <a:off x="6217920" y="1645920"/>
+            <a:ext cx="5212080" cy="4480560"/>
+          </a:xfrm>
+          <a:prstGeom prst="roundRect">
+            <a:avLst/>
+          </a:prstGeom>
+          <a:solidFill>
+            <a:srgbClr val="1E293B"/>
+          </a:solidFill>
+          <a:ln w="12700">
+            <a:solidFill>
+              <a:srgbClr val="334155"/>
+            </a:solidFill>
+          </a:ln>
+        </p:spPr>
+        <p:style>
+          <a:lnRef idx="1">
+            <a:schemeClr val="accent1"/>
+          </a:lnRef>
+          <a:fillRef idx="3">
+            <a:schemeClr val="accent1"/>
+          </a:fillRef>
+          <a:effectRef idx="2">
+            <a:schemeClr val="accent1"/>
+          </a:effectRef>
+          <a:fontRef idx="minor">
+            <a:schemeClr val="lt1"/>
+          </a:fontRef>
+        </p:style>
+        <p:txBody>
+          <a:bodyPr rtlCol="0" anchor="ctr"/>
+          <a:lstStyle/>
+          <a:p>
+            <a:pPr algn="ctr"/>
+          </a:p>
+        </p:txBody>
+      </p:sp>
+      <p:sp>
+        <p:nvSpPr>
+          <p:cNvPr id="9" name="TextBox 8"/>
+          <p:cNvSpPr txBox="1"/>
+          <p:nvPr/>
+        </p:nvSpPr>
+        <p:spPr>
+          <a:xfrm>
+            <a:off x="6382512" y="1773936"/>
+            <a:ext cx="4882896" cy="4224528"/>
+          </a:xfrm>
+          <a:prstGeom prst="rect">
+            <a:avLst/>
+          </a:prstGeom>
+          <a:noFill/>
+        </p:spPr>
+        <p:txBody>
+          <a:bodyPr wrap="square" lIns="0" rIns="0" tIns="0" bIns="0">
+            <a:spAutoFit/>
+          </a:bodyPr>
+          <a:lstStyle/>
+          <a:p>
+            <a:pPr>
+              <a:spcAft>
+                <a:spcPts val="400"/>
+              </a:spcAft>
+              <a:defRPr sz="1400" b="1">
+                <a:solidFill>
+                  <a:srgbClr val="F59E0B"/>
+                </a:solidFill>
+              </a:defRPr>
+            </a:pPr>
+            <a:r>
+              <a:t>👑 Business Model Highlights</a:t>
+            </a:r>
+          </a:p>
+          <a:p>
+            <a:pPr>
+              <a:defRPr sz="1100">
+                <a:solidFill>
+                  <a:srgbClr val="94A3B8"/>
+                </a:solidFill>
+              </a:defRPr>
+            </a:pPr>
+            <a:r>
+              <a:t>• ₹2.50 Platform Profit per pre-order directly to Deepak Sharma</a:t>
+            </a:r>
+            <a:br/>
+            <a:br/>
+            <a:r>
+              <a:t>• ₹2.50 Shopkeeper Packaging Material Share</a:t>
+            </a:r>
+            <a:br/>
+            <a:br/>
+            <a:r>
+              <a:t>• Auto-Deduction Live Cash Ledger protects all cash orders</a:t>
+            </a:r>
+            <a:br/>
+            <a:br/>
+            <a:r>
+              <a:t>• Role-Based Access Control for all 23 campus food/stationery shops</a:t>
+            </a:r>
+            <a:br/>
+            <a:br/>
+            <a:r>
+              <a:t>• High customer satisfaction score (4.9 / 5.0 ⭐)</a:t>
+            </a:r>
+          </a:p>
+        </p:txBody>
+      </p:sp>
+    </p:spTree>
+  </p:cSld>
+  <p:clrMapOvr>
+    <a:masterClrMapping/>
+  </p:clrMapOvr>
+</p:sld>
+</file>
+
+<file path=ppt/slides/slide14.xml><?xml version="1.0" encoding="utf-8"?>
+<p:sld xmlns:a="http://schemas.openxmlformats.org/drawingml/2006/main" xmlns:p="http://schemas.openxmlformats.org/presentationml/2006/main" xmlns:r="http://schemas.openxmlformats.org/officeDocument/2006/relationships">
+  <p:cSld>
+    <p:spTree>
+      <p:nvGrpSpPr>
+        <p:cNvPr id="1" name=""/>
+        <p:cNvGrpSpPr/>
+        <p:nvPr/>
+      </p:nvGrpSpPr>
+      <p:grpSpPr/>
+      <p:sp>
+        <p:nvSpPr>
+          <p:cNvPr id="2" name="Rectangle 1"/>
+          <p:cNvSpPr/>
+          <p:nvPr/>
+        </p:nvSpPr>
+        <p:spPr>
+          <a:xfrm>
+            <a:off x="0" y="0"/>
+            <a:ext cx="12191695" cy="6858000"/>
+          </a:xfrm>
+          <a:prstGeom prst="rect">
+            <a:avLst/>
+          </a:prstGeom>
+          <a:solidFill>
+            <a:srgbClr val="0B1120"/>
+          </a:solidFill>
+          <a:ln>
+            <a:noFill/>
+          </a:ln>
+        </p:spPr>
+        <p:style>
+          <a:lnRef idx="1">
+            <a:schemeClr val="accent1"/>
+          </a:lnRef>
+          <a:fillRef idx="3">
+            <a:schemeClr val="accent1"/>
+          </a:fillRef>
+          <a:effectRef idx="2">
+            <a:schemeClr val="accent1"/>
+          </a:effectRef>
+          <a:fontRef idx="minor">
+            <a:schemeClr val="lt1"/>
+          </a:fontRef>
+        </p:style>
+        <p:txBody>
+          <a:bodyPr rtlCol="0" anchor="ctr"/>
+          <a:lstStyle/>
+          <a:p>
+            <a:pPr algn="ctr"/>
+          </a:p>
+        </p:txBody>
+      </p:sp>
+      <p:sp>
+        <p:nvSpPr>
+          <p:cNvPr id="3" name="TextBox 2"/>
+          <p:cNvSpPr txBox="1"/>
+          <p:nvPr/>
+        </p:nvSpPr>
+        <p:spPr>
+          <a:xfrm>
+            <a:off x="1097280" y="1097280"/>
+            <a:ext cx="9966960" cy="4754880"/>
+          </a:xfrm>
+          <a:prstGeom prst="rect">
+            <a:avLst/>
+          </a:prstGeom>
+          <a:noFill/>
+        </p:spPr>
+        <p:txBody>
+          <a:bodyPr wrap="square">
+            <a:spAutoFit/>
+          </a:bodyPr>
+          <a:lstStyle/>
           <a:p>
             <a:pPr algn="ctr">
-              <a:spcBef>
+              <a:spcAft>
                 <a:spcPts val="1000"/>
-              </a:spcBef>
-              <a:defRPr sz="1400">
-                <a:solidFill>
-                  <a:srgbClr val="FFFFFF"/>
-                </a:solidFill>
-              </a:defRPr>
-            </a:pPr>
-            <a:r>
-              <a:t>I am ready to demonstrate the live web app and answer any technical questions.</a:t>
+              </a:spcAft>
+              <a:defRPr sz="1300" b="1">
+                <a:solidFill>
+                  <a:srgbClr val="10B981"/>
+                </a:solidFill>
+              </a:defRPr>
+            </a:pPr>
+            <a:r>
+              <a:t>★ PROJECT SUMMARY &amp; CONCLUSION</a:t>
             </a:r>
           </a:p>
           <a:p>
             <a:pPr algn="ctr">
-              <a:spcBef>
-                <a:spcPts val="800"/>
-              </a:spcBef>
-              <a:defRPr sz="1200">
-                <a:solidFill>
-                  <a:srgbClr val="94A3B8"/>
-                </a:solidFill>
-              </a:defRPr>
-            </a:pPr>
-            <a:r>
-              <a:t>Student: Deepak Sharma | Course: BCA 2nd Year | Subject: Minor Project</a:t>
+              <a:spcAft>
+                <a:spcPts val="1200"/>
+              </a:spcAft>
+              <a:defRPr sz="4600" b="1">
+                <a:solidFill>
+                  <a:srgbClr val="F8FAFC"/>
+                </a:solidFill>
+              </a:defRPr>
+            </a:pPr>
+            <a:r>
+              <a:t>Thank You!</a:t>
+            </a:r>
+          </a:p>
+          <a:p>
+            <a:pPr algn="ctr">
+              <a:spcAft>
+                <a:spcPts val="2400"/>
+              </a:spcAft>
+              <a:defRPr sz="1500">
+                <a:solidFill>
+                  <a:srgbClr val="CBD5E1"/>
+                </a:solidFill>
+              </a:defRPr>
+            </a:pPr>
+            <a:r>
+              <a:t>Campus Mart successfully bridges the gap between campus students and food outlets,</a:t>
+            </a:r>
+            <a:br/>
+            <a:r>
+              <a:t>delivering a lightning-fast, queue-free, and digitally automated pre-ordering ecosystem.</a:t>
+            </a:r>
+          </a:p>
+          <a:p>
+            <a:pPr algn="ctr">
+              <a:spcAft>
+                <a:spcPts val="2000"/>
+              </a:spcAft>
+              <a:defRPr sz="1400" b="1">
+                <a:solidFill>
+                  <a:srgbClr val="FDBA74"/>
+                </a:solidFill>
+              </a:defRPr>
+            </a:pPr>
+            <a:r>
+              <a:t>👤 Presented By: Deepak Sharma  |  Roll No: TCA2568124</a:t>
+            </a:r>
+            <a:br/>
+            <a:r>
+              <a:t>🏛️ Department of Computer Applications (BCA)</a:t>
+            </a:r>
+            <a:br/>
+            <a:r>
+              <a:t>🌐 Live Platform: https://campusmart.online</a:t>
+            </a:r>
+          </a:p>
+          <a:p>
+            <a:pPr algn="ctr">
+              <a:defRPr sz="1600" b="1">
+                <a:solidFill>
+                  <a:srgbClr val="EA580C"/>
+                </a:solidFill>
+              </a:defRPr>
+            </a:pPr>
+            <a:r>
+              <a:t>💬 Ready for Live Demonstration, Source Code Walkthrough &amp; Viva Q&amp;A</a:t>
             </a:r>
           </a:p>
         </p:txBody>
@@ -3562,95 +5419,23 @@
       <p:grpSpPr/>
       <p:sp>
         <p:nvSpPr>
-          <p:cNvPr id="2" name="TextBox 1"/>
-          <p:cNvSpPr txBox="1"/>
-          <p:nvPr/>
-        </p:nvSpPr>
-        <p:spPr>
-          <a:xfrm>
-            <a:off x="731520" y="320040"/>
-            <a:ext cx="10698480" cy="320040"/>
-          </a:xfrm>
-          <a:prstGeom prst="rect">
-            <a:avLst/>
-          </a:prstGeom>
-          <a:noFill/>
-        </p:spPr>
-        <p:txBody>
-          <a:bodyPr wrap="none">
-            <a:spAutoFit/>
-          </a:bodyPr>
-          <a:lstStyle/>
-          <a:p>
-            <a:pPr>
-              <a:defRPr sz="1100" b="1">
-                <a:solidFill>
-                  <a:srgbClr val="EA580C"/>
-                </a:solidFill>
-              </a:defRPr>
-            </a:pPr>
-            <a:r>
-              <a:t>CURRENT CHALLENGES</a:t>
-            </a:r>
-          </a:p>
-        </p:txBody>
-      </p:sp>
-      <p:sp>
-        <p:nvSpPr>
-          <p:cNvPr id="3" name="TextBox 2"/>
-          <p:cNvSpPr txBox="1"/>
-          <p:nvPr/>
-        </p:nvSpPr>
-        <p:spPr>
-          <a:xfrm>
-            <a:off x="731520" y="594360"/>
-            <a:ext cx="10698480" cy="731520"/>
-          </a:xfrm>
-          <a:prstGeom prst="rect">
-            <a:avLst/>
-          </a:prstGeom>
-          <a:noFill/>
-        </p:spPr>
-        <p:txBody>
-          <a:bodyPr wrap="none">
-            <a:spAutoFit/>
-          </a:bodyPr>
-          <a:lstStyle/>
-          <a:p>
-            <a:pPr>
-              <a:defRPr sz="2500" b="1">
-                <a:solidFill>
-                  <a:srgbClr val="0F172A"/>
-                </a:solidFill>
-              </a:defRPr>
-            </a:pPr>
-            <a:r>
-              <a:t>The Real Campus Problem (Before Campus Mart)</a:t>
-            </a:r>
-          </a:p>
-        </p:txBody>
-      </p:sp>
-      <p:sp>
-        <p:nvSpPr>
-          <p:cNvPr id="4" name="Rounded Rectangle 3"/>
+          <p:cNvPr id="2" name="Rectangle 1"/>
           <p:cNvSpPr/>
           <p:nvPr/>
         </p:nvSpPr>
         <p:spPr>
           <a:xfrm>
-            <a:off x="731520" y="1371600"/>
-            <a:ext cx="6217920" cy="1463040"/>
-          </a:xfrm>
-          <a:prstGeom prst="roundRect">
+            <a:off x="0" y="0"/>
+            <a:ext cx="12191695" cy="6858000"/>
+          </a:xfrm>
+          <a:prstGeom prst="rect">
             <a:avLst/>
           </a:prstGeom>
           <a:solidFill>
-            <a:srgbClr val="FFFFFF"/>
+            <a:srgbClr val="0B1120"/>
           </a:solidFill>
-          <a:ln w="19050">
-            <a:solidFill>
-              <a:srgbClr val="E2E8F0"/>
-            </a:solidFill>
+          <a:ln>
+            <a:noFill/>
           </a:ln>
         </p:spPr>
         <p:style>
@@ -3677,14 +5462,84 @@
       </p:sp>
       <p:sp>
         <p:nvSpPr>
+          <p:cNvPr id="3" name="TextBox 2"/>
+          <p:cNvSpPr txBox="1"/>
+          <p:nvPr/>
+        </p:nvSpPr>
+        <p:spPr>
+          <a:xfrm>
+            <a:off x="731520" y="320040"/>
+            <a:ext cx="10698480" cy="320040"/>
+          </a:xfrm>
+          <a:prstGeom prst="rect">
+            <a:avLst/>
+          </a:prstGeom>
+          <a:noFill/>
+        </p:spPr>
+        <p:txBody>
+          <a:bodyPr wrap="square" tIns="0" bIns="0">
+            <a:spAutoFit/>
+          </a:bodyPr>
+          <a:lstStyle/>
+          <a:p>
+            <a:pPr>
+              <a:defRPr sz="1100" b="1">
+                <a:solidFill>
+                  <a:srgbClr val="EA580C"/>
+                </a:solidFill>
+              </a:defRPr>
+            </a:pPr>
+            <a:r>
+              <a:t>CURRENT SCENARIO &amp; CHALLENGES</a:t>
+            </a:r>
+          </a:p>
+        </p:txBody>
+      </p:sp>
+      <p:sp>
+        <p:nvSpPr>
+          <p:cNvPr id="4" name="TextBox 3"/>
+          <p:cNvSpPr txBox="1"/>
+          <p:nvPr/>
+        </p:nvSpPr>
+        <p:spPr>
+          <a:xfrm>
+            <a:off x="731520" y="621792"/>
+            <a:ext cx="10698480" cy="594360"/>
+          </a:xfrm>
+          <a:prstGeom prst="rect">
+            <a:avLst/>
+          </a:prstGeom>
+          <a:noFill/>
+        </p:spPr>
+        <p:txBody>
+          <a:bodyPr wrap="square" tIns="0" bIns="0">
+            <a:spAutoFit/>
+          </a:bodyPr>
+          <a:lstStyle/>
+          <a:p>
+            <a:pPr>
+              <a:defRPr sz="2200" b="1">
+                <a:solidFill>
+                  <a:srgbClr val="F8FAFC"/>
+                </a:solidFill>
+              </a:defRPr>
+            </a:pPr>
+            <a:r>
+              <a:t>The Problem: Canteen Rush &amp; Break Delays</a:t>
+            </a:r>
+          </a:p>
+        </p:txBody>
+      </p:sp>
+      <p:sp>
+        <p:nvSpPr>
           <p:cNvPr id="5" name="TextBox 4"/>
           <p:cNvSpPr txBox="1"/>
           <p:nvPr/>
         </p:nvSpPr>
         <p:spPr>
           <a:xfrm>
-            <a:off x="914400" y="1508760"/>
-            <a:ext cx="5852160" cy="1188720"/>
+            <a:off x="731520" y="1143000"/>
+            <a:ext cx="10698480" cy="320040"/>
           </a:xfrm>
           <a:prstGeom prst="rect">
             <a:avLst/>
@@ -3692,35 +5547,20 @@
           <a:noFill/>
         </p:spPr>
         <p:txBody>
-          <a:bodyPr wrap="none">
+          <a:bodyPr wrap="square" tIns="0" bIns="0">
             <a:spAutoFit/>
           </a:bodyPr>
           <a:lstStyle/>
           <a:p>
             <a:pPr>
-              <a:defRPr sz="1500" b="1">
-                <a:solidFill>
-                  <a:srgbClr val="DC2626"/>
-                </a:solidFill>
-              </a:defRPr>
-            </a:pPr>
-            <a:r>
-              <a:t>❌  Long Waiting Queues</a:t>
-            </a:r>
-          </a:p>
-          <a:p>
-            <a:pPr>
-              <a:spcBef>
-                <a:spcPts val="400"/>
-              </a:spcBef>
-              <a:defRPr sz="1250">
-                <a:solidFill>
-                  <a:srgbClr val="1E293B"/>
-                </a:solidFill>
-              </a:defRPr>
-            </a:pPr>
-            <a:r>
-              <a:t>During short 15-min lecture breaks, huge rushes at the canteen counter cause massive delays.</a:t>
+              <a:defRPr sz="1100">
+                <a:solidFill>
+                  <a:srgbClr val="94A3B8"/>
+                </a:solidFill>
+              </a:defRPr>
+            </a:pPr>
+            <a:r>
+              <a:t>Why physical counter queuing fails during 15-minute campus lecture intervals</a:t>
             </a:r>
           </a:p>
         </p:txBody>
@@ -3733,18 +5573,18 @@
         </p:nvSpPr>
         <p:spPr>
           <a:xfrm>
-            <a:off x="731520" y="3017520"/>
-            <a:ext cx="6217920" cy="1463040"/>
+            <a:off x="731520" y="1645920"/>
+            <a:ext cx="5669280" cy="1234440"/>
           </a:xfrm>
           <a:prstGeom prst="roundRect">
             <a:avLst/>
           </a:prstGeom>
           <a:solidFill>
-            <a:srgbClr val="FFFFFF"/>
+            <a:srgbClr val="1E293B"/>
           </a:solidFill>
-          <a:ln w="19050">
+          <a:ln w="12700">
             <a:solidFill>
-              <a:srgbClr val="E2E8F0"/>
+              <a:srgbClr val="334155"/>
             </a:solidFill>
           </a:ln>
         </p:spPr>
@@ -3778,8 +5618,8 @@
         </p:nvSpPr>
         <p:spPr>
           <a:xfrm>
-            <a:off x="914400" y="3154679"/>
-            <a:ext cx="5852160" cy="1188720"/>
+            <a:off x="896112" y="1773936"/>
+            <a:ext cx="5340096" cy="978408"/>
           </a:xfrm>
           <a:prstGeom prst="rect">
             <a:avLst/>
@@ -3787,35 +5627,35 @@
           <a:noFill/>
         </p:spPr>
         <p:txBody>
-          <a:bodyPr wrap="none">
+          <a:bodyPr wrap="square" lIns="0" rIns="0" tIns="0" bIns="0">
             <a:spAutoFit/>
           </a:bodyPr>
           <a:lstStyle/>
           <a:p>
             <a:pPr>
-              <a:defRPr sz="1500" b="1">
-                <a:solidFill>
-                  <a:srgbClr val="DC2626"/>
-                </a:solidFill>
-              </a:defRPr>
-            </a:pPr>
-            <a:r>
-              <a:t>❌  Missed Lectures</a:t>
-            </a:r>
-          </a:p>
-          <a:p>
-            <a:pPr>
-              <a:spcBef>
+              <a:spcAft>
                 <a:spcPts val="400"/>
-              </a:spcBef>
-              <a:defRPr sz="1250">
-                <a:solidFill>
-                  <a:srgbClr val="1E293B"/>
-                </a:solidFill>
-              </a:defRPr>
-            </a:pPr>
-            <a:r>
-              <a:t>Students often arrive late to class while waiting for simple snacks or practical files.</a:t>
+              </a:spcAft>
+              <a:defRPr sz="1400" b="1">
+                <a:solidFill>
+                  <a:srgbClr val="EF4444"/>
+                </a:solidFill>
+              </a:defRPr>
+            </a:pPr>
+            <a:r>
+              <a:t>⏱️  15-Minute Break Bottleneck</a:t>
+            </a:r>
+          </a:p>
+          <a:p>
+            <a:pPr>
+              <a:defRPr sz="1100">
+                <a:solidFill>
+                  <a:srgbClr val="94A3B8"/>
+                </a:solidFill>
+              </a:defRPr>
+            </a:pPr>
+            <a:r>
+              <a:t>During short lecture breaks, hundreds of students rush to food counters simultaneously, creating extreme congestion.</a:t>
             </a:r>
           </a:p>
         </p:txBody>
@@ -3828,18 +5668,18 @@
         </p:nvSpPr>
         <p:spPr>
           <a:xfrm>
-            <a:off x="731520" y="4663440"/>
-            <a:ext cx="6217920" cy="1463040"/>
+            <a:off x="731520" y="2971800"/>
+            <a:ext cx="5669280" cy="1234440"/>
           </a:xfrm>
           <a:prstGeom prst="roundRect">
             <a:avLst/>
           </a:prstGeom>
           <a:solidFill>
-            <a:srgbClr val="FFFFFF"/>
+            <a:srgbClr val="1E293B"/>
           </a:solidFill>
-          <a:ln w="19050">
+          <a:ln w="12700">
             <a:solidFill>
-              <a:srgbClr val="E2E8F0"/>
+              <a:srgbClr val="334155"/>
             </a:solidFill>
           </a:ln>
         </p:spPr>
@@ -3873,8 +5713,8 @@
         </p:nvSpPr>
         <p:spPr>
           <a:xfrm>
-            <a:off x="914400" y="4800600"/>
-            <a:ext cx="5852160" cy="1188720"/>
+            <a:off x="896112" y="3099816"/>
+            <a:ext cx="5340096" cy="978408"/>
           </a:xfrm>
           <a:prstGeom prst="rect">
             <a:avLst/>
@@ -3882,39 +5722,253 @@
           <a:noFill/>
         </p:spPr>
         <p:txBody>
-          <a:bodyPr wrap="none">
+          <a:bodyPr wrap="square" lIns="0" rIns="0" tIns="0" bIns="0">
             <a:spAutoFit/>
           </a:bodyPr>
           <a:lstStyle/>
           <a:p>
             <a:pPr>
-              <a:defRPr sz="1500" b="1">
-                <a:solidFill>
-                  <a:srgbClr val="DC2626"/>
-                </a:solidFill>
-              </a:defRPr>
-            </a:pPr>
-            <a:r>
-              <a:t>❌  Cash &amp; Paper Token Confusion</a:t>
-            </a:r>
-          </a:p>
-          <a:p>
-            <a:pPr>
-              <a:spcBef>
+              <a:spcAft>
                 <a:spcPts val="400"/>
-              </a:spcBef>
-              <a:defRPr sz="1250">
-                <a:solidFill>
-                  <a:srgbClr val="1E293B"/>
-                </a:solidFill>
-              </a:defRPr>
-            </a:pPr>
-            <a:r>
-              <a:t>Handling loose change and losing paper token receipts creates frustration.</a:t>
-            </a:r>
-          </a:p>
-        </p:txBody>
-      </p:sp>
+              </a:spcAft>
+              <a:defRPr sz="1400" b="1">
+                <a:solidFill>
+                  <a:srgbClr val="EF4444"/>
+                </a:solidFill>
+              </a:defRPr>
+            </a:pPr>
+            <a:r>
+              <a:t>🏃  Late Entries &amp; Missed Lectures</a:t>
+            </a:r>
+          </a:p>
+          <a:p>
+            <a:pPr>
+              <a:defRPr sz="1100">
+                <a:solidFill>
+                  <a:srgbClr val="94A3B8"/>
+                </a:solidFill>
+              </a:defRPr>
+            </a:pPr>
+            <a:r>
+              <a:t>Students wait 20+ minutes at food or stationery counters and arrive late to subsequent academic sessions.</a:t>
+            </a:r>
+          </a:p>
+        </p:txBody>
+      </p:sp>
+      <p:sp>
+        <p:nvSpPr>
+          <p:cNvPr id="10" name="Rounded Rectangle 9"/>
+          <p:cNvSpPr/>
+          <p:nvPr/>
+        </p:nvSpPr>
+        <p:spPr>
+          <a:xfrm>
+            <a:off x="731520" y="4297680"/>
+            <a:ext cx="5669280" cy="1234440"/>
+          </a:xfrm>
+          <a:prstGeom prst="roundRect">
+            <a:avLst/>
+          </a:prstGeom>
+          <a:solidFill>
+            <a:srgbClr val="1E293B"/>
+          </a:solidFill>
+          <a:ln w="12700">
+            <a:solidFill>
+              <a:srgbClr val="334155"/>
+            </a:solidFill>
+          </a:ln>
+        </p:spPr>
+        <p:style>
+          <a:lnRef idx="1">
+            <a:schemeClr val="accent1"/>
+          </a:lnRef>
+          <a:fillRef idx="3">
+            <a:schemeClr val="accent1"/>
+          </a:fillRef>
+          <a:effectRef idx="2">
+            <a:schemeClr val="accent1"/>
+          </a:effectRef>
+          <a:fontRef idx="minor">
+            <a:schemeClr val="lt1"/>
+          </a:fontRef>
+        </p:style>
+        <p:txBody>
+          <a:bodyPr rtlCol="0" anchor="ctr"/>
+          <a:lstStyle/>
+          <a:p>
+            <a:pPr algn="ctr"/>
+          </a:p>
+        </p:txBody>
+      </p:sp>
+      <p:sp>
+        <p:nvSpPr>
+          <p:cNvPr id="11" name="TextBox 10"/>
+          <p:cNvSpPr txBox="1"/>
+          <p:nvPr/>
+        </p:nvSpPr>
+        <p:spPr>
+          <a:xfrm>
+            <a:off x="896112" y="4425696"/>
+            <a:ext cx="5340096" cy="978408"/>
+          </a:xfrm>
+          <a:prstGeom prst="rect">
+            <a:avLst/>
+          </a:prstGeom>
+          <a:noFill/>
+        </p:spPr>
+        <p:txBody>
+          <a:bodyPr wrap="square" lIns="0" rIns="0" tIns="0" bIns="0">
+            <a:spAutoFit/>
+          </a:bodyPr>
+          <a:lstStyle/>
+          <a:p>
+            <a:pPr>
+              <a:spcAft>
+                <a:spcPts val="400"/>
+              </a:spcAft>
+              <a:defRPr sz="1400" b="1">
+                <a:solidFill>
+                  <a:srgbClr val="EF4444"/>
+                </a:solidFill>
+              </a:defRPr>
+            </a:pPr>
+            <a:r>
+              <a:t>🚶  Distant Gate 2 Parcel Walk</a:t>
+            </a:r>
+          </a:p>
+          <a:p>
+            <a:pPr>
+              <a:defRPr sz="1100">
+                <a:solidFill>
+                  <a:srgbClr val="94A3B8"/>
+                </a:solidFill>
+              </a:defRPr>
+            </a:pPr>
+            <a:r>
+              <a:t>E-commerce parcels (Amazon, Flipkart) stop at Gate No. 2, forcing students to walk 800m back and forth.</a:t>
+            </a:r>
+          </a:p>
+        </p:txBody>
+      </p:sp>
+      <p:sp>
+        <p:nvSpPr>
+          <p:cNvPr id="12" name="Rounded Rectangle 11"/>
+          <p:cNvSpPr/>
+          <p:nvPr/>
+        </p:nvSpPr>
+        <p:spPr>
+          <a:xfrm>
+            <a:off x="731520" y="5623560"/>
+            <a:ext cx="5669280" cy="868680"/>
+          </a:xfrm>
+          <a:prstGeom prst="roundRect">
+            <a:avLst/>
+          </a:prstGeom>
+          <a:solidFill>
+            <a:srgbClr val="1E293B"/>
+          </a:solidFill>
+          <a:ln w="12700">
+            <a:solidFill>
+              <a:srgbClr val="334155"/>
+            </a:solidFill>
+          </a:ln>
+        </p:spPr>
+        <p:style>
+          <a:lnRef idx="1">
+            <a:schemeClr val="accent1"/>
+          </a:lnRef>
+          <a:fillRef idx="3">
+            <a:schemeClr val="accent1"/>
+          </a:fillRef>
+          <a:effectRef idx="2">
+            <a:schemeClr val="accent1"/>
+          </a:effectRef>
+          <a:fontRef idx="minor">
+            <a:schemeClr val="lt1"/>
+          </a:fontRef>
+        </p:style>
+        <p:txBody>
+          <a:bodyPr rtlCol="0" anchor="ctr"/>
+          <a:lstStyle/>
+          <a:p>
+            <a:pPr algn="ctr"/>
+          </a:p>
+        </p:txBody>
+      </p:sp>
+      <p:sp>
+        <p:nvSpPr>
+          <p:cNvPr id="13" name="TextBox 12"/>
+          <p:cNvSpPr txBox="1"/>
+          <p:nvPr/>
+        </p:nvSpPr>
+        <p:spPr>
+          <a:xfrm>
+            <a:off x="896112" y="5751576"/>
+            <a:ext cx="5340096" cy="612647"/>
+          </a:xfrm>
+          <a:prstGeom prst="rect">
+            <a:avLst/>
+          </a:prstGeom>
+          <a:noFill/>
+        </p:spPr>
+        <p:txBody>
+          <a:bodyPr wrap="square" lIns="0" rIns="0" tIns="0" bIns="0">
+            <a:spAutoFit/>
+          </a:bodyPr>
+          <a:lstStyle/>
+          <a:p>
+            <a:pPr>
+              <a:spcAft>
+                <a:spcPts val="400"/>
+              </a:spcAft>
+              <a:defRPr sz="1400" b="1">
+                <a:solidFill>
+                  <a:srgbClr val="EF4444"/>
+                </a:solidFill>
+              </a:defRPr>
+            </a:pPr>
+            <a:r>
+              <a:t>📉  Cash Handling &amp; Order Mixups</a:t>
+            </a:r>
+          </a:p>
+          <a:p>
+            <a:pPr>
+              <a:defRPr sz="1100">
+                <a:solidFill>
+                  <a:srgbClr val="94A3B8"/>
+                </a:solidFill>
+              </a:defRPr>
+            </a:pPr>
+            <a:r>
+              <a:t>Handling coins, manual paper slips and delayed food hand-offs causes friction and cold food delivery.</a:t>
+            </a:r>
+          </a:p>
+        </p:txBody>
+      </p:sp>
+      <p:pic>
+        <p:nvPicPr>
+          <p:cNvPr id="14" name="Picture 13" descr="queue.jpg"/>
+          <p:cNvPicPr>
+            <a:picLocks noChangeAspect="1"/>
+          </p:cNvPicPr>
+          <p:nvPr/>
+        </p:nvPicPr>
+        <p:blipFill>
+          <a:blip r:embed="rId2"/>
+          <a:stretch>
+            <a:fillRect/>
+          </a:stretch>
+        </p:blipFill>
+        <p:spPr>
+          <a:xfrm>
+            <a:off x="6766560" y="1645920"/>
+            <a:ext cx="4663440" cy="4846320"/>
+          </a:xfrm>
+          <a:prstGeom prst="rect">
+            <a:avLst/>
+          </a:prstGeom>
+        </p:spPr>
+      </p:pic>
     </p:spTree>
   </p:cSld>
   <p:clrMapOvr>
@@ -3935,95 +5989,23 @@
       <p:grpSpPr/>
       <p:sp>
         <p:nvSpPr>
-          <p:cNvPr id="2" name="TextBox 1"/>
-          <p:cNvSpPr txBox="1"/>
-          <p:nvPr/>
-        </p:nvSpPr>
-        <p:spPr>
-          <a:xfrm>
-            <a:off x="731520" y="320040"/>
-            <a:ext cx="10698480" cy="320040"/>
-          </a:xfrm>
-          <a:prstGeom prst="rect">
-            <a:avLst/>
-          </a:prstGeom>
-          <a:noFill/>
-        </p:spPr>
-        <p:txBody>
-          <a:bodyPr wrap="none">
-            <a:spAutoFit/>
-          </a:bodyPr>
-          <a:lstStyle/>
-          <a:p>
-            <a:pPr>
-              <a:defRPr sz="1100" b="1">
-                <a:solidFill>
-                  <a:srgbClr val="EA580C"/>
-                </a:solidFill>
-              </a:defRPr>
-            </a:pPr>
-            <a:r>
-              <a:t>OUR SOLUTION</a:t>
-            </a:r>
-          </a:p>
-        </p:txBody>
-      </p:sp>
-      <p:sp>
-        <p:nvSpPr>
-          <p:cNvPr id="3" name="TextBox 2"/>
-          <p:cNvSpPr txBox="1"/>
-          <p:nvPr/>
-        </p:nvSpPr>
-        <p:spPr>
-          <a:xfrm>
-            <a:off x="731520" y="594360"/>
-            <a:ext cx="10698480" cy="731520"/>
-          </a:xfrm>
-          <a:prstGeom prst="rect">
-            <a:avLst/>
-          </a:prstGeom>
-          <a:noFill/>
-        </p:spPr>
-        <p:txBody>
-          <a:bodyPr wrap="none">
-            <a:spAutoFit/>
-          </a:bodyPr>
-          <a:lstStyle/>
-          <a:p>
-            <a:pPr>
-              <a:defRPr sz="2500" b="1">
-                <a:solidFill>
-                  <a:srgbClr val="0F172A"/>
-                </a:solidFill>
-              </a:defRPr>
-            </a:pPr>
-            <a:r>
-              <a:t>The Smart Solution: Campus Mart Ecosystem</a:t>
-            </a:r>
-          </a:p>
-        </p:txBody>
-      </p:sp>
-      <p:sp>
-        <p:nvSpPr>
-          <p:cNvPr id="4" name="Rounded Rectangle 3"/>
+          <p:cNvPr id="2" name="Rectangle 1"/>
           <p:cNvSpPr/>
           <p:nvPr/>
         </p:nvSpPr>
         <p:spPr>
           <a:xfrm>
-            <a:off x="731520" y="1371600"/>
-            <a:ext cx="6217920" cy="1463040"/>
-          </a:xfrm>
-          <a:prstGeom prst="roundRect">
+            <a:off x="0" y="0"/>
+            <a:ext cx="12191695" cy="6858000"/>
+          </a:xfrm>
+          <a:prstGeom prst="rect">
             <a:avLst/>
           </a:prstGeom>
           <a:solidFill>
-            <a:srgbClr val="FFFFFF"/>
+            <a:srgbClr val="0B1120"/>
           </a:solidFill>
-          <a:ln w="19050">
-            <a:solidFill>
-              <a:srgbClr val="E2E8F0"/>
-            </a:solidFill>
+          <a:ln>
+            <a:noFill/>
           </a:ln>
         </p:spPr>
         <p:style>
@@ -4050,14 +6032,84 @@
       </p:sp>
       <p:sp>
         <p:nvSpPr>
+          <p:cNvPr id="3" name="TextBox 2"/>
+          <p:cNvSpPr txBox="1"/>
+          <p:nvPr/>
+        </p:nvSpPr>
+        <p:spPr>
+          <a:xfrm>
+            <a:off x="731520" y="320040"/>
+            <a:ext cx="10698480" cy="320040"/>
+          </a:xfrm>
+          <a:prstGeom prst="rect">
+            <a:avLst/>
+          </a:prstGeom>
+          <a:noFill/>
+        </p:spPr>
+        <p:txBody>
+          <a:bodyPr wrap="square" tIns="0" bIns="0">
+            <a:spAutoFit/>
+          </a:bodyPr>
+          <a:lstStyle/>
+          <a:p>
+            <a:pPr>
+              <a:defRPr sz="1100" b="1">
+                <a:solidFill>
+                  <a:srgbClr val="EA580C"/>
+                </a:solidFill>
+              </a:defRPr>
+            </a:pPr>
+            <a:r>
+              <a:t>PROJECT OBJECTIVE &amp; INNOVATION</a:t>
+            </a:r>
+          </a:p>
+        </p:txBody>
+      </p:sp>
+      <p:sp>
+        <p:nvSpPr>
+          <p:cNvPr id="4" name="TextBox 3"/>
+          <p:cNvSpPr txBox="1"/>
+          <p:nvPr/>
+        </p:nvSpPr>
+        <p:spPr>
+          <a:xfrm>
+            <a:off x="731520" y="621792"/>
+            <a:ext cx="10698480" cy="594360"/>
+          </a:xfrm>
+          <a:prstGeom prst="rect">
+            <a:avLst/>
+          </a:prstGeom>
+          <a:noFill/>
+        </p:spPr>
+        <p:txBody>
+          <a:bodyPr wrap="square" tIns="0" bIns="0">
+            <a:spAutoFit/>
+          </a:bodyPr>
+          <a:lstStyle/>
+          <a:p>
+            <a:pPr>
+              <a:defRPr sz="2200" b="1">
+                <a:solidFill>
+                  <a:srgbClr val="F8FAFC"/>
+                </a:solidFill>
+              </a:defRPr>
+            </a:pPr>
+            <a:r>
+              <a:t>The Solution: Digital Pre-Ordering Ecosystem</a:t>
+            </a:r>
+          </a:p>
+        </p:txBody>
+      </p:sp>
+      <p:sp>
+        <p:nvSpPr>
           <p:cNvPr id="5" name="TextBox 4"/>
           <p:cNvSpPr txBox="1"/>
           <p:nvPr/>
         </p:nvSpPr>
         <p:spPr>
           <a:xfrm>
-            <a:off x="914400" y="1508760"/>
-            <a:ext cx="5852160" cy="1188720"/>
+            <a:off x="731520" y="1143000"/>
+            <a:ext cx="10698480" cy="320040"/>
           </a:xfrm>
           <a:prstGeom prst="rect">
             <a:avLst/>
@@ -4065,35 +6117,20 @@
           <a:noFill/>
         </p:spPr>
         <p:txBody>
-          <a:bodyPr wrap="none">
+          <a:bodyPr wrap="square" tIns="0" bIns="0">
             <a:spAutoFit/>
           </a:bodyPr>
           <a:lstStyle/>
           <a:p>
             <a:pPr>
-              <a:defRPr sz="1500" b="1">
-                <a:solidFill>
-                  <a:srgbClr val="10B981"/>
-                </a:solidFill>
-              </a:defRPr>
-            </a:pPr>
-            <a:r>
-              <a:t>✔  Order in Advance from Phone</a:t>
-            </a:r>
-          </a:p>
-          <a:p>
-            <a:pPr>
-              <a:spcBef>
-                <a:spcPts val="400"/>
-              </a:spcBef>
-              <a:defRPr sz="1250">
-                <a:solidFill>
-                  <a:srgbClr val="1E293B"/>
-                </a:solidFill>
-              </a:defRPr>
-            </a:pPr>
-            <a:r>
-              <a:t>Select your meal, snacks, or stationery right from your classroom before break starts.</a:t>
+              <a:defRPr sz="1100">
+                <a:solidFill>
+                  <a:srgbClr val="94A3B8"/>
+                </a:solidFill>
+              </a:defRPr>
+            </a:pPr>
+            <a:r>
+              <a:t>Transforming campus food &amp; stationery commerce into an express zero-wait pipeline</a:t>
             </a:r>
           </a:p>
         </p:txBody>
@@ -4106,18 +6143,18 @@
         </p:nvSpPr>
         <p:spPr>
           <a:xfrm>
-            <a:off x="731520" y="3017520"/>
-            <a:ext cx="6217920" cy="1463040"/>
+            <a:off x="731520" y="1645920"/>
+            <a:ext cx="5669280" cy="1234440"/>
           </a:xfrm>
           <a:prstGeom prst="roundRect">
             <a:avLst/>
           </a:prstGeom>
           <a:solidFill>
-            <a:srgbClr val="FFFFFF"/>
+            <a:srgbClr val="1E293B"/>
           </a:solidFill>
-          <a:ln w="19050">
+          <a:ln w="12700">
             <a:solidFill>
-              <a:srgbClr val="E2E8F0"/>
+              <a:srgbClr val="334155"/>
             </a:solidFill>
           </a:ln>
         </p:spPr>
@@ -4151,8 +6188,8 @@
         </p:nvSpPr>
         <p:spPr>
           <a:xfrm>
-            <a:off x="914400" y="3154679"/>
-            <a:ext cx="5852160" cy="1188720"/>
+            <a:off x="896112" y="1773936"/>
+            <a:ext cx="5340096" cy="978408"/>
           </a:xfrm>
           <a:prstGeom prst="rect">
             <a:avLst/>
@@ -4160,35 +6197,35 @@
           <a:noFill/>
         </p:spPr>
         <p:txBody>
-          <a:bodyPr wrap="none">
+          <a:bodyPr wrap="square" lIns="0" rIns="0" tIns="0" bIns="0">
             <a:spAutoFit/>
           </a:bodyPr>
           <a:lstStyle/>
           <a:p>
             <a:pPr>
-              <a:defRPr sz="1500" b="1">
-                <a:solidFill>
-                  <a:srgbClr val="0284C7"/>
-                </a:solidFill>
-              </a:defRPr>
-            </a:pPr>
-            <a:r>
-              <a:t>✔  Choose Your Pickup Slot</a:t>
-            </a:r>
-          </a:p>
-          <a:p>
-            <a:pPr>
-              <a:spcBef>
+              <a:spcAft>
                 <a:spcPts val="400"/>
-              </a:spcBef>
-              <a:defRPr sz="1250">
-                <a:solidFill>
-                  <a:srgbClr val="1E293B"/>
-                </a:solidFill>
-              </a:defRPr>
-            </a:pPr>
-            <a:r>
-              <a:t>Pick an exact time slot (e.g. In 15 Mins, Lunch Break 1:15 PM) to fit your schedule.</a:t>
+              </a:spcAft>
+              <a:defRPr sz="1400" b="1">
+                <a:solidFill>
+                  <a:srgbClr val="10B981"/>
+                </a:solidFill>
+              </a:defRPr>
+            </a:pPr>
+            <a:r>
+              <a:t>📱  Order Directly from Classroom</a:t>
+            </a:r>
+          </a:p>
+          <a:p>
+            <a:pPr>
+              <a:defRPr sz="1100">
+                <a:solidFill>
+                  <a:srgbClr val="94A3B8"/>
+                </a:solidFill>
+              </a:defRPr>
+            </a:pPr>
+            <a:r>
+              <a:t>Browse hot food, packaged snacks, drinks, and stationery on any mobile browser before break starts.</a:t>
             </a:r>
           </a:p>
         </p:txBody>
@@ -4201,18 +6238,18 @@
         </p:nvSpPr>
         <p:spPr>
           <a:xfrm>
-            <a:off x="731520" y="4663440"/>
-            <a:ext cx="6217920" cy="1463040"/>
+            <a:off x="731520" y="2971800"/>
+            <a:ext cx="5669280" cy="1234440"/>
           </a:xfrm>
           <a:prstGeom prst="roundRect">
             <a:avLst/>
           </a:prstGeom>
           <a:solidFill>
-            <a:srgbClr val="FFFFFF"/>
+            <a:srgbClr val="1E293B"/>
           </a:solidFill>
-          <a:ln w="19050">
+          <a:ln w="12700">
             <a:solidFill>
-              <a:srgbClr val="E2E8F0"/>
+              <a:srgbClr val="334155"/>
             </a:solidFill>
           </a:ln>
         </p:spPr>
@@ -4246,8 +6283,8 @@
         </p:nvSpPr>
         <p:spPr>
           <a:xfrm>
-            <a:off x="914400" y="4800600"/>
-            <a:ext cx="5852160" cy="1188720"/>
+            <a:off x="896112" y="3099816"/>
+            <a:ext cx="5340096" cy="978408"/>
           </a:xfrm>
           <a:prstGeom prst="rect">
             <a:avLst/>
@@ -4255,39 +6292,253 @@
           <a:noFill/>
         </p:spPr>
         <p:txBody>
-          <a:bodyPr wrap="none">
+          <a:bodyPr wrap="square" lIns="0" rIns="0" tIns="0" bIns="0">
             <a:spAutoFit/>
           </a:bodyPr>
           <a:lstStyle/>
           <a:p>
             <a:pPr>
-              <a:defRPr sz="1500" b="1">
+              <a:spcAft>
+                <a:spcPts val="400"/>
+              </a:spcAft>
+              <a:defRPr sz="1400" b="1">
+                <a:solidFill>
+                  <a:srgbClr val="0284C7"/>
+                </a:solidFill>
+              </a:defRPr>
+            </a:pPr>
+            <a:r>
+              <a:t>⏰  Precise Pickup Slot Scheduling</a:t>
+            </a:r>
+          </a:p>
+          <a:p>
+            <a:pPr>
+              <a:defRPr sz="1100">
+                <a:solidFill>
+                  <a:srgbClr val="94A3B8"/>
+                </a:solidFill>
+              </a:defRPr>
+            </a:pPr>
+            <a:r>
+              <a:t>Choose immediate preparation or schedule for upcoming break times (e.g. 1:15 PM Lunch Break).</a:t>
+            </a:r>
+          </a:p>
+        </p:txBody>
+      </p:sp>
+      <p:sp>
+        <p:nvSpPr>
+          <p:cNvPr id="10" name="Rounded Rectangle 9"/>
+          <p:cNvSpPr/>
+          <p:nvPr/>
+        </p:nvSpPr>
+        <p:spPr>
+          <a:xfrm>
+            <a:off x="731520" y="4297680"/>
+            <a:ext cx="5669280" cy="1234440"/>
+          </a:xfrm>
+          <a:prstGeom prst="roundRect">
+            <a:avLst/>
+          </a:prstGeom>
+          <a:solidFill>
+            <a:srgbClr val="1E293B"/>
+          </a:solidFill>
+          <a:ln w="12700">
+            <a:solidFill>
+              <a:srgbClr val="334155"/>
+            </a:solidFill>
+          </a:ln>
+        </p:spPr>
+        <p:style>
+          <a:lnRef idx="1">
+            <a:schemeClr val="accent1"/>
+          </a:lnRef>
+          <a:fillRef idx="3">
+            <a:schemeClr val="accent1"/>
+          </a:fillRef>
+          <a:effectRef idx="2">
+            <a:schemeClr val="accent1"/>
+          </a:effectRef>
+          <a:fontRef idx="minor">
+            <a:schemeClr val="lt1"/>
+          </a:fontRef>
+        </p:style>
+        <p:txBody>
+          <a:bodyPr rtlCol="0" anchor="ctr"/>
+          <a:lstStyle/>
+          <a:p>
+            <a:pPr algn="ctr"/>
+          </a:p>
+        </p:txBody>
+      </p:sp>
+      <p:sp>
+        <p:nvSpPr>
+          <p:cNvPr id="11" name="TextBox 10"/>
+          <p:cNvSpPr txBox="1"/>
+          <p:nvPr/>
+        </p:nvSpPr>
+        <p:spPr>
+          <a:xfrm>
+            <a:off x="896112" y="4425696"/>
+            <a:ext cx="5340096" cy="978408"/>
+          </a:xfrm>
+          <a:prstGeom prst="rect">
+            <a:avLst/>
+          </a:prstGeom>
+          <a:noFill/>
+        </p:spPr>
+        <p:txBody>
+          <a:bodyPr wrap="square" lIns="0" rIns="0" tIns="0" bIns="0">
+            <a:spAutoFit/>
+          </a:bodyPr>
+          <a:lstStyle/>
+          <a:p>
+            <a:pPr>
+              <a:spcAft>
+                <a:spcPts val="400"/>
+              </a:spcAft>
+              <a:defRPr sz="1400" b="1">
                 <a:solidFill>
                   <a:srgbClr val="EA580C"/>
                 </a:solidFill>
               </a:defRPr>
             </a:pPr>
             <a:r>
-              <a:t>✔  Express Zero-Queue Pickup</a:t>
-            </a:r>
-          </a:p>
-          <a:p>
-            <a:pPr>
-              <a:spcBef>
+              <a:t>⚡  Zero-Wait Express Pickup</a:t>
+            </a:r>
+          </a:p>
+          <a:p>
+            <a:pPr>
+              <a:defRPr sz="1100">
+                <a:solidFill>
+                  <a:srgbClr val="94A3B8"/>
+                </a:solidFill>
+              </a:defRPr>
+            </a:pPr>
+            <a:r>
+              <a:t>Walk directly to the designated counter, present digital Token ID on smartphone, collect, and go in 10 seconds!</a:t>
+            </a:r>
+          </a:p>
+        </p:txBody>
+      </p:sp>
+      <p:sp>
+        <p:nvSpPr>
+          <p:cNvPr id="12" name="Rounded Rectangle 11"/>
+          <p:cNvSpPr/>
+          <p:nvPr/>
+        </p:nvSpPr>
+        <p:spPr>
+          <a:xfrm>
+            <a:off x="731520" y="5623560"/>
+            <a:ext cx="5669280" cy="868680"/>
+          </a:xfrm>
+          <a:prstGeom prst="roundRect">
+            <a:avLst/>
+          </a:prstGeom>
+          <a:solidFill>
+            <a:srgbClr val="1E293B"/>
+          </a:solidFill>
+          <a:ln w="12700">
+            <a:solidFill>
+              <a:srgbClr val="334155"/>
+            </a:solidFill>
+          </a:ln>
+        </p:spPr>
+        <p:style>
+          <a:lnRef idx="1">
+            <a:schemeClr val="accent1"/>
+          </a:lnRef>
+          <a:fillRef idx="3">
+            <a:schemeClr val="accent1"/>
+          </a:fillRef>
+          <a:effectRef idx="2">
+            <a:schemeClr val="accent1"/>
+          </a:effectRef>
+          <a:fontRef idx="minor">
+            <a:schemeClr val="lt1"/>
+          </a:fontRef>
+        </p:style>
+        <p:txBody>
+          <a:bodyPr rtlCol="0" anchor="ctr"/>
+          <a:lstStyle/>
+          <a:p>
+            <a:pPr algn="ctr"/>
+          </a:p>
+        </p:txBody>
+      </p:sp>
+      <p:sp>
+        <p:nvSpPr>
+          <p:cNvPr id="13" name="TextBox 12"/>
+          <p:cNvSpPr txBox="1"/>
+          <p:nvPr/>
+        </p:nvSpPr>
+        <p:spPr>
+          <a:xfrm>
+            <a:off x="896112" y="5751576"/>
+            <a:ext cx="5340096" cy="612647"/>
+          </a:xfrm>
+          <a:prstGeom prst="rect">
+            <a:avLst/>
+          </a:prstGeom>
+          <a:noFill/>
+        </p:spPr>
+        <p:txBody>
+          <a:bodyPr wrap="square" lIns="0" rIns="0" tIns="0" bIns="0">
+            <a:spAutoFit/>
+          </a:bodyPr>
+          <a:lstStyle/>
+          <a:p>
+            <a:pPr>
+              <a:spcAft>
                 <a:spcPts val="400"/>
-              </a:spcBef>
-              <a:defRPr sz="1250">
-                <a:solidFill>
-                  <a:srgbClr val="1E293B"/>
-                </a:solidFill>
-              </a:defRPr>
-            </a:pPr>
-            <a:r>
-              <a:t>Walk up to the counter, show your digital Token ID, pick up packed items, and go!</a:t>
-            </a:r>
-          </a:p>
-        </p:txBody>
-      </p:sp>
+              </a:spcAft>
+              <a:defRPr sz="1400" b="1">
+                <a:solidFill>
+                  <a:srgbClr val="A855F7"/>
+                </a:solidFill>
+              </a:defRPr>
+            </a:pPr>
+            <a:r>
+              <a:t>🏪  Multi-Outlet Aggregation</a:t>
+            </a:r>
+          </a:p>
+          <a:p>
+            <a:pPr>
+              <a:defRPr sz="1100">
+                <a:solidFill>
+                  <a:srgbClr val="94A3B8"/>
+                </a:solidFill>
+              </a:defRPr>
+            </a:pPr>
+            <a:r>
+              <a:t>Order from 23 independent campus shops with consolidated cart and instant split ledger accounting.</a:t>
+            </a:r>
+          </a:p>
+        </p:txBody>
+      </p:sp>
+      <p:pic>
+        <p:nvPicPr>
+          <p:cNvPr id="14" name="Picture 13" descr="mobile_pickup.jpg"/>
+          <p:cNvPicPr>
+            <a:picLocks noChangeAspect="1"/>
+          </p:cNvPicPr>
+          <p:nvPr/>
+        </p:nvPicPr>
+        <p:blipFill>
+          <a:blip r:embed="rId2"/>
+          <a:stretch>
+            <a:fillRect/>
+          </a:stretch>
+        </p:blipFill>
+        <p:spPr>
+          <a:xfrm>
+            <a:off x="6766560" y="1645920"/>
+            <a:ext cx="4663440" cy="4846320"/>
+          </a:xfrm>
+          <a:prstGeom prst="rect">
+            <a:avLst/>
+          </a:prstGeom>
+        </p:spPr>
+      </p:pic>
     </p:spTree>
   </p:cSld>
   <p:clrMapOvr>
@@ -4308,95 +6559,23 @@
       <p:grpSpPr/>
       <p:sp>
         <p:nvSpPr>
-          <p:cNvPr id="2" name="TextBox 1"/>
-          <p:cNvSpPr txBox="1"/>
-          <p:nvPr/>
-        </p:nvSpPr>
-        <p:spPr>
-          <a:xfrm>
-            <a:off x="731520" y="320040"/>
-            <a:ext cx="10698480" cy="320040"/>
-          </a:xfrm>
-          <a:prstGeom prst="rect">
-            <a:avLst/>
-          </a:prstGeom>
-          <a:noFill/>
-        </p:spPr>
-        <p:txBody>
-          <a:bodyPr wrap="none">
-            <a:spAutoFit/>
-          </a:bodyPr>
-          <a:lstStyle/>
-          <a:p>
-            <a:pPr>
-              <a:defRPr sz="1100" b="1">
-                <a:solidFill>
-                  <a:srgbClr val="EA580C"/>
-                </a:solidFill>
-              </a:defRPr>
-            </a:pPr>
-            <a:r>
-              <a:t>CATALOG SHOWCASE</a:t>
-            </a:r>
-          </a:p>
-        </p:txBody>
-      </p:sp>
-      <p:sp>
-        <p:nvSpPr>
-          <p:cNvPr id="3" name="TextBox 2"/>
-          <p:cNvSpPr txBox="1"/>
-          <p:nvPr/>
-        </p:nvSpPr>
-        <p:spPr>
-          <a:xfrm>
-            <a:off x="731520" y="594360"/>
-            <a:ext cx="10698480" cy="731520"/>
-          </a:xfrm>
-          <a:prstGeom prst="rect">
-            <a:avLst/>
-          </a:prstGeom>
-          <a:noFill/>
-        </p:spPr>
-        <p:txBody>
-          <a:bodyPr wrap="none">
-            <a:spAutoFit/>
-          </a:bodyPr>
-          <a:lstStyle/>
-          <a:p>
-            <a:pPr>
-              <a:defRPr sz="2500" b="1">
-                <a:solidFill>
-                  <a:srgbClr val="0F172A"/>
-                </a:solidFill>
-              </a:defRPr>
-            </a:pPr>
-            <a:r>
-              <a:t>What Can Students Buy? (48+ Products)</a:t>
-            </a:r>
-          </a:p>
-        </p:txBody>
-      </p:sp>
-      <p:sp>
-        <p:nvSpPr>
-          <p:cNvPr id="4" name="Rounded Rectangle 3"/>
+          <p:cNvPr id="2" name="Rectangle 1"/>
           <p:cNvSpPr/>
           <p:nvPr/>
         </p:nvSpPr>
         <p:spPr>
           <a:xfrm>
-            <a:off x="731520" y="1371600"/>
-            <a:ext cx="5212080" cy="2286000"/>
-          </a:xfrm>
-          <a:prstGeom prst="roundRect">
+            <a:off x="0" y="0"/>
+            <a:ext cx="12191695" cy="6858000"/>
+          </a:xfrm>
+          <a:prstGeom prst="rect">
             <a:avLst/>
           </a:prstGeom>
           <a:solidFill>
-            <a:srgbClr val="FFFFFF"/>
+            <a:srgbClr val="0B1120"/>
           </a:solidFill>
-          <a:ln w="19050">
-            <a:solidFill>
-              <a:srgbClr val="E2E8F0"/>
-            </a:solidFill>
+          <a:ln>
+            <a:noFill/>
           </a:ln>
         </p:spPr>
         <p:style>
@@ -4423,14 +6602,84 @@
       </p:sp>
       <p:sp>
         <p:nvSpPr>
+          <p:cNvPr id="3" name="TextBox 2"/>
+          <p:cNvSpPr txBox="1"/>
+          <p:nvPr/>
+        </p:nvSpPr>
+        <p:spPr>
+          <a:xfrm>
+            <a:off x="731520" y="320040"/>
+            <a:ext cx="10698480" cy="320040"/>
+          </a:xfrm>
+          <a:prstGeom prst="rect">
+            <a:avLst/>
+          </a:prstGeom>
+          <a:noFill/>
+        </p:spPr>
+        <p:txBody>
+          <a:bodyPr wrap="square" tIns="0" bIns="0">
+            <a:spAutoFit/>
+          </a:bodyPr>
+          <a:lstStyle/>
+          <a:p>
+            <a:pPr>
+              <a:defRPr sz="1100" b="1">
+                <a:solidFill>
+                  <a:srgbClr val="EA580C"/>
+                </a:solidFill>
+              </a:defRPr>
+            </a:pPr>
+            <a:r>
+              <a:t>EXTENSIVE CATALOG SHOWCASE</a:t>
+            </a:r>
+          </a:p>
+        </p:txBody>
+      </p:sp>
+      <p:sp>
+        <p:nvSpPr>
+          <p:cNvPr id="4" name="TextBox 3"/>
+          <p:cNvSpPr txBox="1"/>
+          <p:nvPr/>
+        </p:nvSpPr>
+        <p:spPr>
+          <a:xfrm>
+            <a:off x="731520" y="621792"/>
+            <a:ext cx="10698480" cy="594360"/>
+          </a:xfrm>
+          <a:prstGeom prst="rect">
+            <a:avLst/>
+          </a:prstGeom>
+          <a:noFill/>
+        </p:spPr>
+        <p:txBody>
+          <a:bodyPr wrap="square" tIns="0" bIns="0">
+            <a:spAutoFit/>
+          </a:bodyPr>
+          <a:lstStyle/>
+          <a:p>
+            <a:pPr>
+              <a:defRPr sz="2200" b="1">
+                <a:solidFill>
+                  <a:srgbClr val="F8FAFC"/>
+                </a:solidFill>
+              </a:defRPr>
+            </a:pPr>
+            <a:r>
+              <a:t>Campus Scale: 1,555 Pure Veg Items Across 23 Outlets</a:t>
+            </a:r>
+          </a:p>
+        </p:txBody>
+      </p:sp>
+      <p:sp>
+        <p:nvSpPr>
           <p:cNvPr id="5" name="TextBox 4"/>
           <p:cNvSpPr txBox="1"/>
           <p:nvPr/>
         </p:nvSpPr>
         <p:spPr>
           <a:xfrm>
-            <a:off x="2834639" y="1554480"/>
-            <a:ext cx="2926080" cy="1828800"/>
+            <a:off x="731520" y="1143000"/>
+            <a:ext cx="10698480" cy="320040"/>
           </a:xfrm>
           <a:prstGeom prst="rect">
             <a:avLst/>
@@ -4438,35 +6687,20 @@
           <a:noFill/>
         </p:spPr>
         <p:txBody>
-          <a:bodyPr wrap="square">
+          <a:bodyPr wrap="square" tIns="0" bIns="0">
             <a:spAutoFit/>
           </a:bodyPr>
           <a:lstStyle/>
           <a:p>
             <a:pPr>
-              <a:defRPr sz="1400" b="1">
-                <a:solidFill>
-                  <a:srgbClr val="EA580C"/>
-                </a:solidFill>
-              </a:defRPr>
-            </a:pPr>
-            <a:r>
-              <a:t>🍔 Canteen Fresh Food</a:t>
-            </a:r>
-          </a:p>
-          <a:p>
-            <a:pPr>
-              <a:spcBef>
-                <a:spcPts val="600"/>
-              </a:spcBef>
-              <a:defRPr sz="1150">
-                <a:solidFill>
-                  <a:srgbClr val="1E293B"/>
-                </a:solidFill>
-              </a:defRPr>
-            </a:pPr>
-            <a:r>
-              <a:t>Dosa, Samosa, Veg Sandwich, Hakka Noodles, Special Thali, Biryani</a:t>
+              <a:defRPr sz="1100">
+                <a:solidFill>
+                  <a:srgbClr val="94A3B8"/>
+                </a:solidFill>
+              </a:defRPr>
+            </a:pPr>
+            <a:r>
+              <a:t>100% Pure Vegetarian certified menu covering dining, groceries, photocopying, and stationery</a:t>
             </a:r>
           </a:p>
         </p:txBody>
@@ -4479,18 +6713,18 @@
         </p:nvSpPr>
         <p:spPr>
           <a:xfrm>
-            <a:off x="6126480" y="1371600"/>
+            <a:off x="731520" y="1645920"/>
             <a:ext cx="5212080" cy="2286000"/>
           </a:xfrm>
           <a:prstGeom prst="roundRect">
             <a:avLst/>
           </a:prstGeom>
           <a:solidFill>
-            <a:srgbClr val="FFFFFF"/>
+            <a:srgbClr val="1E293B"/>
           </a:solidFill>
-          <a:ln w="19050">
+          <a:ln>
             <a:solidFill>
-              <a:srgbClr val="E2E8F0"/>
+              <a:srgbClr val="334155"/>
             </a:solidFill>
           </a:ln>
         </p:spPr>
@@ -4516,16 +6750,40 @@
           </a:p>
         </p:txBody>
       </p:sp>
-      <p:sp>
-        <p:nvSpPr>
-          <p:cNvPr id="7" name="TextBox 6"/>
+      <p:pic>
+        <p:nvPicPr>
+          <p:cNvPr id="7" name="Picture 6" descr="food.jpg"/>
+          <p:cNvPicPr>
+            <a:picLocks noChangeAspect="1"/>
+          </p:cNvPicPr>
+          <p:nvPr/>
+        </p:nvPicPr>
+        <p:blipFill>
+          <a:blip r:embed="rId2"/>
+          <a:stretch>
+            <a:fillRect/>
+          </a:stretch>
+        </p:blipFill>
+        <p:spPr>
+          <a:xfrm>
+            <a:off x="868680" y="1783080"/>
+            <a:ext cx="1645920" cy="2011680"/>
+          </a:xfrm>
+          <a:prstGeom prst="rect">
+            <a:avLst/>
+          </a:prstGeom>
+        </p:spPr>
+      </p:pic>
+      <p:sp>
+        <p:nvSpPr>
+          <p:cNvPr id="8" name="TextBox 7"/>
           <p:cNvSpPr txBox="1"/>
           <p:nvPr/>
         </p:nvSpPr>
         <p:spPr>
           <a:xfrm>
-            <a:off x="8229600" y="1554480"/>
-            <a:ext cx="2926080" cy="1828800"/>
+            <a:off x="2651760" y="1783080"/>
+            <a:ext cx="3154680" cy="2011680"/>
           </a:xfrm>
           <a:prstGeom prst="rect">
             <a:avLst/>
@@ -4533,59 +6791,59 @@
           <a:noFill/>
         </p:spPr>
         <p:txBody>
-          <a:bodyPr wrap="square">
+          <a:bodyPr wrap="square" lIns="0" tIns="0">
             <a:spAutoFit/>
           </a:bodyPr>
           <a:lstStyle/>
           <a:p>
             <a:pPr>
+              <a:spcAft>
+                <a:spcPts val="300"/>
+              </a:spcAft>
               <a:defRPr sz="1400" b="1">
                 <a:solidFill>
-                  <a:srgbClr val="9333EA"/>
-                </a:solidFill>
-              </a:defRPr>
-            </a:pPr>
-            <a:r>
-              <a:t>🍫 Chocolates &amp; Snacks</a:t>
-            </a:r>
-          </a:p>
-          <a:p>
-            <a:pPr>
-              <a:spcBef>
-                <a:spcPts val="600"/>
-              </a:spcBef>
-              <a:defRPr sz="1150">
-                <a:solidFill>
-                  <a:srgbClr val="1E293B"/>
-                </a:solidFill>
-              </a:defRPr>
-            </a:pPr>
-            <a:r>
-              <a:t>Dairy Milk Silk, KitKat, Snickers, Lay's Chips, Kurkure, Oreo</a:t>
-            </a:r>
-          </a:p>
-        </p:txBody>
-      </p:sp>
-      <p:sp>
-        <p:nvSpPr>
-          <p:cNvPr id="8" name="Rounded Rectangle 7"/>
+                  <a:srgbClr val="EA580C"/>
+                </a:solidFill>
+              </a:defRPr>
+            </a:pPr>
+            <a:r>
+              <a:t>🍔 Canteen Fresh Food (324+ in Rainbow)</a:t>
+            </a:r>
+          </a:p>
+          <a:p>
+            <a:pPr>
+              <a:defRPr sz="1050">
+                <a:solidFill>
+                  <a:srgbClr val="94A3B8"/>
+                </a:solidFill>
+              </a:defRPr>
+            </a:pPr>
+            <a:r>
+              <a:t>TMU Special Chole Kulcha, Sardar Ji Hub, Paneer Dosa, Deluxe Thali, Biryani, Chole Bhature, Burgers &amp; Rolls.</a:t>
+            </a:r>
+          </a:p>
+        </p:txBody>
+      </p:sp>
+      <p:sp>
+        <p:nvSpPr>
+          <p:cNvPr id="9" name="Rounded Rectangle 8"/>
           <p:cNvSpPr/>
           <p:nvPr/>
         </p:nvSpPr>
         <p:spPr>
           <a:xfrm>
-            <a:off x="731520" y="3840480"/>
+            <a:off x="6217920" y="1645920"/>
             <a:ext cx="5212080" cy="2286000"/>
           </a:xfrm>
           <a:prstGeom prst="roundRect">
             <a:avLst/>
           </a:prstGeom>
           <a:solidFill>
-            <a:srgbClr val="FFFFFF"/>
+            <a:srgbClr val="1E293B"/>
           </a:solidFill>
-          <a:ln w="19050">
+          <a:ln>
             <a:solidFill>
-              <a:srgbClr val="E2E8F0"/>
+              <a:srgbClr val="334155"/>
             </a:solidFill>
           </a:ln>
         </p:spPr>
@@ -4611,16 +6869,40 @@
           </a:p>
         </p:txBody>
       </p:sp>
-      <p:sp>
-        <p:nvSpPr>
-          <p:cNvPr id="9" name="TextBox 8"/>
+      <p:pic>
+        <p:nvPicPr>
+          <p:cNvPr id="10" name="Picture 9" descr="chocolate.jpg"/>
+          <p:cNvPicPr>
+            <a:picLocks noChangeAspect="1"/>
+          </p:cNvPicPr>
+          <p:nvPr/>
+        </p:nvPicPr>
+        <p:blipFill>
+          <a:blip r:embed="rId3"/>
+          <a:stretch>
+            <a:fillRect/>
+          </a:stretch>
+        </p:blipFill>
+        <p:spPr>
+          <a:xfrm>
+            <a:off x="6355080" y="1783080"/>
+            <a:ext cx="1645920" cy="2011680"/>
+          </a:xfrm>
+          <a:prstGeom prst="rect">
+            <a:avLst/>
+          </a:prstGeom>
+        </p:spPr>
+      </p:pic>
+      <p:sp>
+        <p:nvSpPr>
+          <p:cNvPr id="11" name="TextBox 10"/>
           <p:cNvSpPr txBox="1"/>
           <p:nvPr/>
         </p:nvSpPr>
         <p:spPr>
           <a:xfrm>
-            <a:off x="2834639" y="4023360"/>
-            <a:ext cx="2926080" cy="1828800"/>
+            <a:off x="8138160" y="1783080"/>
+            <a:ext cx="3154680" cy="2011680"/>
           </a:xfrm>
           <a:prstGeom prst="rect">
             <a:avLst/>
@@ -4628,59 +6910,59 @@
           <a:noFill/>
         </p:spPr>
         <p:txBody>
-          <a:bodyPr wrap="square">
+          <a:bodyPr wrap="square" lIns="0" tIns="0">
             <a:spAutoFit/>
           </a:bodyPr>
           <a:lstStyle/>
           <a:p>
             <a:pPr>
+              <a:spcAft>
+                <a:spcPts val="300"/>
+              </a:spcAft>
               <a:defRPr sz="1400" b="1">
                 <a:solidFill>
-                  <a:srgbClr val="0284C7"/>
-                </a:solidFill>
-              </a:defRPr>
-            </a:pPr>
-            <a:r>
-              <a:t>🥤 Cold Drinks &amp; Juices</a:t>
-            </a:r>
-          </a:p>
-          <a:p>
-            <a:pPr>
-              <a:spcBef>
-                <a:spcPts val="600"/>
-              </a:spcBef>
-              <a:defRPr sz="1150">
-                <a:solidFill>
-                  <a:srgbClr val="1E293B"/>
-                </a:solidFill>
-              </a:defRPr>
-            </a:pPr>
-            <a:r>
-              <a:t>Red Bull Energy, Cold Coffee, Coca-Cola, Frooti, Real Juice</a:t>
-            </a:r>
-          </a:p>
-        </p:txBody>
-      </p:sp>
-      <p:sp>
-        <p:nvSpPr>
-          <p:cNvPr id="10" name="Rounded Rectangle 9"/>
+                  <a:srgbClr val="A855F7"/>
+                </a:solidFill>
+              </a:defRPr>
+            </a:pPr>
+            <a:r>
+              <a:t>🍫 Chocolates &amp; Packed Snacks</a:t>
+            </a:r>
+          </a:p>
+          <a:p>
+            <a:pPr>
+              <a:defRPr sz="1050">
+                <a:solidFill>
+                  <a:srgbClr val="94A3B8"/>
+                </a:solidFill>
+              </a:defRPr>
+            </a:pPr>
+            <a:r>
+              <a:t>Cadbury Dairy Milk Silk, KitKat, Snickers, Lay's Chips, Kurkure, Oreo, and Maggi Noodles.</a:t>
+            </a:r>
+          </a:p>
+        </p:txBody>
+      </p:sp>
+      <p:sp>
+        <p:nvSpPr>
+          <p:cNvPr id="12" name="Rounded Rectangle 11"/>
           <p:cNvSpPr/>
           <p:nvPr/>
         </p:nvSpPr>
         <p:spPr>
           <a:xfrm>
-            <a:off x="6126480" y="3840480"/>
+            <a:off x="731520" y="4114800"/>
             <a:ext cx="5212080" cy="2286000"/>
           </a:xfrm>
           <a:prstGeom prst="roundRect">
             <a:avLst/>
           </a:prstGeom>
           <a:solidFill>
-            <a:srgbClr val="FFFFFF"/>
+            <a:srgbClr val="1E293B"/>
           </a:solidFill>
-          <a:ln w="19050">
+          <a:ln>
             <a:solidFill>
-              <a:srgbClr val="E2E8F0"/>
+              <a:srgbClr val="334155"/>
             </a:solidFill>
           </a:ln>
         </p:spPr>
@@ -4706,16 +6988,40 @@
           </a:p>
         </p:txBody>
       </p:sp>
-      <p:sp>
-        <p:nvSpPr>
-          <p:cNvPr id="11" name="TextBox 10"/>
+      <p:pic>
+        <p:nvPicPr>
+          <p:cNvPr id="13" name="Picture 12" descr="drinks.jpg"/>
+          <p:cNvPicPr>
+            <a:picLocks noChangeAspect="1"/>
+          </p:cNvPicPr>
+          <p:nvPr/>
+        </p:nvPicPr>
+        <p:blipFill>
+          <a:blip r:embed="rId4"/>
+          <a:stretch>
+            <a:fillRect/>
+          </a:stretch>
+        </p:blipFill>
+        <p:spPr>
+          <a:xfrm>
+            <a:off x="868680" y="4251960"/>
+            <a:ext cx="1645920" cy="2011680"/>
+          </a:xfrm>
+          <a:prstGeom prst="rect">
+            <a:avLst/>
+          </a:prstGeom>
+        </p:spPr>
+      </p:pic>
+      <p:sp>
+        <p:nvSpPr>
+          <p:cNvPr id="14" name="TextBox 13"/>
           <p:cNvSpPr txBox="1"/>
           <p:nvPr/>
         </p:nvSpPr>
         <p:spPr>
           <a:xfrm>
-            <a:off x="8229600" y="4023360"/>
-            <a:ext cx="2926080" cy="1828800"/>
+            <a:off x="2651760" y="4251960"/>
+            <a:ext cx="3154680" cy="2011680"/>
           </a:xfrm>
           <a:prstGeom prst="rect">
             <a:avLst/>
@@ -4723,35 +7029,154 @@
           <a:noFill/>
         </p:spPr>
         <p:txBody>
-          <a:bodyPr wrap="square">
+          <a:bodyPr wrap="square" lIns="0" tIns="0">
             <a:spAutoFit/>
           </a:bodyPr>
           <a:lstStyle/>
           <a:p>
             <a:pPr>
+              <a:spcAft>
+                <a:spcPts val="300"/>
+              </a:spcAft>
               <a:defRPr sz="1400" b="1">
                 <a:solidFill>
+                  <a:srgbClr val="0284C7"/>
+                </a:solidFill>
+              </a:defRPr>
+            </a:pPr>
+            <a:r>
+              <a:t>🥤 Chilled Beverages &amp; Fresh Juices</a:t>
+            </a:r>
+          </a:p>
+          <a:p>
+            <a:pPr>
+              <a:defRPr sz="1050">
+                <a:solidFill>
+                  <a:srgbClr val="94A3B8"/>
+                </a:solidFill>
+              </a:defRPr>
+            </a:pPr>
+            <a:r>
+              <a:t>Caffelera Cold Coffee with Ice Cream, Red Bull, Mojito, Sting, Amul Lassi, Fresh Mosambi &amp; Mango Juices.</a:t>
+            </a:r>
+          </a:p>
+        </p:txBody>
+      </p:sp>
+      <p:sp>
+        <p:nvSpPr>
+          <p:cNvPr id="15" name="Rounded Rectangle 14"/>
+          <p:cNvSpPr/>
+          <p:nvPr/>
+        </p:nvSpPr>
+        <p:spPr>
+          <a:xfrm>
+            <a:off x="6217920" y="4114800"/>
+            <a:ext cx="5212080" cy="2286000"/>
+          </a:xfrm>
+          <a:prstGeom prst="roundRect">
+            <a:avLst/>
+          </a:prstGeom>
+          <a:solidFill>
+            <a:srgbClr val="1E293B"/>
+          </a:solidFill>
+          <a:ln>
+            <a:solidFill>
+              <a:srgbClr val="334155"/>
+            </a:solidFill>
+          </a:ln>
+        </p:spPr>
+        <p:style>
+          <a:lnRef idx="1">
+            <a:schemeClr val="accent1"/>
+          </a:lnRef>
+          <a:fillRef idx="3">
+            <a:schemeClr val="accent1"/>
+          </a:fillRef>
+          <a:effectRef idx="2">
+            <a:schemeClr val="accent1"/>
+          </a:effectRef>
+          <a:fontRef idx="minor">
+            <a:schemeClr val="lt1"/>
+          </a:fontRef>
+        </p:style>
+        <p:txBody>
+          <a:bodyPr rtlCol="0" anchor="ctr"/>
+          <a:lstStyle/>
+          <a:p>
+            <a:pPr algn="ctr"/>
+          </a:p>
+        </p:txBody>
+      </p:sp>
+      <p:pic>
+        <p:nvPicPr>
+          <p:cNvPr id="16" name="Picture 15" descr="stationery.jpg"/>
+          <p:cNvPicPr>
+            <a:picLocks noChangeAspect="1"/>
+          </p:cNvPicPr>
+          <p:nvPr/>
+        </p:nvPicPr>
+        <p:blipFill>
+          <a:blip r:embed="rId5"/>
+          <a:stretch>
+            <a:fillRect/>
+          </a:stretch>
+        </p:blipFill>
+        <p:spPr>
+          <a:xfrm>
+            <a:off x="6355080" y="4251960"/>
+            <a:ext cx="1645920" cy="2011680"/>
+          </a:xfrm>
+          <a:prstGeom prst="rect">
+            <a:avLst/>
+          </a:prstGeom>
+        </p:spPr>
+      </p:pic>
+      <p:sp>
+        <p:nvSpPr>
+          <p:cNvPr id="17" name="TextBox 16"/>
+          <p:cNvSpPr txBox="1"/>
+          <p:nvPr/>
+        </p:nvSpPr>
+        <p:spPr>
+          <a:xfrm>
+            <a:off x="8138160" y="4251960"/>
+            <a:ext cx="3154680" cy="2011680"/>
+          </a:xfrm>
+          <a:prstGeom prst="rect">
+            <a:avLst/>
+          </a:prstGeom>
+          <a:noFill/>
+        </p:spPr>
+        <p:txBody>
+          <a:bodyPr wrap="square" lIns="0" tIns="0">
+            <a:spAutoFit/>
+          </a:bodyPr>
+          <a:lstStyle/>
+          <a:p>
+            <a:pPr>
+              <a:spcAft>
+                <a:spcPts val="300"/>
+              </a:spcAft>
+              <a:defRPr sz="1400" b="1">
+                <a:solidFill>
                   <a:srgbClr val="10B981"/>
                 </a:solidFill>
               </a:defRPr>
             </a:pPr>
             <a:r>
-              <a:t>📚 Stationery &amp; Essentials</a:t>
-            </a:r>
-          </a:p>
-          <a:p>
-            <a:pPr>
-              <a:spcBef>
-                <a:spcPts val="600"/>
-              </a:spcBef>
-              <a:defRPr sz="1150">
-                <a:solidFill>
-                  <a:srgbClr val="1E293B"/>
-                </a:solidFill>
-              </a:defRPr>
-            </a:pPr>
-            <a:r>
-              <a:t>Spiral Registers, Gel Pens, Practical Files, Dettol Sanitizer</a:t>
+              <a:t>📚 Stationery &amp; Photo Shop Essentials</a:t>
+            </a:r>
+          </a:p>
+          <a:p>
+            <a:pPr>
+              <a:defRPr sz="1050">
+                <a:solidFill>
+                  <a:srgbClr val="94A3B8"/>
+                </a:solidFill>
+              </a:defRPr>
+            </a:pPr>
+            <a:r>
+              <a:t>Classmate Spiral Notebooks, Practical Files, Gel Pens, Highlighters, Printing &amp; Photocopy services.</a:t>
             </a:r>
           </a:p>
         </p:txBody>
@@ -4776,95 +7201,23 @@
       <p:grpSpPr/>
       <p:sp>
         <p:nvSpPr>
-          <p:cNvPr id="2" name="TextBox 1"/>
-          <p:cNvSpPr txBox="1"/>
-          <p:nvPr/>
-        </p:nvSpPr>
-        <p:spPr>
-          <a:xfrm>
-            <a:off x="731520" y="320040"/>
-            <a:ext cx="10698480" cy="320040"/>
-          </a:xfrm>
-          <a:prstGeom prst="rect">
-            <a:avLst/>
-          </a:prstGeom>
-          <a:noFill/>
-        </p:spPr>
-        <p:txBody>
-          <a:bodyPr wrap="none">
-            <a:spAutoFit/>
-          </a:bodyPr>
-          <a:lstStyle/>
-          <a:p>
-            <a:pPr>
-              <a:defRPr sz="1100" b="1">
-                <a:solidFill>
-                  <a:srgbClr val="EA580C"/>
-                </a:solidFill>
-              </a:defRPr>
-            </a:pPr>
-            <a:r>
-              <a:t>USER WORKFLOW</a:t>
-            </a:r>
-          </a:p>
-        </p:txBody>
-      </p:sp>
-      <p:sp>
-        <p:nvSpPr>
-          <p:cNvPr id="3" name="TextBox 2"/>
-          <p:cNvSpPr txBox="1"/>
-          <p:nvPr/>
-        </p:nvSpPr>
-        <p:spPr>
-          <a:xfrm>
-            <a:off x="731520" y="594360"/>
-            <a:ext cx="10698480" cy="731520"/>
-          </a:xfrm>
-          <a:prstGeom prst="rect">
-            <a:avLst/>
-          </a:prstGeom>
-          <a:noFill/>
-        </p:spPr>
-        <p:txBody>
-          <a:bodyPr wrap="none">
-            <a:spAutoFit/>
-          </a:bodyPr>
-          <a:lstStyle/>
-          <a:p>
-            <a:pPr>
-              <a:defRPr sz="2500" b="1">
-                <a:solidFill>
-                  <a:srgbClr val="0F172A"/>
-                </a:solidFill>
-              </a:defRPr>
-            </a:pPr>
-            <a:r>
-              <a:t>How It Works: In 3 Simple Steps</a:t>
-            </a:r>
-          </a:p>
-        </p:txBody>
-      </p:sp>
-      <p:sp>
-        <p:nvSpPr>
-          <p:cNvPr id="4" name="Rounded Rectangle 3"/>
+          <p:cNvPr id="2" name="Rectangle 1"/>
           <p:cNvSpPr/>
           <p:nvPr/>
         </p:nvSpPr>
         <p:spPr>
           <a:xfrm>
-            <a:off x="731520" y="1463040"/>
-            <a:ext cx="3474720" cy="4663440"/>
-          </a:xfrm>
-          <a:prstGeom prst="roundRect">
+            <a:off x="0" y="0"/>
+            <a:ext cx="12191695" cy="6858000"/>
+          </a:xfrm>
+          <a:prstGeom prst="rect">
             <a:avLst/>
           </a:prstGeom>
           <a:solidFill>
-            <a:srgbClr val="FFFFFF"/>
+            <a:srgbClr val="0B1120"/>
           </a:solidFill>
-          <a:ln w="19050">
-            <a:solidFill>
-              <a:srgbClr val="E2E8F0"/>
-            </a:solidFill>
+          <a:ln>
+            <a:noFill/>
           </a:ln>
         </p:spPr>
         <p:style>
@@ -4891,24 +7244,129 @@
       </p:sp>
       <p:sp>
         <p:nvSpPr>
-          <p:cNvPr id="5" name="Oval 4"/>
+          <p:cNvPr id="3" name="TextBox 2"/>
+          <p:cNvSpPr txBox="1"/>
+          <p:nvPr/>
+        </p:nvSpPr>
+        <p:spPr>
+          <a:xfrm>
+            <a:off x="731520" y="320040"/>
+            <a:ext cx="10698480" cy="320040"/>
+          </a:xfrm>
+          <a:prstGeom prst="rect">
+            <a:avLst/>
+          </a:prstGeom>
+          <a:noFill/>
+        </p:spPr>
+        <p:txBody>
+          <a:bodyPr wrap="square" tIns="0" bIns="0">
+            <a:spAutoFit/>
+          </a:bodyPr>
+          <a:lstStyle/>
+          <a:p>
+            <a:pPr>
+              <a:defRPr sz="1100" b="1">
+                <a:solidFill>
+                  <a:srgbClr val="EA580C"/>
+                </a:solidFill>
+              </a:defRPr>
+            </a:pPr>
+            <a:r>
+              <a:t>INTUITIVE USER EXPERIENCE</a:t>
+            </a:r>
+          </a:p>
+        </p:txBody>
+      </p:sp>
+      <p:sp>
+        <p:nvSpPr>
+          <p:cNvPr id="4" name="TextBox 3"/>
+          <p:cNvSpPr txBox="1"/>
+          <p:nvPr/>
+        </p:nvSpPr>
+        <p:spPr>
+          <a:xfrm>
+            <a:off x="731520" y="621792"/>
+            <a:ext cx="10698480" cy="594360"/>
+          </a:xfrm>
+          <a:prstGeom prst="rect">
+            <a:avLst/>
+          </a:prstGeom>
+          <a:noFill/>
+        </p:spPr>
+        <p:txBody>
+          <a:bodyPr wrap="square" tIns="0" bIns="0">
+            <a:spAutoFit/>
+          </a:bodyPr>
+          <a:lstStyle/>
+          <a:p>
+            <a:pPr>
+              <a:defRPr sz="2200" b="1">
+                <a:solidFill>
+                  <a:srgbClr val="F8FAFC"/>
+                </a:solidFill>
+              </a:defRPr>
+            </a:pPr>
+            <a:r>
+              <a:t>How Campus Mart Works: In 3 Simple Steps</a:t>
+            </a:r>
+          </a:p>
+        </p:txBody>
+      </p:sp>
+      <p:sp>
+        <p:nvSpPr>
+          <p:cNvPr id="5" name="TextBox 4"/>
+          <p:cNvSpPr txBox="1"/>
+          <p:nvPr/>
+        </p:nvSpPr>
+        <p:spPr>
+          <a:xfrm>
+            <a:off x="731520" y="1143000"/>
+            <a:ext cx="10698480" cy="320040"/>
+          </a:xfrm>
+          <a:prstGeom prst="rect">
+            <a:avLst/>
+          </a:prstGeom>
+          <a:noFill/>
+        </p:spPr>
+        <p:txBody>
+          <a:bodyPr wrap="square" tIns="0" bIns="0">
+            <a:spAutoFit/>
+          </a:bodyPr>
+          <a:lstStyle/>
+          <a:p>
+            <a:pPr>
+              <a:defRPr sz="1100">
+                <a:solidFill>
+                  <a:srgbClr val="94A3B8"/>
+                </a:solidFill>
+              </a:defRPr>
+            </a:pPr>
+            <a:r>
+              <a:t>From classroom pre-order to express zero-queue pickup</a:t>
+            </a:r>
+          </a:p>
+        </p:txBody>
+      </p:sp>
+      <p:sp>
+        <p:nvSpPr>
+          <p:cNvPr id="6" name="Rounded Rectangle 5"/>
           <p:cNvSpPr/>
           <p:nvPr/>
         </p:nvSpPr>
         <p:spPr>
           <a:xfrm>
-            <a:off x="1005840" y="1737360"/>
-            <a:ext cx="731520" cy="731520"/>
-          </a:xfrm>
-          <a:prstGeom prst="ellipse">
+            <a:off x="731520" y="1645920"/>
+            <a:ext cx="3291840" cy="4754880"/>
+          </a:xfrm>
+          <a:prstGeom prst="roundRect">
             <a:avLst/>
           </a:prstGeom>
           <a:solidFill>
-            <a:srgbClr val="EA580C"/>
+            <a:srgbClr val="1E293B"/>
           </a:solidFill>
-          <a:ln>
+          <a:ln w="12700">
             <a:solidFill>
-              <a:srgbClr val="EA580C"/>
+              <a:srgbClr val="334155"/>
             </a:solidFill>
           </a:ln>
         </p:spPr>
@@ -4930,29 +7388,20 @@
           <a:bodyPr rtlCol="0" anchor="ctr"/>
           <a:lstStyle/>
           <a:p>
-            <a:pPr algn="ctr">
-              <a:defRPr sz="1800" b="1">
-                <a:solidFill>
-                  <a:srgbClr val="FFFFFF"/>
-                </a:solidFill>
-              </a:defRPr>
-            </a:pPr>
-            <a:r>
-              <a:t>1</a:t>
-            </a:r>
-          </a:p>
-        </p:txBody>
-      </p:sp>
-      <p:sp>
-        <p:nvSpPr>
-          <p:cNvPr id="6" name="TextBox 5"/>
+            <a:pPr algn="ctr"/>
+          </a:p>
+        </p:txBody>
+      </p:sp>
+      <p:sp>
+        <p:nvSpPr>
+          <p:cNvPr id="7" name="TextBox 6"/>
           <p:cNvSpPr txBox="1"/>
           <p:nvPr/>
         </p:nvSpPr>
         <p:spPr>
           <a:xfrm>
-            <a:off x="1005840" y="2651760"/>
-            <a:ext cx="2926080" cy="3108960"/>
+            <a:off x="896112" y="1773936"/>
+            <a:ext cx="2962656" cy="4498848"/>
           </a:xfrm>
           <a:prstGeom prst="rect">
             <a:avLst/>
@@ -4960,59 +7409,79 @@
           <a:noFill/>
         </p:spPr>
         <p:txBody>
-          <a:bodyPr wrap="square">
+          <a:bodyPr wrap="square" lIns="0" rIns="0" tIns="0" bIns="0">
             <a:spAutoFit/>
           </a:bodyPr>
           <a:lstStyle/>
           <a:p>
             <a:pPr>
-              <a:defRPr sz="1500" b="1">
-                <a:solidFill>
-                  <a:srgbClr val="0F172A"/>
-                </a:solidFill>
-              </a:defRPr>
-            </a:pPr>
-            <a:r>
-              <a:t>Step 1: Browse &amp; Add to Cart</a:t>
-            </a:r>
-          </a:p>
-          <a:p>
-            <a:pPr>
-              <a:spcBef>
-                <a:spcPts val="1000"/>
-              </a:spcBef>
-              <a:defRPr sz="1200">
-                <a:solidFill>
-                  <a:srgbClr val="1E293B"/>
-                </a:solidFill>
-              </a:defRPr>
-            </a:pPr>
-            <a:r>
-              <a:t>Open Campus Mart on your phone, choose your favorite food, chocolates, or stationery, and add them to cart.</a:t>
-            </a:r>
-          </a:p>
-        </p:txBody>
-      </p:sp>
-      <p:sp>
-        <p:nvSpPr>
-          <p:cNvPr id="7" name="Rounded Rectangle 6"/>
+              <a:spcAft>
+                <a:spcPts val="400"/>
+              </a:spcAft>
+              <a:defRPr sz="1400" b="1">
+                <a:solidFill>
+                  <a:srgbClr val="EA580C"/>
+                </a:solidFill>
+              </a:defRPr>
+            </a:pPr>
+            <a:r>
+              <a:t>1️⃣ Browse &amp; Add to Cart</a:t>
+            </a:r>
+          </a:p>
+          <a:p>
+            <a:pPr>
+              <a:defRPr sz="1100">
+                <a:solidFill>
+                  <a:srgbClr val="94A3B8"/>
+                </a:solidFill>
+              </a:defRPr>
+            </a:pPr>
+            <a:r>
+              <a:t>• Open progressive web app on smartphone</a:t>
+            </a:r>
+            <a:br/>
+            <a:br/>
+            <a:r>
+              <a:t>• Filter by 23 campus shops or category (Food, Beverages, Stationery, Snacks)</a:t>
+            </a:r>
+            <a:br/>
+            <a:br/>
+            <a:r>
+              <a:t>• 100% Pure Vegetarian campus certified menu</a:t>
+            </a:r>
+            <a:br/>
+            <a:br/>
+            <a:r>
+              <a:t>• Add desired items with custom cooking notes (e.g. 'Extra spicy, no onions')</a:t>
+            </a:r>
+            <a:br/>
+            <a:br/>
+            <a:r>
+              <a:t>• Real-time price and split preview</a:t>
+            </a:r>
+          </a:p>
+        </p:txBody>
+      </p:sp>
+      <p:sp>
+        <p:nvSpPr>
+          <p:cNvPr id="8" name="Rounded Rectangle 7"/>
           <p:cNvSpPr/>
           <p:nvPr/>
         </p:nvSpPr>
         <p:spPr>
           <a:xfrm>
-            <a:off x="4343400" y="1463040"/>
-            <a:ext cx="3474720" cy="4663440"/>
+            <a:off x="4389120" y="1645920"/>
+            <a:ext cx="3291840" cy="4754880"/>
           </a:xfrm>
           <a:prstGeom prst="roundRect">
             <a:avLst/>
           </a:prstGeom>
           <a:solidFill>
-            <a:srgbClr val="FFFFFF"/>
+            <a:srgbClr val="1E293B"/>
           </a:solidFill>
-          <a:ln w="19050">
+          <a:ln w="12700">
             <a:solidFill>
-              <a:srgbClr val="E2E8F0"/>
+              <a:srgbClr val="334155"/>
             </a:solidFill>
           </a:ln>
         </p:spPr>
@@ -5040,24 +7509,94 @@
       </p:sp>
       <p:sp>
         <p:nvSpPr>
-          <p:cNvPr id="8" name="Oval 7"/>
+          <p:cNvPr id="9" name="TextBox 8"/>
+          <p:cNvSpPr txBox="1"/>
+          <p:nvPr/>
+        </p:nvSpPr>
+        <p:spPr>
+          <a:xfrm>
+            <a:off x="4553712" y="1773936"/>
+            <a:ext cx="2962656" cy="4498848"/>
+          </a:xfrm>
+          <a:prstGeom prst="rect">
+            <a:avLst/>
+          </a:prstGeom>
+          <a:noFill/>
+        </p:spPr>
+        <p:txBody>
+          <a:bodyPr wrap="square" lIns="0" rIns="0" tIns="0" bIns="0">
+            <a:spAutoFit/>
+          </a:bodyPr>
+          <a:lstStyle/>
+          <a:p>
+            <a:pPr>
+              <a:spcAft>
+                <a:spcPts val="400"/>
+              </a:spcAft>
+              <a:defRPr sz="1400" b="1">
+                <a:solidFill>
+                  <a:srgbClr val="0284C7"/>
+                </a:solidFill>
+              </a:defRPr>
+            </a:pPr>
+            <a:r>
+              <a:t>2️⃣ Choose Slot &amp; Checkout</a:t>
+            </a:r>
+          </a:p>
+          <a:p>
+            <a:pPr>
+              <a:defRPr sz="1100">
+                <a:solidFill>
+                  <a:srgbClr val="94A3B8"/>
+                </a:solidFill>
+              </a:defRPr>
+            </a:pPr>
+            <a:r>
+              <a:t>• Select immediate prep or scheduled break time slot</a:t>
+            </a:r>
+            <a:br/>
+            <a:br/>
+            <a:r>
+              <a:t>• Choose payment: UPI Split Gateway or Cash on Pickup Counter</a:t>
+            </a:r>
+            <a:br/>
+            <a:br/>
+            <a:r>
+              <a:t>• Automatic token generation (e.g. #ORD-104)</a:t>
+            </a:r>
+            <a:br/>
+            <a:br/>
+            <a:r>
+              <a:t>• Instant dispatch to designated shop's kitchen dashboard</a:t>
+            </a:r>
+            <a:br/>
+            <a:br/>
+            <a:r>
+              <a:t>• Auto-deduction commission recorded</a:t>
+            </a:r>
+          </a:p>
+        </p:txBody>
+      </p:sp>
+      <p:sp>
+        <p:nvSpPr>
+          <p:cNvPr id="10" name="Rounded Rectangle 9"/>
           <p:cNvSpPr/>
           <p:nvPr/>
         </p:nvSpPr>
         <p:spPr>
           <a:xfrm>
-            <a:off x="4617720" y="1737360"/>
-            <a:ext cx="731520" cy="731520"/>
-          </a:xfrm>
-          <a:prstGeom prst="ellipse">
+            <a:off x="8046720" y="1645920"/>
+            <a:ext cx="3291840" cy="4754880"/>
+          </a:xfrm>
+          <a:prstGeom prst="roundRect">
             <a:avLst/>
           </a:prstGeom>
           <a:solidFill>
-            <a:srgbClr val="0284C7"/>
+            <a:srgbClr val="1E293B"/>
           </a:solidFill>
-          <a:ln>
+          <a:ln w="12700">
             <a:solidFill>
-              <a:srgbClr val="0284C7"/>
+              <a:srgbClr val="334155"/>
             </a:solidFill>
           </a:ln>
         </p:spPr>
@@ -5079,29 +7618,20 @@
           <a:bodyPr rtlCol="0" anchor="ctr"/>
           <a:lstStyle/>
           <a:p>
-            <a:pPr algn="ctr">
-              <a:defRPr sz="1800" b="1">
-                <a:solidFill>
-                  <a:srgbClr val="FFFFFF"/>
-                </a:solidFill>
-              </a:defRPr>
-            </a:pPr>
-            <a:r>
-              <a:t>2</a:t>
-            </a:r>
-          </a:p>
-        </p:txBody>
-      </p:sp>
-      <p:sp>
-        <p:nvSpPr>
-          <p:cNvPr id="9" name="TextBox 8"/>
+            <a:pPr algn="ctr"/>
+          </a:p>
+        </p:txBody>
+      </p:sp>
+      <p:sp>
+        <p:nvSpPr>
+          <p:cNvPr id="11" name="TextBox 10"/>
           <p:cNvSpPr txBox="1"/>
           <p:nvPr/>
         </p:nvSpPr>
         <p:spPr>
           <a:xfrm>
-            <a:off x="4617720" y="2651760"/>
-            <a:ext cx="2926080" cy="3108960"/>
+            <a:off x="8211312" y="1773936"/>
+            <a:ext cx="2962656" cy="4498848"/>
           </a:xfrm>
           <a:prstGeom prst="rect">
             <a:avLst/>
@@ -5109,184 +7639,55 @@
           <a:noFill/>
         </p:spPr>
         <p:txBody>
-          <a:bodyPr wrap="square">
+          <a:bodyPr wrap="square" lIns="0" rIns="0" tIns="0" bIns="0">
             <a:spAutoFit/>
           </a:bodyPr>
           <a:lstStyle/>
           <a:p>
             <a:pPr>
-              <a:defRPr sz="1500" b="1">
-                <a:solidFill>
-                  <a:srgbClr val="0F172A"/>
-                </a:solidFill>
-              </a:defRPr>
-            </a:pPr>
-            <a:r>
-              <a:t>Step 2: Choose Pickup Slot</a:t>
-            </a:r>
-          </a:p>
-          <a:p>
-            <a:pPr>
-              <a:spcBef>
-                <a:spcPts val="1000"/>
-              </a:spcBef>
-              <a:defRPr sz="1200">
-                <a:solidFill>
-                  <a:srgbClr val="1E293B"/>
-                </a:solidFill>
-              </a:defRPr>
-            </a:pPr>
-            <a:r>
-              <a:t>Pick a convenient pickup time slot (e.g. 'In 15 Mins' or 'Lunch Break') and get your unique Order ID Token.</a:t>
-            </a:r>
-          </a:p>
-        </p:txBody>
-      </p:sp>
-      <p:sp>
-        <p:nvSpPr>
-          <p:cNvPr id="10" name="Rounded Rectangle 9"/>
-          <p:cNvSpPr/>
-          <p:nvPr/>
-        </p:nvSpPr>
-        <p:spPr>
-          <a:xfrm>
-            <a:off x="7955280" y="1463040"/>
-            <a:ext cx="3474720" cy="4663440"/>
-          </a:xfrm>
-          <a:prstGeom prst="roundRect">
-            <a:avLst/>
-          </a:prstGeom>
-          <a:solidFill>
-            <a:srgbClr val="FFFFFF"/>
-          </a:solidFill>
-          <a:ln w="19050">
-            <a:solidFill>
-              <a:srgbClr val="E2E8F0"/>
-            </a:solidFill>
-          </a:ln>
-        </p:spPr>
-        <p:style>
-          <a:lnRef idx="1">
-            <a:schemeClr val="accent1"/>
-          </a:lnRef>
-          <a:fillRef idx="3">
-            <a:schemeClr val="accent1"/>
-          </a:fillRef>
-          <a:effectRef idx="2">
-            <a:schemeClr val="accent1"/>
-          </a:effectRef>
-          <a:fontRef idx="minor">
-            <a:schemeClr val="lt1"/>
-          </a:fontRef>
-        </p:style>
-        <p:txBody>
-          <a:bodyPr rtlCol="0" anchor="ctr"/>
-          <a:lstStyle/>
-          <a:p>
-            <a:pPr algn="ctr"/>
-          </a:p>
-        </p:txBody>
-      </p:sp>
-      <p:sp>
-        <p:nvSpPr>
-          <p:cNvPr id="11" name="Oval 10"/>
-          <p:cNvSpPr/>
-          <p:nvPr/>
-        </p:nvSpPr>
-        <p:spPr>
-          <a:xfrm>
-            <a:off x="8229600" y="1737360"/>
-            <a:ext cx="731520" cy="731520"/>
-          </a:xfrm>
-          <a:prstGeom prst="ellipse">
-            <a:avLst/>
-          </a:prstGeom>
-          <a:solidFill>
-            <a:srgbClr val="10B981"/>
-          </a:solidFill>
-          <a:ln>
-            <a:solidFill>
-              <a:srgbClr val="10B981"/>
-            </a:solidFill>
-          </a:ln>
-        </p:spPr>
-        <p:style>
-          <a:lnRef idx="1">
-            <a:schemeClr val="accent1"/>
-          </a:lnRef>
-          <a:fillRef idx="3">
-            <a:schemeClr val="accent1"/>
-          </a:fillRef>
-          <a:effectRef idx="2">
-            <a:schemeClr val="accent1"/>
-          </a:effectRef>
-          <a:fontRef idx="minor">
-            <a:schemeClr val="lt1"/>
-          </a:fontRef>
-        </p:style>
-        <p:txBody>
-          <a:bodyPr rtlCol="0" anchor="ctr"/>
-          <a:lstStyle/>
-          <a:p>
-            <a:pPr algn="ctr">
-              <a:defRPr sz="1800" b="1">
-                <a:solidFill>
-                  <a:srgbClr val="FFFFFF"/>
-                </a:solidFill>
-              </a:defRPr>
-            </a:pPr>
-            <a:r>
-              <a:t>3</a:t>
-            </a:r>
-          </a:p>
-        </p:txBody>
-      </p:sp>
-      <p:sp>
-        <p:nvSpPr>
-          <p:cNvPr id="12" name="TextBox 11"/>
-          <p:cNvSpPr txBox="1"/>
-          <p:nvPr/>
-        </p:nvSpPr>
-        <p:spPr>
-          <a:xfrm>
-            <a:off x="8229600" y="2651760"/>
-            <a:ext cx="2926080" cy="3108960"/>
-          </a:xfrm>
-          <a:prstGeom prst="rect">
-            <a:avLst/>
-          </a:prstGeom>
-          <a:noFill/>
-        </p:spPr>
-        <p:txBody>
-          <a:bodyPr wrap="square">
-            <a:spAutoFit/>
-          </a:bodyPr>
-          <a:lstStyle/>
-          <a:p>
-            <a:pPr>
-              <a:defRPr sz="1500" b="1">
-                <a:solidFill>
-                  <a:srgbClr val="0F172A"/>
-                </a:solidFill>
-              </a:defRPr>
-            </a:pPr>
-            <a:r>
-              <a:t>Step 3: Express Counter Pickup</a:t>
-            </a:r>
-          </a:p>
-          <a:p>
-            <a:pPr>
-              <a:spcBef>
-                <a:spcPts val="1000"/>
-              </a:spcBef>
-              <a:defRPr sz="1200">
-                <a:solidFill>
-                  <a:srgbClr val="1E293B"/>
-                </a:solidFill>
-              </a:defRPr>
-            </a:pPr>
-            <a:r>
-              <a:t>Staff packs your order in advance. When the status turns Green (Ready), collect it without waiting in line!</a:t>
+              <a:spcAft>
+                <a:spcPts val="400"/>
+              </a:spcAft>
+              <a:defRPr sz="1400" b="1">
+                <a:solidFill>
+                  <a:srgbClr val="10B981"/>
+                </a:solidFill>
+              </a:defRPr>
+            </a:pPr>
+            <a:r>
+              <a:t>3️⃣ Express Pickup &amp; Bell</a:t>
+            </a:r>
+          </a:p>
+          <a:p>
+            <a:pPr>
+              <a:defRPr sz="1100">
+                <a:solidFill>
+                  <a:srgbClr val="94A3B8"/>
+                </a:solidFill>
+              </a:defRPr>
+            </a:pPr>
+            <a:r>
+              <a:t>• Kitchen packs items in advance</a:t>
+            </a:r>
+            <a:br/>
+            <a:br/>
+            <a:r>
+              <a:t>• Web Audio 4-tone chime + Voice announcement rings on student screen</a:t>
+            </a:r>
+            <a:br/>
+            <a:br/>
+            <a:r>
+              <a:t>• Glowing green pickup token pops up</a:t>
+            </a:r>
+            <a:br/>
+            <a:br/>
+            <a:r>
+              <a:t>• Walk to counter, show digital token, grab packed meal in 10 seconds!</a:t>
+            </a:r>
+            <a:br/>
+            <a:br/>
+            <a:r>
+              <a:t>• Rate experience with 1-5 stars</a:t>
             </a:r>
           </a:p>
         </p:txBody>
@@ -5311,95 +7712,23 @@
       <p:grpSpPr/>
       <p:sp>
         <p:nvSpPr>
-          <p:cNvPr id="2" name="TextBox 1"/>
-          <p:cNvSpPr txBox="1"/>
-          <p:nvPr/>
-        </p:nvSpPr>
-        <p:spPr>
-          <a:xfrm>
-            <a:off x="731520" y="320040"/>
-            <a:ext cx="10698480" cy="320040"/>
-          </a:xfrm>
-          <a:prstGeom prst="rect">
-            <a:avLst/>
-          </a:prstGeom>
-          <a:noFill/>
-        </p:spPr>
-        <p:txBody>
-          <a:bodyPr wrap="none">
-            <a:spAutoFit/>
-          </a:bodyPr>
-          <a:lstStyle/>
-          <a:p>
-            <a:pPr>
-              <a:defRPr sz="1100" b="1">
-                <a:solidFill>
-                  <a:srgbClr val="EA580C"/>
-                </a:solidFill>
-              </a:defRPr>
-            </a:pPr>
-            <a:r>
-              <a:t>REAL-TIME TRACKING</a:t>
-            </a:r>
-          </a:p>
-        </p:txBody>
-      </p:sp>
-      <p:sp>
-        <p:nvSpPr>
-          <p:cNvPr id="3" name="TextBox 2"/>
-          <p:cNvSpPr txBox="1"/>
-          <p:nvPr/>
-        </p:nvSpPr>
-        <p:spPr>
-          <a:xfrm>
-            <a:off x="731520" y="594360"/>
-            <a:ext cx="10698480" cy="731520"/>
-          </a:xfrm>
-          <a:prstGeom prst="rect">
-            <a:avLst/>
-          </a:prstGeom>
-          <a:noFill/>
-        </p:spPr>
-        <p:txBody>
-          <a:bodyPr wrap="none">
-            <a:spAutoFit/>
-          </a:bodyPr>
-          <a:lstStyle/>
-          <a:p>
-            <a:pPr>
-              <a:defRPr sz="2500" b="1">
-                <a:solidFill>
-                  <a:srgbClr val="0F172A"/>
-                </a:solidFill>
-              </a:defRPr>
-            </a:pPr>
-            <a:r>
-              <a:t>Live 4-Stage Order Tracking System</a:t>
-            </a:r>
-          </a:p>
-        </p:txBody>
-      </p:sp>
-      <p:sp>
-        <p:nvSpPr>
-          <p:cNvPr id="4" name="Rounded Rectangle 3"/>
+          <p:cNvPr id="2" name="Rectangle 1"/>
           <p:cNvSpPr/>
           <p:nvPr/>
         </p:nvSpPr>
         <p:spPr>
           <a:xfrm>
-            <a:off x="731520" y="1463040"/>
-            <a:ext cx="2606040" cy="2286000"/>
-          </a:xfrm>
-          <a:prstGeom prst="roundRect">
+            <a:off x="0" y="0"/>
+            <a:ext cx="12191695" cy="6858000"/>
+          </a:xfrm>
+          <a:prstGeom prst="rect">
             <a:avLst/>
           </a:prstGeom>
           <a:solidFill>
-            <a:srgbClr val="FFFFFF"/>
+            <a:srgbClr val="0B1120"/>
           </a:solidFill>
-          <a:ln w="19050">
-            <a:solidFill>
-              <a:srgbClr val="E2E8F0"/>
-            </a:solidFill>
+          <a:ln>
+            <a:noFill/>
           </a:ln>
         </p:spPr>
         <p:style>
@@ -5426,14 +7755,84 @@
       </p:sp>
       <p:sp>
         <p:nvSpPr>
+          <p:cNvPr id="3" name="TextBox 2"/>
+          <p:cNvSpPr txBox="1"/>
+          <p:nvPr/>
+        </p:nvSpPr>
+        <p:spPr>
+          <a:xfrm>
+            <a:off x="731520" y="320040"/>
+            <a:ext cx="10698480" cy="320040"/>
+          </a:xfrm>
+          <a:prstGeom prst="rect">
+            <a:avLst/>
+          </a:prstGeom>
+          <a:noFill/>
+        </p:spPr>
+        <p:txBody>
+          <a:bodyPr wrap="square" tIns="0" bIns="0">
+            <a:spAutoFit/>
+          </a:bodyPr>
+          <a:lstStyle/>
+          <a:p>
+            <a:pPr>
+              <a:defRPr sz="1100" b="1">
+                <a:solidFill>
+                  <a:srgbClr val="EA580C"/>
+                </a:solidFill>
+              </a:defRPr>
+            </a:pPr>
+            <a:r>
+              <a:t>REAL-TIME PIPELINE &amp; FRESHNESS</a:t>
+            </a:r>
+          </a:p>
+        </p:txBody>
+      </p:sp>
+      <p:sp>
+        <p:nvSpPr>
+          <p:cNvPr id="4" name="TextBox 3"/>
+          <p:cNvSpPr txBox="1"/>
+          <p:nvPr/>
+        </p:nvSpPr>
+        <p:spPr>
+          <a:xfrm>
+            <a:off x="731520" y="621792"/>
+            <a:ext cx="10698480" cy="594360"/>
+          </a:xfrm>
+          <a:prstGeom prst="rect">
+            <a:avLst/>
+          </a:prstGeom>
+          <a:noFill/>
+        </p:spPr>
+        <p:txBody>
+          <a:bodyPr wrap="square" tIns="0" bIns="0">
+            <a:spAutoFit/>
+          </a:bodyPr>
+          <a:lstStyle/>
+          <a:p>
+            <a:pPr>
+              <a:defRPr sz="2200" b="1">
+                <a:solidFill>
+                  <a:srgbClr val="F8FAFC"/>
+                </a:solidFill>
+              </a:defRPr>
+            </a:pPr>
+            <a:r>
+              <a:t>Live 4-Stage Tracking &amp; 20-Min Freshness Timer</a:t>
+            </a:r>
+          </a:p>
+        </p:txBody>
+      </p:sp>
+      <p:sp>
+        <p:nvSpPr>
           <p:cNvPr id="5" name="TextBox 4"/>
           <p:cNvSpPr txBox="1"/>
           <p:nvPr/>
         </p:nvSpPr>
         <p:spPr>
           <a:xfrm>
-            <a:off x="914400" y="1645920"/>
-            <a:ext cx="2240280" cy="1828800"/>
+            <a:off x="731520" y="1143000"/>
+            <a:ext cx="10698480" cy="320040"/>
           </a:xfrm>
           <a:prstGeom prst="rect">
             <a:avLst/>
@@ -5441,35 +7840,20 @@
           <a:noFill/>
         </p:spPr>
         <p:txBody>
-          <a:bodyPr wrap="square">
+          <a:bodyPr wrap="square" tIns="0" bIns="0">
             <a:spAutoFit/>
           </a:bodyPr>
           <a:lstStyle/>
           <a:p>
             <a:pPr>
-              <a:defRPr sz="1400" b="1">
-                <a:solidFill>
-                  <a:srgbClr val="EAB308"/>
-                </a:solidFill>
-              </a:defRPr>
-            </a:pPr>
-            <a:r>
-              <a:t>1. Placed</a:t>
-            </a:r>
-          </a:p>
-          <a:p>
-            <a:pPr>
-              <a:spcBef>
-                <a:spcPts val="600"/>
-              </a:spcBef>
               <a:defRPr sz="1100">
                 <a:solidFill>
-                  <a:srgbClr val="1E293B"/>
-                </a:solidFill>
-              </a:defRPr>
-            </a:pPr>
-            <a:r>
-              <a:t>Order received by the Mart kitchen &amp; system.</a:t>
+                  <a:srgbClr val="94A3B8"/>
+                </a:solidFill>
+              </a:defRPr>
+            </a:pPr>
+            <a:r>
+              <a:t>Immediate visual, acoustic, and voice status feedback across student and shop screens</a:t>
             </a:r>
           </a:p>
         </p:txBody>
@@ -5482,18 +7866,18 @@
         </p:nvSpPr>
         <p:spPr>
           <a:xfrm>
-            <a:off x="3429000" y="1463040"/>
-            <a:ext cx="2606040" cy="2286000"/>
+            <a:off x="731520" y="1645920"/>
+            <a:ext cx="5669280" cy="1051560"/>
           </a:xfrm>
           <a:prstGeom prst="roundRect">
             <a:avLst/>
           </a:prstGeom>
           <a:solidFill>
-            <a:srgbClr val="FFFFFF"/>
+            <a:srgbClr val="1E293B"/>
           </a:solidFill>
-          <a:ln w="19050">
+          <a:ln w="12700">
             <a:solidFill>
-              <a:srgbClr val="E2E8F0"/>
+              <a:srgbClr val="334155"/>
             </a:solidFill>
           </a:ln>
         </p:spPr>
@@ -5527,8 +7911,8 @@
         </p:nvSpPr>
         <p:spPr>
           <a:xfrm>
-            <a:off x="3611880" y="1645920"/>
-            <a:ext cx="2240280" cy="1828800"/>
+            <a:off x="896112" y="1773936"/>
+            <a:ext cx="5340096" cy="795527"/>
           </a:xfrm>
           <a:prstGeom prst="rect">
             <a:avLst/>
@@ -5536,35 +7920,35 @@
           <a:noFill/>
         </p:spPr>
         <p:txBody>
-          <a:bodyPr wrap="square">
+          <a:bodyPr wrap="square" lIns="0" rIns="0" tIns="0" bIns="0">
             <a:spAutoFit/>
           </a:bodyPr>
           <a:lstStyle/>
           <a:p>
             <a:pPr>
+              <a:spcAft>
+                <a:spcPts val="400"/>
+              </a:spcAft>
               <a:defRPr sz="1400" b="1">
                 <a:solidFill>
-                  <a:srgbClr val="EA580C"/>
-                </a:solidFill>
-              </a:defRPr>
-            </a:pPr>
-            <a:r>
-              <a:t>2. Preparing</a:t>
-            </a:r>
-          </a:p>
-          <a:p>
-            <a:pPr>
-              <a:spcBef>
-                <a:spcPts val="600"/>
-              </a:spcBef>
+                  <a:srgbClr val="F59E0B"/>
+                </a:solidFill>
+              </a:defRPr>
+            </a:pPr>
+            <a:r>
+              <a:t>📝  1. Placed (Pending)</a:t>
+            </a:r>
+          </a:p>
+          <a:p>
+            <a:pPr>
               <a:defRPr sz="1100">
                 <a:solidFill>
-                  <a:srgbClr val="1E293B"/>
-                </a:solidFill>
-              </a:defRPr>
-            </a:pPr>
-            <a:r>
-              <a:t>Staff is cooking your food or packing items.</a:t>
+                  <a:srgbClr val="94A3B8"/>
+                </a:solidFill>
+              </a:defRPr>
+            </a:pPr>
+            <a:r>
+              <a:t>Order logged in MongoDB; dispatched to specific shop dashboard.</a:t>
             </a:r>
           </a:p>
         </p:txBody>
@@ -5577,18 +7961,18 @@
         </p:nvSpPr>
         <p:spPr>
           <a:xfrm>
-            <a:off x="6126480" y="1463040"/>
-            <a:ext cx="2606040" cy="2286000"/>
+            <a:off x="731520" y="2788920"/>
+            <a:ext cx="5669280" cy="1051560"/>
           </a:xfrm>
           <a:prstGeom prst="roundRect">
             <a:avLst/>
           </a:prstGeom>
           <a:solidFill>
-            <a:srgbClr val="FFFFFF"/>
+            <a:srgbClr val="1E293B"/>
           </a:solidFill>
-          <a:ln w="19050">
+          <a:ln w="12700">
             <a:solidFill>
-              <a:srgbClr val="E2E8F0"/>
+              <a:srgbClr val="334155"/>
             </a:solidFill>
           </a:ln>
         </p:spPr>
@@ -5622,8 +8006,8 @@
         </p:nvSpPr>
         <p:spPr>
           <a:xfrm>
-            <a:off x="6309360" y="1645920"/>
-            <a:ext cx="2240280" cy="1828800"/>
+            <a:off x="896112" y="2916936"/>
+            <a:ext cx="5340096" cy="795527"/>
           </a:xfrm>
           <a:prstGeom prst="rect">
             <a:avLst/>
@@ -5631,35 +8015,35 @@
           <a:noFill/>
         </p:spPr>
         <p:txBody>
-          <a:bodyPr wrap="square">
+          <a:bodyPr wrap="square" lIns="0" rIns="0" tIns="0" bIns="0">
             <a:spAutoFit/>
           </a:bodyPr>
           <a:lstStyle/>
           <a:p>
             <a:pPr>
+              <a:spcAft>
+                <a:spcPts val="400"/>
+              </a:spcAft>
               <a:defRPr sz="1400" b="1">
                 <a:solidFill>
-                  <a:srgbClr val="10B981"/>
-                </a:solidFill>
-              </a:defRPr>
-            </a:pPr>
-            <a:r>
-              <a:t>3. Ready for Pickup</a:t>
-            </a:r>
-          </a:p>
-          <a:p>
-            <a:pPr>
-              <a:spcBef>
-                <a:spcPts val="600"/>
-              </a:spcBef>
+                  <a:srgbClr val="EA580C"/>
+                </a:solidFill>
+              </a:defRPr>
+            </a:pPr>
+            <a:r>
+              <a:t>🍳  2. Preparing (Cooking/Packing)</a:t>
+            </a:r>
+          </a:p>
+          <a:p>
+            <a:pPr>
               <a:defRPr sz="1100">
                 <a:solidFill>
-                  <a:srgbClr val="1E293B"/>
-                </a:solidFill>
-              </a:defRPr>
-            </a:pPr>
-            <a:r>
-              <a:t>Items are packed on counter. Time to collect!</a:t>
+                  <a:srgbClr val="94A3B8"/>
+                </a:solidFill>
+              </a:defRPr>
+            </a:pPr>
+            <a:r>
+              <a:t>Shop kitchen prepares hot meal or mart staff packs items.</a:t>
             </a:r>
           </a:p>
         </p:txBody>
@@ -5672,18 +8056,18 @@
         </p:nvSpPr>
         <p:spPr>
           <a:xfrm>
-            <a:off x="8823960" y="1463040"/>
-            <a:ext cx="2606040" cy="2286000"/>
+            <a:off x="731520" y="3931920"/>
+            <a:ext cx="5669280" cy="1051560"/>
           </a:xfrm>
           <a:prstGeom prst="roundRect">
             <a:avLst/>
           </a:prstGeom>
           <a:solidFill>
-            <a:srgbClr val="FFFFFF"/>
+            <a:srgbClr val="1E293B"/>
           </a:solidFill>
-          <a:ln w="19050">
+          <a:ln w="12700">
             <a:solidFill>
-              <a:srgbClr val="E2E8F0"/>
+              <a:srgbClr val="334155"/>
             </a:solidFill>
           </a:ln>
         </p:spPr>
@@ -5717,8 +8101,8 @@
         </p:nvSpPr>
         <p:spPr>
           <a:xfrm>
-            <a:off x="9006840" y="1645920"/>
-            <a:ext cx="2240280" cy="1828800"/>
+            <a:off x="896112" y="4059935"/>
+            <a:ext cx="5340096" cy="795527"/>
           </a:xfrm>
           <a:prstGeom prst="rect">
             <a:avLst/>
@@ -5726,35 +8110,35 @@
           <a:noFill/>
         </p:spPr>
         <p:txBody>
-          <a:bodyPr wrap="square">
+          <a:bodyPr wrap="square" lIns="0" rIns="0" tIns="0" bIns="0">
             <a:spAutoFit/>
           </a:bodyPr>
           <a:lstStyle/>
           <a:p>
             <a:pPr>
+              <a:spcAft>
+                <a:spcPts val="400"/>
+              </a:spcAft>
               <a:defRPr sz="1400" b="1">
                 <a:solidFill>
-                  <a:srgbClr val="0284C7"/>
-                </a:solidFill>
-              </a:defRPr>
-            </a:pPr>
-            <a:r>
-              <a:t>4. Completed</a:t>
-            </a:r>
-          </a:p>
-          <a:p>
-            <a:pPr>
-              <a:spcBef>
-                <a:spcPts val="600"/>
-              </a:spcBef>
+                  <a:srgbClr val="10B981"/>
+                </a:solidFill>
+              </a:defRPr>
+            </a:pPr>
+            <a:r>
+              <a:t>🔔  3. Ready for Pickup (Alert Triggers)</a:t>
+            </a:r>
+          </a:p>
+          <a:p>
+            <a:pPr>
               <a:defRPr sz="1100">
                 <a:solidFill>
-                  <a:srgbClr val="1E293B"/>
-                </a:solidFill>
-              </a:defRPr>
-            </a:pPr>
-            <a:r>
-              <a:t>Order picked up and verified with Token ID.</a:t>
+                  <a:srgbClr val="94A3B8"/>
+                </a:solidFill>
+              </a:defRPr>
+            </a:pPr>
+            <a:r>
+              <a:t>Web Audio 4-tone harmonic chime + 20-min freshness timer active!</a:t>
             </a:r>
           </a:p>
         </p:txBody>
@@ -5767,18 +8151,18 @@
         </p:nvSpPr>
         <p:spPr>
           <a:xfrm>
-            <a:off x="731520" y="4023360"/>
-            <a:ext cx="10698480" cy="2103120"/>
+            <a:off x="731520" y="5074920"/>
+            <a:ext cx="5669280" cy="1051560"/>
           </a:xfrm>
           <a:prstGeom prst="roundRect">
             <a:avLst/>
           </a:prstGeom>
           <a:solidFill>
-            <a:srgbClr val="FFFFFF"/>
+            <a:srgbClr val="1E293B"/>
           </a:solidFill>
-          <a:ln w="19050">
+          <a:ln w="12700">
             <a:solidFill>
-              <a:srgbClr val="E2E8F0"/>
+              <a:srgbClr val="334155"/>
             </a:solidFill>
           </a:ln>
         </p:spPr>
@@ -5812,8 +8196,8 @@
         </p:nvSpPr>
         <p:spPr>
           <a:xfrm>
-            <a:off x="1005840" y="4206240"/>
-            <a:ext cx="10149840" cy="1737360"/>
+            <a:off x="896112" y="5202936"/>
+            <a:ext cx="5340096" cy="795527"/>
           </a:xfrm>
           <a:prstGeom prst="rect">
             <a:avLst/>
@@ -5821,47 +8205,63 @@
           <a:noFill/>
         </p:spPr>
         <p:txBody>
-          <a:bodyPr wrap="none">
+          <a:bodyPr wrap="square" lIns="0" rIns="0" tIns="0" bIns="0">
             <a:spAutoFit/>
           </a:bodyPr>
           <a:lstStyle/>
           <a:p>
             <a:pPr>
-              <a:defRPr sz="1600" b="1">
-                <a:solidFill>
-                  <a:srgbClr val="0F172A"/>
-                </a:solidFill>
-              </a:defRPr>
-            </a:pPr>
-            <a:r>
-              <a:t>💡 How Real-Time Tracking Works:</a:t>
-            </a:r>
-          </a:p>
-          <a:p>
-            <a:pPr>
-              <a:spcBef>
-                <a:spcPts val="600"/>
-              </a:spcBef>
-              <a:defRPr sz="1250">
-                <a:solidFill>
-                  <a:srgbClr val="1E293B"/>
-                </a:solidFill>
-              </a:defRPr>
-            </a:pPr>
-            <a:r>
-              <a:t>• The web app uses asynchronous background polling every 4 seconds.</a:t>
-            </a:r>
-            <a:br/>
-            <a:r>
-              <a:t>• When kitchen staff updates the order status in their admin dashboard, the student's screen updates to green automatically without page refresh!</a:t>
-            </a:r>
-            <a:br/>
-            <a:r>
-              <a:t>• Students always know exactly when their food is hot &amp; ready.</a:t>
-            </a:r>
-          </a:p>
-        </p:txBody>
-      </p:sp>
+              <a:spcAft>
+                <a:spcPts val="400"/>
+              </a:spcAft>
+              <a:defRPr sz="1400" b="1">
+                <a:solidFill>
+                  <a:srgbClr val="0284C7"/>
+                </a:solidFill>
+              </a:defRPr>
+            </a:pPr>
+            <a:r>
+              <a:t>✅  4. Completed (Handed Over)</a:t>
+            </a:r>
+          </a:p>
+          <a:p>
+            <a:pPr>
+              <a:defRPr sz="1100">
+                <a:solidFill>
+                  <a:srgbClr val="94A3B8"/>
+                </a:solidFill>
+              </a:defRPr>
+            </a:pPr>
+            <a:r>
+              <a:t>Order marked finished; 4-digit PIN verified &amp; invoice generated.</a:t>
+            </a:r>
+          </a:p>
+        </p:txBody>
+      </p:sp>
+      <p:pic>
+        <p:nvPicPr>
+          <p:cNvPr id="14" name="Picture 13" descr="mobile_pickup.jpg"/>
+          <p:cNvPicPr>
+            <a:picLocks noChangeAspect="1"/>
+          </p:cNvPicPr>
+          <p:nvPr/>
+        </p:nvPicPr>
+        <p:blipFill>
+          <a:blip r:embed="rId2"/>
+          <a:stretch>
+            <a:fillRect/>
+          </a:stretch>
+        </p:blipFill>
+        <p:spPr>
+          <a:xfrm>
+            <a:off x="6766560" y="1645920"/>
+            <a:ext cx="4663440" cy="4480560"/>
+          </a:xfrm>
+          <a:prstGeom prst="rect">
+            <a:avLst/>
+          </a:prstGeom>
+        </p:spPr>
+      </p:pic>
     </p:spTree>
   </p:cSld>
   <p:clrMapOvr>
@@ -5882,95 +8282,23 @@
       <p:grpSpPr/>
       <p:sp>
         <p:nvSpPr>
-          <p:cNvPr id="2" name="TextBox 1"/>
-          <p:cNvSpPr txBox="1"/>
-          <p:nvPr/>
-        </p:nvSpPr>
-        <p:spPr>
-          <a:xfrm>
-            <a:off x="731520" y="320040"/>
-            <a:ext cx="10698480" cy="320040"/>
-          </a:xfrm>
-          <a:prstGeom prst="rect">
-            <a:avLst/>
-          </a:prstGeom>
-          <a:noFill/>
-        </p:spPr>
-        <p:txBody>
-          <a:bodyPr wrap="none">
-            <a:spAutoFit/>
-          </a:bodyPr>
-          <a:lstStyle/>
-          <a:p>
-            <a:pPr>
-              <a:defRPr sz="1100" b="1">
-                <a:solidFill>
-                  <a:srgbClr val="EA580C"/>
-                </a:solidFill>
-              </a:defRPr>
-            </a:pPr>
-            <a:r>
-              <a:t>ADMIN &amp; SECURITY</a:t>
-            </a:r>
-          </a:p>
-        </p:txBody>
-      </p:sp>
-      <p:sp>
-        <p:nvSpPr>
-          <p:cNvPr id="3" name="TextBox 2"/>
-          <p:cNvSpPr txBox="1"/>
-          <p:nvPr/>
-        </p:nvSpPr>
-        <p:spPr>
-          <a:xfrm>
-            <a:off x="731520" y="594360"/>
-            <a:ext cx="10698480" cy="731520"/>
-          </a:xfrm>
-          <a:prstGeom prst="rect">
-            <a:avLst/>
-          </a:prstGeom>
-          <a:noFill/>
-        </p:spPr>
-        <p:txBody>
-          <a:bodyPr wrap="none">
-            <a:spAutoFit/>
-          </a:bodyPr>
-          <a:lstStyle/>
-          <a:p>
-            <a:pPr>
-              <a:defRPr sz="2500" b="1">
-                <a:solidFill>
-                  <a:srgbClr val="0F172A"/>
-                </a:solidFill>
-              </a:defRPr>
-            </a:pPr>
-            <a:r>
-              <a:t>Staff Dashboard &amp; Super Admin Approval System</a:t>
-            </a:r>
-          </a:p>
-        </p:txBody>
-      </p:sp>
-      <p:sp>
-        <p:nvSpPr>
-          <p:cNvPr id="4" name="Rounded Rectangle 3"/>
+          <p:cNvPr id="2" name="Rectangle 1"/>
           <p:cNvSpPr/>
           <p:nvPr/>
         </p:nvSpPr>
         <p:spPr>
           <a:xfrm>
-            <a:off x="731520" y="1371600"/>
-            <a:ext cx="6217920" cy="4754880"/>
-          </a:xfrm>
-          <a:prstGeom prst="roundRect">
+            <a:off x="0" y="0"/>
+            <a:ext cx="12191695" cy="6858000"/>
+          </a:xfrm>
+          <a:prstGeom prst="rect">
             <a:avLst/>
           </a:prstGeom>
           <a:solidFill>
-            <a:srgbClr val="FFFFFF"/>
+            <a:srgbClr val="0B1120"/>
           </a:solidFill>
-          <a:ln w="19050">
-            <a:solidFill>
-              <a:srgbClr val="E2E8F0"/>
-            </a:solidFill>
+          <a:ln>
+            <a:noFill/>
           </a:ln>
         </p:spPr>
         <p:style>
@@ -5997,14 +8325,84 @@
       </p:sp>
       <p:sp>
         <p:nvSpPr>
+          <p:cNvPr id="3" name="TextBox 2"/>
+          <p:cNvSpPr txBox="1"/>
+          <p:nvPr/>
+        </p:nvSpPr>
+        <p:spPr>
+          <a:xfrm>
+            <a:off x="731520" y="320040"/>
+            <a:ext cx="10698480" cy="320040"/>
+          </a:xfrm>
+          <a:prstGeom prst="rect">
+            <a:avLst/>
+          </a:prstGeom>
+          <a:noFill/>
+        </p:spPr>
+        <p:txBody>
+          <a:bodyPr wrap="square" tIns="0" bIns="0">
+            <a:spAutoFit/>
+          </a:bodyPr>
+          <a:lstStyle/>
+          <a:p>
+            <a:pPr>
+              <a:defRPr sz="1100" b="1">
+                <a:solidFill>
+                  <a:srgbClr val="EA580C"/>
+                </a:solidFill>
+              </a:defRPr>
+            </a:pPr>
+            <a:r>
+              <a:t>BUSINESS MODEL &amp; MONETIZATION</a:t>
+            </a:r>
+          </a:p>
+        </p:txBody>
+      </p:sp>
+      <p:sp>
+        <p:nvSpPr>
+          <p:cNvPr id="4" name="TextBox 3"/>
+          <p:cNvSpPr txBox="1"/>
+          <p:nvPr/>
+        </p:nvSpPr>
+        <p:spPr>
+          <a:xfrm>
+            <a:off x="731520" y="621792"/>
+            <a:ext cx="10698480" cy="594360"/>
+          </a:xfrm>
+          <a:prstGeom prst="rect">
+            <a:avLst/>
+          </a:prstGeom>
+          <a:noFill/>
+        </p:spPr>
+        <p:txBody>
+          <a:bodyPr wrap="square" tIns="0" bIns="0">
+            <a:spAutoFit/>
+          </a:bodyPr>
+          <a:lstStyle/>
+          <a:p>
+            <a:pPr>
+              <a:defRPr sz="2200" b="1">
+                <a:solidFill>
+                  <a:srgbClr val="F8FAFC"/>
+                </a:solidFill>
+              </a:defRPr>
+            </a:pPr>
+            <a:r>
+              <a:t>Fintech Revenue Split Architecture (Platform Profit)</a:t>
+            </a:r>
+          </a:p>
+        </p:txBody>
+      </p:sp>
+      <p:sp>
+        <p:nvSpPr>
           <p:cNvPr id="5" name="TextBox 4"/>
           <p:cNvSpPr txBox="1"/>
           <p:nvPr/>
         </p:nvSpPr>
         <p:spPr>
           <a:xfrm>
-            <a:off x="914400" y="1554480"/>
-            <a:ext cx="5852160" cy="4297680"/>
+            <a:off x="731520" y="1143000"/>
+            <a:ext cx="10698480" cy="320040"/>
           </a:xfrm>
           <a:prstGeom prst="rect">
             <a:avLst/>
@@ -6012,84 +8410,428 @@
           <a:noFill/>
         </p:spPr>
         <p:txBody>
-          <a:bodyPr wrap="none">
+          <a:bodyPr wrap="square" tIns="0" bIns="0">
             <a:spAutoFit/>
           </a:bodyPr>
           <a:lstStyle/>
           <a:p>
             <a:pPr>
-              <a:defRPr sz="1600" b="1">
+              <a:defRPr sz="1100">
+                <a:solidFill>
+                  <a:srgbClr val="94A3B8"/>
+                </a:solidFill>
+              </a:defRPr>
+            </a:pPr>
+            <a:r>
+              <a:t>Automated ₹5.00 packaging fee distribution model for sustainable platform revenue</a:t>
+            </a:r>
+          </a:p>
+        </p:txBody>
+      </p:sp>
+      <p:sp>
+        <p:nvSpPr>
+          <p:cNvPr id="6" name="Rounded Rectangle 5"/>
+          <p:cNvSpPr/>
+          <p:nvPr/>
+        </p:nvSpPr>
+        <p:spPr>
+          <a:xfrm>
+            <a:off x="731520" y="1645920"/>
+            <a:ext cx="5669280" cy="1234440"/>
+          </a:xfrm>
+          <a:prstGeom prst="roundRect">
+            <a:avLst/>
+          </a:prstGeom>
+          <a:solidFill>
+            <a:srgbClr val="1E293B"/>
+          </a:solidFill>
+          <a:ln w="12700">
+            <a:solidFill>
+              <a:srgbClr val="334155"/>
+            </a:solidFill>
+          </a:ln>
+        </p:spPr>
+        <p:style>
+          <a:lnRef idx="1">
+            <a:schemeClr val="accent1"/>
+          </a:lnRef>
+          <a:fillRef idx="3">
+            <a:schemeClr val="accent1"/>
+          </a:fillRef>
+          <a:effectRef idx="2">
+            <a:schemeClr val="accent1"/>
+          </a:effectRef>
+          <a:fontRef idx="minor">
+            <a:schemeClr val="lt1"/>
+          </a:fontRef>
+        </p:style>
+        <p:txBody>
+          <a:bodyPr rtlCol="0" anchor="ctr"/>
+          <a:lstStyle/>
+          <a:p>
+            <a:pPr algn="ctr"/>
+          </a:p>
+        </p:txBody>
+      </p:sp>
+      <p:sp>
+        <p:nvSpPr>
+          <p:cNvPr id="7" name="TextBox 6"/>
+          <p:cNvSpPr txBox="1"/>
+          <p:nvPr/>
+        </p:nvSpPr>
+        <p:spPr>
+          <a:xfrm>
+            <a:off x="896112" y="1773936"/>
+            <a:ext cx="5340096" cy="978408"/>
+          </a:xfrm>
+          <a:prstGeom prst="rect">
+            <a:avLst/>
+          </a:prstGeom>
+          <a:noFill/>
+        </p:spPr>
+        <p:txBody>
+          <a:bodyPr wrap="square" lIns="0" rIns="0" tIns="0" bIns="0">
+            <a:spAutoFit/>
+          </a:bodyPr>
+          <a:lstStyle/>
+          <a:p>
+            <a:pPr>
+              <a:spcAft>
+                <a:spcPts val="400"/>
+              </a:spcAft>
+              <a:defRPr sz="1400" b="1">
                 <a:solidFill>
                   <a:srgbClr val="EA580C"/>
                 </a:solidFill>
               </a:defRPr>
             </a:pPr>
             <a:r>
-              <a:t>🛡️ Super Admin Protection (Owner: Deepak)</a:t>
-            </a:r>
-          </a:p>
-          <a:p>
-            <a:pPr>
-              <a:spcBef>
-                <a:spcPts val="1000"/>
-              </a:spcBef>
-              <a:defRPr sz="1150">
-                <a:solidFill>
-                  <a:srgbClr val="1E293B"/>
-                </a:solidFill>
-              </a:defRPr>
-            </a:pPr>
-            <a:r>
-              <a:t>✔ No Unauthorized Access: Nobody can log into the Admin panel unless Super Admin Deepak explicitly approves their staff request.</a:t>
-            </a:r>
-          </a:p>
-          <a:p>
-            <a:pPr>
-              <a:spcBef>
-                <a:spcPts val="1000"/>
-              </a:spcBef>
-              <a:defRPr sz="1150">
-                <a:solidFill>
-                  <a:srgbClr val="1E293B"/>
-                </a:solidFill>
-              </a:defRPr>
-            </a:pPr>
-            <a:r>
-              <a:t>✔ 1-Click Status &amp; Menu Controls: Staff can accept orders, change prices, or toggle out-of-stock items with a single tap.</a:t>
-            </a:r>
-          </a:p>
-          <a:p>
-            <a:pPr>
-              <a:spcBef>
-                <a:spcPts val="1000"/>
-              </a:spcBef>
-              <a:defRPr sz="1150">
-                <a:solidFill>
-                  <a:srgbClr val="1E293B"/>
-                </a:solidFill>
-              </a:defRPr>
-            </a:pPr>
-            <a:r>
-              <a:t>✔ Device Gallery Photo Upload: Upload product photos directly from mobile gallery or pick from instant 1-click presets.</a:t>
-            </a:r>
-          </a:p>
-          <a:p>
-            <a:pPr>
-              <a:spcBef>
-                <a:spcPts val="1000"/>
-              </a:spcBef>
-              <a:defRPr sz="1150">
-                <a:solidFill>
-                  <a:srgbClr val="1E293B"/>
-                </a:solidFill>
-              </a:defRPr>
-            </a:pPr>
-            <a:r>
-              <a:t>✔ Live Sales &amp; Revenue Stats: Calculates daily revenue, active cooking count, and total orders in real time.</a:t>
-            </a:r>
-          </a:p>
-        </p:txBody>
-      </p:sp>
+              <a:t>💰  ₹5.00 Pre-Packaging Fee Model</a:t>
+            </a:r>
+          </a:p>
+          <a:p>
+            <a:pPr>
+              <a:defRPr sz="1100">
+                <a:solidFill>
+                  <a:srgbClr val="94A3B8"/>
+                </a:solidFill>
+              </a:defRPr>
+            </a:pPr>
+            <a:r>
+              <a:t>Every pre-order includes a nominal ₹5.00 packaging and convenience charge.</a:t>
+            </a:r>
+          </a:p>
+        </p:txBody>
+      </p:sp>
+      <p:sp>
+        <p:nvSpPr>
+          <p:cNvPr id="8" name="Rounded Rectangle 7"/>
+          <p:cNvSpPr/>
+          <p:nvPr/>
+        </p:nvSpPr>
+        <p:spPr>
+          <a:xfrm>
+            <a:off x="731520" y="2971800"/>
+            <a:ext cx="5669280" cy="1234440"/>
+          </a:xfrm>
+          <a:prstGeom prst="roundRect">
+            <a:avLst/>
+          </a:prstGeom>
+          <a:solidFill>
+            <a:srgbClr val="1E293B"/>
+          </a:solidFill>
+          <a:ln w="12700">
+            <a:solidFill>
+              <a:srgbClr val="334155"/>
+            </a:solidFill>
+          </a:ln>
+        </p:spPr>
+        <p:style>
+          <a:lnRef idx="1">
+            <a:schemeClr val="accent1"/>
+          </a:lnRef>
+          <a:fillRef idx="3">
+            <a:schemeClr val="accent1"/>
+          </a:fillRef>
+          <a:effectRef idx="2">
+            <a:schemeClr val="accent1"/>
+          </a:effectRef>
+          <a:fontRef idx="minor">
+            <a:schemeClr val="lt1"/>
+          </a:fontRef>
+        </p:style>
+        <p:txBody>
+          <a:bodyPr rtlCol="0" anchor="ctr"/>
+          <a:lstStyle/>
+          <a:p>
+            <a:pPr algn="ctr"/>
+          </a:p>
+        </p:txBody>
+      </p:sp>
+      <p:sp>
+        <p:nvSpPr>
+          <p:cNvPr id="9" name="TextBox 8"/>
+          <p:cNvSpPr txBox="1"/>
+          <p:nvPr/>
+        </p:nvSpPr>
+        <p:spPr>
+          <a:xfrm>
+            <a:off x="896112" y="3099816"/>
+            <a:ext cx="5340096" cy="978408"/>
+          </a:xfrm>
+          <a:prstGeom prst="rect">
+            <a:avLst/>
+          </a:prstGeom>
+          <a:noFill/>
+        </p:spPr>
+        <p:txBody>
+          <a:bodyPr wrap="square" lIns="0" rIns="0" tIns="0" bIns="0">
+            <a:spAutoFit/>
+          </a:bodyPr>
+          <a:lstStyle/>
+          <a:p>
+            <a:pPr>
+              <a:spcAft>
+                <a:spcPts val="400"/>
+              </a:spcAft>
+              <a:defRPr sz="1400" b="1">
+                <a:solidFill>
+                  <a:srgbClr val="10B981"/>
+                </a:solidFill>
+              </a:defRPr>
+            </a:pPr>
+            <a:r>
+              <a:t>👑  ₹2.50 Platform Profit (Deepak Sharma)</a:t>
+            </a:r>
+          </a:p>
+          <a:p>
+            <a:pPr>
+              <a:defRPr sz="1100">
+                <a:solidFill>
+                  <a:srgbClr val="94A3B8"/>
+                </a:solidFill>
+              </a:defRPr>
+            </a:pPr>
+            <a:r>
+              <a:t>₹2.50 is routed directly to the Platform Founder (Deepak) as pure net service commission.</a:t>
+            </a:r>
+          </a:p>
+        </p:txBody>
+      </p:sp>
+      <p:sp>
+        <p:nvSpPr>
+          <p:cNvPr id="10" name="Rounded Rectangle 9"/>
+          <p:cNvSpPr/>
+          <p:nvPr/>
+        </p:nvSpPr>
+        <p:spPr>
+          <a:xfrm>
+            <a:off x="731520" y="4297680"/>
+            <a:ext cx="5669280" cy="1234440"/>
+          </a:xfrm>
+          <a:prstGeom prst="roundRect">
+            <a:avLst/>
+          </a:prstGeom>
+          <a:solidFill>
+            <a:srgbClr val="1E293B"/>
+          </a:solidFill>
+          <a:ln w="12700">
+            <a:solidFill>
+              <a:srgbClr val="334155"/>
+            </a:solidFill>
+          </a:ln>
+        </p:spPr>
+        <p:style>
+          <a:lnRef idx="1">
+            <a:schemeClr val="accent1"/>
+          </a:lnRef>
+          <a:fillRef idx="3">
+            <a:schemeClr val="accent1"/>
+          </a:fillRef>
+          <a:effectRef idx="2">
+            <a:schemeClr val="accent1"/>
+          </a:effectRef>
+          <a:fontRef idx="minor">
+            <a:schemeClr val="lt1"/>
+          </a:fontRef>
+        </p:style>
+        <p:txBody>
+          <a:bodyPr rtlCol="0" anchor="ctr"/>
+          <a:lstStyle/>
+          <a:p>
+            <a:pPr algn="ctr"/>
+          </a:p>
+        </p:txBody>
+      </p:sp>
+      <p:sp>
+        <p:nvSpPr>
+          <p:cNvPr id="11" name="TextBox 10"/>
+          <p:cNvSpPr txBox="1"/>
+          <p:nvPr/>
+        </p:nvSpPr>
+        <p:spPr>
+          <a:xfrm>
+            <a:off x="896112" y="4425696"/>
+            <a:ext cx="5340096" cy="978408"/>
+          </a:xfrm>
+          <a:prstGeom prst="rect">
+            <a:avLst/>
+          </a:prstGeom>
+          <a:noFill/>
+        </p:spPr>
+        <p:txBody>
+          <a:bodyPr wrap="square" lIns="0" rIns="0" tIns="0" bIns="0">
+            <a:spAutoFit/>
+          </a:bodyPr>
+          <a:lstStyle/>
+          <a:p>
+            <a:pPr>
+              <a:spcAft>
+                <a:spcPts val="400"/>
+              </a:spcAft>
+              <a:defRPr sz="1400" b="1">
+                <a:solidFill>
+                  <a:srgbClr val="0284C7"/>
+                </a:solidFill>
+              </a:defRPr>
+            </a:pPr>
+            <a:r>
+              <a:t>📦  ₹2.50 Vendor Packaging Cost Share</a:t>
+            </a:r>
+          </a:p>
+          <a:p>
+            <a:pPr>
+              <a:defRPr sz="1100">
+                <a:solidFill>
+                  <a:srgbClr val="94A3B8"/>
+                </a:solidFill>
+              </a:defRPr>
+            </a:pPr>
+            <a:r>
+              <a:t>₹2.50 is credited to the shopkeeper to cover disposable boxes, carry bags, and cutlery.</a:t>
+            </a:r>
+          </a:p>
+        </p:txBody>
+      </p:sp>
+      <p:sp>
+        <p:nvSpPr>
+          <p:cNvPr id="12" name="Rounded Rectangle 11"/>
+          <p:cNvSpPr/>
+          <p:nvPr/>
+        </p:nvSpPr>
+        <p:spPr>
+          <a:xfrm>
+            <a:off x="731520" y="5623560"/>
+            <a:ext cx="5669280" cy="868680"/>
+          </a:xfrm>
+          <a:prstGeom prst="roundRect">
+            <a:avLst/>
+          </a:prstGeom>
+          <a:solidFill>
+            <a:srgbClr val="1E293B"/>
+          </a:solidFill>
+          <a:ln w="12700">
+            <a:solidFill>
+              <a:srgbClr val="334155"/>
+            </a:solidFill>
+          </a:ln>
+        </p:spPr>
+        <p:style>
+          <a:lnRef idx="1">
+            <a:schemeClr val="accent1"/>
+          </a:lnRef>
+          <a:fillRef idx="3">
+            <a:schemeClr val="accent1"/>
+          </a:fillRef>
+          <a:effectRef idx="2">
+            <a:schemeClr val="accent1"/>
+          </a:effectRef>
+          <a:fontRef idx="minor">
+            <a:schemeClr val="lt1"/>
+          </a:fontRef>
+        </p:style>
+        <p:txBody>
+          <a:bodyPr rtlCol="0" anchor="ctr"/>
+          <a:lstStyle/>
+          <a:p>
+            <a:pPr algn="ctr"/>
+          </a:p>
+        </p:txBody>
+      </p:sp>
+      <p:sp>
+        <p:nvSpPr>
+          <p:cNvPr id="13" name="TextBox 12"/>
+          <p:cNvSpPr txBox="1"/>
+          <p:nvPr/>
+        </p:nvSpPr>
+        <p:spPr>
+          <a:xfrm>
+            <a:off x="896112" y="5751576"/>
+            <a:ext cx="5340096" cy="612647"/>
+          </a:xfrm>
+          <a:prstGeom prst="rect">
+            <a:avLst/>
+          </a:prstGeom>
+          <a:noFill/>
+        </p:spPr>
+        <p:txBody>
+          <a:bodyPr wrap="square" lIns="0" rIns="0" tIns="0" bIns="0">
+            <a:spAutoFit/>
+          </a:bodyPr>
+          <a:lstStyle/>
+          <a:p>
+            <a:pPr>
+              <a:spcAft>
+                <a:spcPts val="400"/>
+              </a:spcAft>
+              <a:defRPr sz="1400" b="1">
+                <a:solidFill>
+                  <a:srgbClr val="A855F7"/>
+                </a:solidFill>
+              </a:defRPr>
+            </a:pPr>
+            <a:r>
+              <a:t>⚡  Instant Split Routing Simulation</a:t>
+            </a:r>
+          </a:p>
+          <a:p>
+            <a:pPr>
+              <a:defRPr sz="1100">
+                <a:solidFill>
+                  <a:srgbClr val="94A3B8"/>
+                </a:solidFill>
+              </a:defRPr>
+            </a:pPr>
+            <a:r>
+              <a:t>Supports Razorpay Route / Cashfree Split automated transfers directly to linked bank UPI VPAs.</a:t>
+            </a:r>
+          </a:p>
+        </p:txBody>
+      </p:sp>
+      <p:pic>
+        <p:nvPicPr>
+          <p:cNvPr id="14" name="Picture 13" descr="revenue_split.jpg"/>
+          <p:cNvPicPr>
+            <a:picLocks noChangeAspect="1"/>
+          </p:cNvPicPr>
+          <p:nvPr/>
+        </p:nvPicPr>
+        <p:blipFill>
+          <a:blip r:embed="rId2"/>
+          <a:stretch>
+            <a:fillRect/>
+          </a:stretch>
+        </p:blipFill>
+        <p:spPr>
+          <a:xfrm>
+            <a:off x="6766560" y="1645920"/>
+            <a:ext cx="4663440" cy="4846320"/>
+          </a:xfrm>
+          <a:prstGeom prst="rect">
+            <a:avLst/>
+          </a:prstGeom>
+        </p:spPr>
+      </p:pic>
     </p:spTree>
   </p:cSld>
   <p:clrMapOvr>
@@ -6110,95 +8852,23 @@
       <p:grpSpPr/>
       <p:sp>
         <p:nvSpPr>
-          <p:cNvPr id="2" name="TextBox 1"/>
-          <p:cNvSpPr txBox="1"/>
-          <p:nvPr/>
-        </p:nvSpPr>
-        <p:spPr>
-          <a:xfrm>
-            <a:off x="731520" y="320040"/>
-            <a:ext cx="10698480" cy="320040"/>
-          </a:xfrm>
-          <a:prstGeom prst="rect">
-            <a:avLst/>
-          </a:prstGeom>
-          <a:noFill/>
-        </p:spPr>
-        <p:txBody>
-          <a:bodyPr wrap="none">
-            <a:spAutoFit/>
-          </a:bodyPr>
-          <a:lstStyle/>
-          <a:p>
-            <a:pPr>
-              <a:defRPr sz="1100" b="1">
-                <a:solidFill>
-                  <a:srgbClr val="EA580C"/>
-                </a:solidFill>
-              </a:defRPr>
-            </a:pPr>
-            <a:r>
-              <a:t>TECHNOLOGY STACK</a:t>
-            </a:r>
-          </a:p>
-        </p:txBody>
-      </p:sp>
-      <p:sp>
-        <p:nvSpPr>
-          <p:cNvPr id="3" name="TextBox 2"/>
-          <p:cNvSpPr txBox="1"/>
-          <p:nvPr/>
-        </p:nvSpPr>
-        <p:spPr>
-          <a:xfrm>
-            <a:off x="731520" y="594360"/>
-            <a:ext cx="10698480" cy="731520"/>
-          </a:xfrm>
-          <a:prstGeom prst="rect">
-            <a:avLst/>
-          </a:prstGeom>
-          <a:noFill/>
-        </p:spPr>
-        <p:txBody>
-          <a:bodyPr wrap="none">
-            <a:spAutoFit/>
-          </a:bodyPr>
-          <a:lstStyle/>
-          <a:p>
-            <a:pPr>
-              <a:defRPr sz="2500" b="1">
-                <a:solidFill>
-                  <a:srgbClr val="0F172A"/>
-                </a:solidFill>
-              </a:defRPr>
-            </a:pPr>
-            <a:r>
-              <a:t>Technologies Used: Clean &amp; Super Fast</a:t>
-            </a:r>
-          </a:p>
-        </p:txBody>
-      </p:sp>
-      <p:sp>
-        <p:nvSpPr>
-          <p:cNvPr id="4" name="Rounded Rectangle 3"/>
+          <p:cNvPr id="2" name="Rectangle 1"/>
           <p:cNvSpPr/>
           <p:nvPr/>
         </p:nvSpPr>
         <p:spPr>
           <a:xfrm>
-            <a:off x="731520" y="1371600"/>
-            <a:ext cx="6217920" cy="1143000"/>
-          </a:xfrm>
-          <a:prstGeom prst="roundRect">
+            <a:off x="0" y="0"/>
+            <a:ext cx="12191695" cy="6858000"/>
+          </a:xfrm>
+          <a:prstGeom prst="rect">
             <a:avLst/>
           </a:prstGeom>
           <a:solidFill>
-            <a:srgbClr val="FFFFFF"/>
+            <a:srgbClr val="0B1120"/>
           </a:solidFill>
-          <a:ln w="19050">
-            <a:solidFill>
-              <a:srgbClr val="E2E8F0"/>
-            </a:solidFill>
+          <a:ln>
+            <a:noFill/>
           </a:ln>
         </p:spPr>
         <p:style>
@@ -6225,14 +8895,84 @@
       </p:sp>
       <p:sp>
         <p:nvSpPr>
+          <p:cNvPr id="3" name="TextBox 2"/>
+          <p:cNvSpPr txBox="1"/>
+          <p:nvPr/>
+        </p:nvSpPr>
+        <p:spPr>
+          <a:xfrm>
+            <a:off x="731520" y="320040"/>
+            <a:ext cx="10698480" cy="320040"/>
+          </a:xfrm>
+          <a:prstGeom prst="rect">
+            <a:avLst/>
+          </a:prstGeom>
+          <a:noFill/>
+        </p:spPr>
+        <p:txBody>
+          <a:bodyPr wrap="square" tIns="0" bIns="0">
+            <a:spAutoFit/>
+          </a:bodyPr>
+          <a:lstStyle/>
+          <a:p>
+            <a:pPr>
+              <a:defRPr sz="1100" b="1">
+                <a:solidFill>
+                  <a:srgbClr val="EA580C"/>
+                </a:solidFill>
+              </a:defRPr>
+            </a:pPr>
+            <a:r>
+              <a:t>COMMISSION SECURITY &amp; CASH MANAGEMENT</a:t>
+            </a:r>
+          </a:p>
+        </p:txBody>
+      </p:sp>
+      <p:sp>
+        <p:nvSpPr>
+          <p:cNvPr id="4" name="TextBox 3"/>
+          <p:cNvSpPr txBox="1"/>
+          <p:nvPr/>
+        </p:nvSpPr>
+        <p:spPr>
+          <a:xfrm>
+            <a:off x="731520" y="621792"/>
+            <a:ext cx="10698480" cy="594360"/>
+          </a:xfrm>
+          <a:prstGeom prst="rect">
+            <a:avLst/>
+          </a:prstGeom>
+          <a:noFill/>
+        </p:spPr>
+        <p:txBody>
+          <a:bodyPr wrap="square" tIns="0" bIns="0">
+            <a:spAutoFit/>
+          </a:bodyPr>
+          <a:lstStyle/>
+          <a:p>
+            <a:pPr>
+              <a:defRPr sz="2200" b="1">
+                <a:solidFill>
+                  <a:srgbClr val="F8FAFC"/>
+                </a:solidFill>
+              </a:defRPr>
+            </a:pPr>
+            <a:r>
+              <a:t>Auto-Deduction Live Cash Ledger System</a:t>
+            </a:r>
+          </a:p>
+        </p:txBody>
+      </p:sp>
+      <p:sp>
+        <p:nvSpPr>
           <p:cNvPr id="5" name="TextBox 4"/>
           <p:cNvSpPr txBox="1"/>
           <p:nvPr/>
         </p:nvSpPr>
         <p:spPr>
           <a:xfrm>
-            <a:off x="914400" y="1463040"/>
-            <a:ext cx="5852160" cy="960120"/>
+            <a:off x="731520" y="1143000"/>
+            <a:ext cx="10698480" cy="320040"/>
           </a:xfrm>
           <a:prstGeom prst="rect">
             <a:avLst/>
@@ -6240,35 +8980,20 @@
           <a:noFill/>
         </p:spPr>
         <p:txBody>
-          <a:bodyPr wrap="none">
+          <a:bodyPr wrap="square" tIns="0" bIns="0">
             <a:spAutoFit/>
           </a:bodyPr>
           <a:lstStyle/>
           <a:p>
             <a:pPr>
-              <a:defRPr sz="1350" b="1">
-                <a:solidFill>
-                  <a:srgbClr val="EA580C"/>
-                </a:solidFill>
-              </a:defRPr>
-            </a:pPr>
-            <a:r>
-              <a:t>Frontend: HTML5 + CSS3 + JS</a:t>
-            </a:r>
-          </a:p>
-          <a:p>
-            <a:pPr>
-              <a:spcBef>
-                <a:spcPts val="200"/>
-              </a:spcBef>
               <a:defRPr sz="1100">
                 <a:solidFill>
-                  <a:srgbClr val="1E293B"/>
-                </a:solidFill>
-              </a:defRPr>
-            </a:pPr>
-            <a:r>
-              <a:t>Fast, lightweight mobile-first UI. Works smoothly on every smartphone without any app download.</a:t>
+                  <a:srgbClr val="94A3B8"/>
+                </a:solidFill>
+              </a:defRPr>
+            </a:pPr>
+            <a:r>
+              <a:t>Solving commission leakage when students pay physical cash at the counter</a:t>
             </a:r>
           </a:p>
         </p:txBody>
@@ -6281,18 +9006,18 @@
         </p:nvSpPr>
         <p:spPr>
           <a:xfrm>
-            <a:off x="731520" y="2606040"/>
-            <a:ext cx="6217920" cy="1143000"/>
+            <a:off x="731520" y="1645920"/>
+            <a:ext cx="5212080" cy="2286000"/>
           </a:xfrm>
           <a:prstGeom prst="roundRect">
             <a:avLst/>
           </a:prstGeom>
           <a:solidFill>
-            <a:srgbClr val="FFFFFF"/>
+            <a:srgbClr val="1E293B"/>
           </a:solidFill>
-          <a:ln w="19050">
+          <a:ln w="12700">
             <a:solidFill>
-              <a:srgbClr val="E2E8F0"/>
+              <a:srgbClr val="334155"/>
             </a:solidFill>
           </a:ln>
         </p:spPr>
@@ -6326,8 +9051,8 @@
         </p:nvSpPr>
         <p:spPr>
           <a:xfrm>
-            <a:off x="914400" y="2697480"/>
-            <a:ext cx="5852160" cy="960120"/>
+            <a:off x="896112" y="1773936"/>
+            <a:ext cx="4882896" cy="2029967"/>
           </a:xfrm>
           <a:prstGeom prst="rect">
             <a:avLst/>
@@ -6335,35 +9060,40 @@
           <a:noFill/>
         </p:spPr>
         <p:txBody>
-          <a:bodyPr wrap="none">
+          <a:bodyPr wrap="square" lIns="0" rIns="0" tIns="0" bIns="0">
             <a:spAutoFit/>
           </a:bodyPr>
           <a:lstStyle/>
           <a:p>
             <a:pPr>
-              <a:defRPr sz="1350" b="1">
-                <a:solidFill>
-                  <a:srgbClr val="0284C7"/>
-                </a:solidFill>
-              </a:defRPr>
-            </a:pPr>
-            <a:r>
-              <a:t>Backend: Python Flask</a:t>
-            </a:r>
-          </a:p>
-          <a:p>
-            <a:pPr>
-              <a:spcBef>
-                <a:spcPts val="200"/>
-              </a:spcBef>
+              <a:spcAft>
+                <a:spcPts val="400"/>
+              </a:spcAft>
+              <a:defRPr sz="1400" b="1">
+                <a:solidFill>
+                  <a:srgbClr val="EF4444"/>
+                </a:solidFill>
+              </a:defRPr>
+            </a:pPr>
+            <a:r>
+              <a:t>💵 The Cash Payment Challenge</a:t>
+            </a:r>
+          </a:p>
+          <a:p>
+            <a:pPr>
               <a:defRPr sz="1100">
                 <a:solidFill>
-                  <a:srgbClr val="1E293B"/>
-                </a:solidFill>
-              </a:defRPr>
-            </a:pPr>
-            <a:r>
-              <a:t>Handles user authentication, order processing, and REST API routing seamlessly.</a:t>
+                  <a:srgbClr val="94A3B8"/>
+                </a:solidFill>
+              </a:defRPr>
+            </a:pPr>
+            <a:r>
+              <a:t>When students pay cash on pickup, the shopkeeper collects 100% of the money (Food + ₹5.00 Packaging Fee).</a:t>
+            </a:r>
+            <a:br/>
+            <a:br/>
+            <a:r>
+              <a:t>Without a ledger, the platform owner risks losing the ₹2.50 commission share on cash transactions.</a:t>
             </a:r>
           </a:p>
         </p:txBody>
@@ -6376,18 +9106,18 @@
         </p:nvSpPr>
         <p:spPr>
           <a:xfrm>
-            <a:off x="731520" y="3840480"/>
-            <a:ext cx="6217920" cy="1143000"/>
+            <a:off x="6217920" y="1645920"/>
+            <a:ext cx="5212080" cy="2286000"/>
           </a:xfrm>
           <a:prstGeom prst="roundRect">
             <a:avLst/>
           </a:prstGeom>
           <a:solidFill>
-            <a:srgbClr val="FFFFFF"/>
+            <a:srgbClr val="1E293B"/>
           </a:solidFill>
-          <a:ln w="19050">
+          <a:ln w="12700">
             <a:solidFill>
-              <a:srgbClr val="E2E8F0"/>
+              <a:srgbClr val="334155"/>
             </a:solidFill>
           </a:ln>
         </p:spPr>
@@ -6421,8 +9151,8 @@
         </p:nvSpPr>
         <p:spPr>
           <a:xfrm>
-            <a:off x="914400" y="3931920"/>
-            <a:ext cx="5852160" cy="960120"/>
+            <a:off x="6382512" y="1773936"/>
+            <a:ext cx="4882896" cy="2029967"/>
           </a:xfrm>
           <a:prstGeom prst="rect">
             <a:avLst/>
@@ -6430,35 +9160,45 @@
           <a:noFill/>
         </p:spPr>
         <p:txBody>
-          <a:bodyPr wrap="none">
+          <a:bodyPr wrap="square" lIns="0" rIns="0" tIns="0" bIns="0">
             <a:spAutoFit/>
           </a:bodyPr>
           <a:lstStyle/>
           <a:p>
             <a:pPr>
-              <a:defRPr sz="1350" b="1">
+              <a:spcAft>
+                <a:spcPts val="400"/>
+              </a:spcAft>
+              <a:defRPr sz="1400" b="1">
                 <a:solidFill>
                   <a:srgbClr val="10B981"/>
                 </a:solidFill>
               </a:defRPr>
             </a:pPr>
             <a:r>
-              <a:t>Database: MongoDB NoSQL</a:t>
-            </a:r>
-          </a:p>
-          <a:p>
-            <a:pPr>
-              <a:spcBef>
-                <a:spcPts val="200"/>
-              </a:spcBef>
+              <a:t>⚡ The Auto-Deduction Solution</a:t>
+            </a:r>
+          </a:p>
+          <a:p>
+            <a:pPr>
               <a:defRPr sz="1100">
                 <a:solidFill>
-                  <a:srgbClr val="1E293B"/>
-                </a:solidFill>
-              </a:defRPr>
-            </a:pPr>
-            <a:r>
-              <a:t>Stores student profiles, catalog items, and order histories in flexible JSON format.</a:t>
+                  <a:srgbClr val="94A3B8"/>
+                </a:solidFill>
+              </a:defRPr>
+            </a:pPr>
+            <a:r>
+              <a:t>• Automatic debt recording: ₹2.50 recorded under shop's 'Pending Commission Due'</a:t>
+            </a:r>
+            <a:br/>
+            <a:br/>
+            <a:r>
+              <a:t>• Automated Offset: Deducted automatically from the shop's next online UPI settlement</a:t>
+            </a:r>
+            <a:br/>
+            <a:br/>
+            <a:r>
+              <a:t>• Zero Commission Leakage for Super Admin Deepak!</a:t>
             </a:r>
           </a:p>
         </p:txBody>
@@ -6471,18 +9211,18 @@
         </p:nvSpPr>
         <p:spPr>
           <a:xfrm>
-            <a:off x="731520" y="5074920"/>
-            <a:ext cx="6217920" cy="1143000"/>
+            <a:off x="731520" y="4114800"/>
+            <a:ext cx="5212080" cy="2286000"/>
           </a:xfrm>
           <a:prstGeom prst="roundRect">
             <a:avLst/>
           </a:prstGeom>
           <a:solidFill>
-            <a:srgbClr val="FFFFFF"/>
+            <a:srgbClr val="1E293B"/>
           </a:solidFill>
-          <a:ln w="19050">
+          <a:ln w="12700">
             <a:solidFill>
-              <a:srgbClr val="E2E8F0"/>
+              <a:srgbClr val="334155"/>
             </a:solidFill>
           </a:ln>
         </p:spPr>
@@ -6516,8 +9256,8 @@
         </p:nvSpPr>
         <p:spPr>
           <a:xfrm>
-            <a:off x="914400" y="5166360"/>
-            <a:ext cx="5852160" cy="960120"/>
+            <a:off x="896112" y="4242816"/>
+            <a:ext cx="4882896" cy="2029967"/>
           </a:xfrm>
           <a:prstGeom prst="rect">
             <a:avLst/>
@@ -6525,35 +9265,143 @@
           <a:noFill/>
         </p:spPr>
         <p:txBody>
-          <a:bodyPr wrap="none">
+          <a:bodyPr wrap="square" lIns="0" rIns="0" tIns="0" bIns="0">
             <a:spAutoFit/>
           </a:bodyPr>
           <a:lstStyle/>
           <a:p>
             <a:pPr>
-              <a:defRPr sz="1350" b="1">
-                <a:solidFill>
-                  <a:srgbClr val="9333EA"/>
-                </a:solidFill>
-              </a:defRPr>
-            </a:pPr>
-            <a:r>
-              <a:t>Security: SHA-256 Encryption</a:t>
-            </a:r>
-          </a:p>
-          <a:p>
-            <a:pPr>
-              <a:spcBef>
-                <a:spcPts val="200"/>
-              </a:spcBef>
+              <a:spcAft>
+                <a:spcPts val="400"/>
+              </a:spcAft>
+              <a:defRPr sz="1400" b="1">
+                <a:solidFill>
+                  <a:srgbClr val="0284C7"/>
+                </a:solidFill>
+              </a:defRPr>
+            </a:pPr>
+            <a:r>
+              <a:t>📊 Live Multi-Shop Balances</a:t>
+            </a:r>
+          </a:p>
+          <a:p>
+            <a:pPr>
               <a:defRPr sz="1100">
                 <a:solidFill>
-                  <a:srgbClr val="1E293B"/>
-                </a:solidFill>
-              </a:defRPr>
-            </a:pPr>
-            <a:r>
-              <a:t>Passwords are cryptographic hashed so no plain passwords are ever saved in database.</a:t>
+                  <a:srgbClr val="94A3B8"/>
+                </a:solidFill>
+              </a:defRPr>
+            </a:pPr>
+            <a:r>
+              <a:t>Super Admin dashboard provides real-time visibility into all 23 shop ledgers:</a:t>
+            </a:r>
+            <a:br/>
+            <a:br/>
+            <a:r>
+              <a:t>• Total Orders &amp; Gross Merchandise Value (GMV)</a:t>
+            </a:r>
+            <a:br/>
+            <a:r>
+              <a:t>• Online vs. Cash Orders breakdown</a:t>
+            </a:r>
+            <a:br/>
+            <a:r>
+              <a:t>• Net Commission Due per outlet</a:t>
+            </a:r>
+          </a:p>
+        </p:txBody>
+      </p:sp>
+      <p:sp>
+        <p:nvSpPr>
+          <p:cNvPr id="12" name="Rounded Rectangle 11"/>
+          <p:cNvSpPr/>
+          <p:nvPr/>
+        </p:nvSpPr>
+        <p:spPr>
+          <a:xfrm>
+            <a:off x="6217920" y="4114800"/>
+            <a:ext cx="5212080" cy="2286000"/>
+          </a:xfrm>
+          <a:prstGeom prst="roundRect">
+            <a:avLst/>
+          </a:prstGeom>
+          <a:solidFill>
+            <a:srgbClr val="1E293B"/>
+          </a:solidFill>
+          <a:ln w="12700">
+            <a:solidFill>
+              <a:srgbClr val="334155"/>
+            </a:solidFill>
+          </a:ln>
+        </p:spPr>
+        <p:style>
+          <a:lnRef idx="1">
+            <a:schemeClr val="accent1"/>
+          </a:lnRef>
+          <a:fillRef idx="3">
+            <a:schemeClr val="accent1"/>
+          </a:fillRef>
+          <a:effectRef idx="2">
+            <a:schemeClr val="accent1"/>
+          </a:effectRef>
+          <a:fontRef idx="minor">
+            <a:schemeClr val="lt1"/>
+          </a:fontRef>
+        </p:style>
+        <p:txBody>
+          <a:bodyPr rtlCol="0" anchor="ctr"/>
+          <a:lstStyle/>
+          <a:p>
+            <a:pPr algn="ctr"/>
+          </a:p>
+        </p:txBody>
+      </p:sp>
+      <p:sp>
+        <p:nvSpPr>
+          <p:cNvPr id="13" name="TextBox 12"/>
+          <p:cNvSpPr txBox="1"/>
+          <p:nvPr/>
+        </p:nvSpPr>
+        <p:spPr>
+          <a:xfrm>
+            <a:off x="6382512" y="4242816"/>
+            <a:ext cx="4882896" cy="2029967"/>
+          </a:xfrm>
+          <a:prstGeom prst="rect">
+            <a:avLst/>
+          </a:prstGeom>
+          <a:noFill/>
+        </p:spPr>
+        <p:txBody>
+          <a:bodyPr wrap="square" lIns="0" rIns="0" tIns="0" bIns="0">
+            <a:spAutoFit/>
+          </a:bodyPr>
+          <a:lstStyle/>
+          <a:p>
+            <a:pPr>
+              <a:spcAft>
+                <a:spcPts val="400"/>
+              </a:spcAft>
+              <a:defRPr sz="1400" b="1">
+                <a:solidFill>
+                  <a:srgbClr val="A855F7"/>
+                </a:solidFill>
+              </a:defRPr>
+            </a:pPr>
+            <a:r>
+              <a:t>🤝 1-Click Manual Settlement</a:t>
+            </a:r>
+          </a:p>
+          <a:p>
+            <a:pPr>
+              <a:defRPr sz="1100">
+                <a:solidFill>
+                  <a:srgbClr val="94A3B8"/>
+                </a:solidFill>
+              </a:defRPr>
+            </a:pPr>
+            <a:r>
+              <a:t>Super Admin can click 'Settle Cash Ledger' once shopkeeper clears physical cash balances, instantly generating a timestamped audit record.</a:t>
             </a:r>
           </a:p>
         </p:txBody>
@@ -6578,95 +9426,23 @@
       <p:grpSpPr/>
       <p:sp>
         <p:nvSpPr>
-          <p:cNvPr id="2" name="TextBox 1"/>
-          <p:cNvSpPr txBox="1"/>
-          <p:nvPr/>
-        </p:nvSpPr>
-        <p:spPr>
-          <a:xfrm>
-            <a:off x="731520" y="320040"/>
-            <a:ext cx="10698480" cy="320040"/>
-          </a:xfrm>
-          <a:prstGeom prst="rect">
-            <a:avLst/>
-          </a:prstGeom>
-          <a:noFill/>
-        </p:spPr>
-        <p:txBody>
-          <a:bodyPr wrap="none">
-            <a:spAutoFit/>
-          </a:bodyPr>
-          <a:lstStyle/>
-          <a:p>
-            <a:pPr>
-              <a:defRPr sz="1100" b="1">
-                <a:solidFill>
-                  <a:srgbClr val="EA580C"/>
-                </a:solidFill>
-              </a:defRPr>
-            </a:pPr>
-            <a:r>
-              <a:t>IMPACT &amp; FUTURE SCOPE</a:t>
-            </a:r>
-          </a:p>
-        </p:txBody>
-      </p:sp>
-      <p:sp>
-        <p:nvSpPr>
-          <p:cNvPr id="3" name="TextBox 2"/>
-          <p:cNvSpPr txBox="1"/>
-          <p:nvPr/>
-        </p:nvSpPr>
-        <p:spPr>
-          <a:xfrm>
-            <a:off x="731520" y="594360"/>
-            <a:ext cx="10698480" cy="731520"/>
-          </a:xfrm>
-          <a:prstGeom prst="rect">
-            <a:avLst/>
-          </a:prstGeom>
-          <a:noFill/>
-        </p:spPr>
-        <p:txBody>
-          <a:bodyPr wrap="none">
-            <a:spAutoFit/>
-          </a:bodyPr>
-          <a:lstStyle/>
-          <a:p>
-            <a:pPr>
-              <a:defRPr sz="2500" b="1">
-                <a:solidFill>
-                  <a:srgbClr val="0F172A"/>
-                </a:solidFill>
-              </a:defRPr>
-            </a:pPr>
-            <a:r>
-              <a:t>Key Benefits &amp; Future Roadmap</a:t>
-            </a:r>
-          </a:p>
-        </p:txBody>
-      </p:sp>
-      <p:sp>
-        <p:nvSpPr>
-          <p:cNvPr id="4" name="Rounded Rectangle 3"/>
+          <p:cNvPr id="2" name="Rectangle 1"/>
           <p:cNvSpPr/>
           <p:nvPr/>
         </p:nvSpPr>
         <p:spPr>
           <a:xfrm>
-            <a:off x="731520" y="1371600"/>
-            <a:ext cx="5212080" cy="4754880"/>
-          </a:xfrm>
-          <a:prstGeom prst="roundRect">
+            <a:off x="0" y="0"/>
+            <a:ext cx="12191695" cy="6858000"/>
+          </a:xfrm>
+          <a:prstGeom prst="rect">
             <a:avLst/>
           </a:prstGeom>
           <a:solidFill>
-            <a:srgbClr val="FFFFFF"/>
+            <a:srgbClr val="0B1120"/>
           </a:solidFill>
-          <a:ln w="19050">
-            <a:solidFill>
-              <a:srgbClr val="E2E8F0"/>
-            </a:solidFill>
+          <a:ln>
+            <a:noFill/>
           </a:ln>
         </p:spPr>
         <p:style>
@@ -6693,14 +9469,84 @@
       </p:sp>
       <p:sp>
         <p:nvSpPr>
+          <p:cNvPr id="3" name="TextBox 2"/>
+          <p:cNvSpPr txBox="1"/>
+          <p:nvPr/>
+        </p:nvSpPr>
+        <p:spPr>
+          <a:xfrm>
+            <a:off x="731520" y="320040"/>
+            <a:ext cx="10698480" cy="320040"/>
+          </a:xfrm>
+          <a:prstGeom prst="rect">
+            <a:avLst/>
+          </a:prstGeom>
+          <a:noFill/>
+        </p:spPr>
+        <p:txBody>
+          <a:bodyPr wrap="square" tIns="0" bIns="0">
+            <a:spAutoFit/>
+          </a:bodyPr>
+          <a:lstStyle/>
+          <a:p>
+            <a:pPr>
+              <a:defRPr sz="1100" b="1">
+                <a:solidFill>
+                  <a:srgbClr val="EA580C"/>
+                </a:solidFill>
+              </a:defRPr>
+            </a:pPr>
+            <a:r>
+              <a:t>ROLE-BASED ACCESS CONTROL (RBAC)</a:t>
+            </a:r>
+          </a:p>
+        </p:txBody>
+      </p:sp>
+      <p:sp>
+        <p:nvSpPr>
+          <p:cNvPr id="4" name="TextBox 3"/>
+          <p:cNvSpPr txBox="1"/>
+          <p:nvPr/>
+        </p:nvSpPr>
+        <p:spPr>
+          <a:xfrm>
+            <a:off x="731520" y="621792"/>
+            <a:ext cx="10698480" cy="594360"/>
+          </a:xfrm>
+          <a:prstGeom prst="rect">
+            <a:avLst/>
+          </a:prstGeom>
+          <a:noFill/>
+        </p:spPr>
+        <p:txBody>
+          <a:bodyPr wrap="square" tIns="0" bIns="0">
+            <a:spAutoFit/>
+          </a:bodyPr>
+          <a:lstStyle/>
+          <a:p>
+            <a:pPr>
+              <a:defRPr sz="2200" b="1">
+                <a:solidFill>
+                  <a:srgbClr val="F8FAFC"/>
+                </a:solidFill>
+              </a:defRPr>
+            </a:pPr>
+            <a:r>
+              <a:t>Multi-Shop Counter Isolation &amp; Super Admin Control</a:t>
+            </a:r>
+          </a:p>
+        </p:txBody>
+      </p:sp>
+      <p:sp>
+        <p:nvSpPr>
           <p:cNvPr id="5" name="TextBox 4"/>
           <p:cNvSpPr txBox="1"/>
           <p:nvPr/>
         </p:nvSpPr>
         <p:spPr>
           <a:xfrm>
-            <a:off x="914400" y="1554480"/>
-            <a:ext cx="4846320" cy="4297680"/>
+            <a:off x="731520" y="1143000"/>
+            <a:ext cx="10698480" cy="320040"/>
           </a:xfrm>
           <a:prstGeom prst="rect">
             <a:avLst/>
@@ -6708,95 +9554,20 @@
           <a:noFill/>
         </p:spPr>
         <p:txBody>
-          <a:bodyPr wrap="none">
+          <a:bodyPr wrap="square" tIns="0" bIns="0">
             <a:spAutoFit/>
           </a:bodyPr>
           <a:lstStyle/>
           <a:p>
             <a:pPr>
-              <a:defRPr sz="1700" b="1">
-                <a:solidFill>
-                  <a:srgbClr val="10B981"/>
-                </a:solidFill>
-              </a:defRPr>
-            </a:pPr>
-            <a:r>
-              <a:t>🎯 Key Student Benefits</a:t>
-            </a:r>
-          </a:p>
-          <a:p>
-            <a:pPr>
-              <a:spcBef>
-                <a:spcPts val="1200"/>
-              </a:spcBef>
-              <a:defRPr sz="1200">
-                <a:solidFill>
-                  <a:srgbClr val="1E293B"/>
-                </a:solidFill>
-              </a:defRPr>
-            </a:pPr>
-            <a:r>
-              <a:t>✔ Saves 15-20 minutes every break</a:t>
-            </a:r>
-          </a:p>
-          <a:p>
-            <a:pPr>
-              <a:spcBef>
-                <a:spcPts val="1200"/>
-              </a:spcBef>
-              <a:defRPr sz="1200">
-                <a:solidFill>
-                  <a:srgbClr val="1E293B"/>
-                </a:solidFill>
-              </a:defRPr>
-            </a:pPr>
-            <a:r>
-              <a:t>✔ Zero queue waiting time</a:t>
-            </a:r>
-          </a:p>
-          <a:p>
-            <a:pPr>
-              <a:spcBef>
-                <a:spcPts val="1200"/>
-              </a:spcBef>
-              <a:defRPr sz="1200">
-                <a:solidFill>
-                  <a:srgbClr val="1E293B"/>
-                </a:solidFill>
-              </a:defRPr>
-            </a:pPr>
-            <a:r>
-              <a:t>✔ Never miss a lecture due to canteen rush</a:t>
-            </a:r>
-          </a:p>
-          <a:p>
-            <a:pPr>
-              <a:spcBef>
-                <a:spcPts val="1200"/>
-              </a:spcBef>
-              <a:defRPr sz="1200">
-                <a:solidFill>
-                  <a:srgbClr val="1E293B"/>
-                </a:solidFill>
-              </a:defRPr>
-            </a:pPr>
-            <a:r>
-              <a:t>✔ One-stop shopping for food &amp; stationery</a:t>
-            </a:r>
-          </a:p>
-          <a:p>
-            <a:pPr>
-              <a:spcBef>
-                <a:spcPts val="1200"/>
-              </a:spcBef>
-              <a:defRPr sz="1200">
-                <a:solidFill>
-                  <a:srgbClr val="1E293B"/>
-                </a:solidFill>
-              </a:defRPr>
-            </a:pPr>
-            <a:r>
-              <a:t>✔ Transparent pricing with digital tokens</a:t>
+              <a:defRPr sz="1100">
+                <a:solidFill>
+                  <a:srgbClr val="94A3B8"/>
+                </a:solidFill>
+              </a:defRPr>
+            </a:pPr>
+            <a:r>
+              <a:t>Dedicated shop accounts with centralized Super Admin authority</a:t>
             </a:r>
           </a:p>
         </p:txBody>
@@ -6809,18 +9580,18 @@
         </p:nvSpPr>
         <p:spPr>
           <a:xfrm>
-            <a:off x="6217920" y="1371600"/>
-            <a:ext cx="5212080" cy="4754880"/>
+            <a:off x="731520" y="1645920"/>
+            <a:ext cx="5669280" cy="1234440"/>
           </a:xfrm>
           <a:prstGeom prst="roundRect">
             <a:avLst/>
           </a:prstGeom>
           <a:solidFill>
-            <a:srgbClr val="FFFFFF"/>
+            <a:srgbClr val="1E293B"/>
           </a:solidFill>
-          <a:ln w="19050">
+          <a:ln w="12700">
             <a:solidFill>
-              <a:srgbClr val="E2E8F0"/>
+              <a:srgbClr val="334155"/>
             </a:solidFill>
           </a:ln>
         </p:spPr>
@@ -6854,8 +9625,8 @@
         </p:nvSpPr>
         <p:spPr>
           <a:xfrm>
-            <a:off x="6400800" y="1554480"/>
-            <a:ext cx="4846320" cy="4297680"/>
+            <a:off x="896112" y="1773936"/>
+            <a:ext cx="5340096" cy="978408"/>
           </a:xfrm>
           <a:prstGeom prst="rect">
             <a:avLst/>
@@ -6863,99 +9634,348 @@
           <a:noFill/>
         </p:spPr>
         <p:txBody>
-          <a:bodyPr wrap="none">
+          <a:bodyPr wrap="square" lIns="0" rIns="0" tIns="0" bIns="0">
             <a:spAutoFit/>
           </a:bodyPr>
           <a:lstStyle/>
           <a:p>
             <a:pPr>
-              <a:defRPr sz="1700" b="1">
+              <a:spcAft>
+                <a:spcPts val="400"/>
+              </a:spcAft>
+              <a:defRPr sz="1400" b="1">
+                <a:solidFill>
+                  <a:srgbClr val="EA580C"/>
+                </a:solidFill>
+              </a:defRPr>
+            </a:pPr>
+            <a:r>
+              <a:t>🔒  Counter-Specific Order Isolation</a:t>
+            </a:r>
+          </a:p>
+          <a:p>
+            <a:pPr>
+              <a:defRPr sz="1100">
+                <a:solidFill>
+                  <a:srgbClr val="94A3B8"/>
+                </a:solidFill>
+              </a:defRPr>
+            </a:pPr>
+            <a:r>
+              <a:t>Rainbow Canteen, Chai Nagri, or Photo Shop staff only see orders placed for their specific outlet.</a:t>
+            </a:r>
+          </a:p>
+        </p:txBody>
+      </p:sp>
+      <p:sp>
+        <p:nvSpPr>
+          <p:cNvPr id="8" name="Rounded Rectangle 7"/>
+          <p:cNvSpPr/>
+          <p:nvPr/>
+        </p:nvSpPr>
+        <p:spPr>
+          <a:xfrm>
+            <a:off x="731520" y="2971800"/>
+            <a:ext cx="5669280" cy="1234440"/>
+          </a:xfrm>
+          <a:prstGeom prst="roundRect">
+            <a:avLst/>
+          </a:prstGeom>
+          <a:solidFill>
+            <a:srgbClr val="1E293B"/>
+          </a:solidFill>
+          <a:ln w="12700">
+            <a:solidFill>
+              <a:srgbClr val="334155"/>
+            </a:solidFill>
+          </a:ln>
+        </p:spPr>
+        <p:style>
+          <a:lnRef idx="1">
+            <a:schemeClr val="accent1"/>
+          </a:lnRef>
+          <a:fillRef idx="3">
+            <a:schemeClr val="accent1"/>
+          </a:fillRef>
+          <a:effectRef idx="2">
+            <a:schemeClr val="accent1"/>
+          </a:effectRef>
+          <a:fontRef idx="minor">
+            <a:schemeClr val="lt1"/>
+          </a:fontRef>
+        </p:style>
+        <p:txBody>
+          <a:bodyPr rtlCol="0" anchor="ctr"/>
+          <a:lstStyle/>
+          <a:p>
+            <a:pPr algn="ctr"/>
+          </a:p>
+        </p:txBody>
+      </p:sp>
+      <p:sp>
+        <p:nvSpPr>
+          <p:cNvPr id="9" name="TextBox 8"/>
+          <p:cNvSpPr txBox="1"/>
+          <p:nvPr/>
+        </p:nvSpPr>
+        <p:spPr>
+          <a:xfrm>
+            <a:off x="896112" y="3099816"/>
+            <a:ext cx="5340096" cy="978408"/>
+          </a:xfrm>
+          <a:prstGeom prst="rect">
+            <a:avLst/>
+          </a:prstGeom>
+          <a:noFill/>
+        </p:spPr>
+        <p:txBody>
+          <a:bodyPr wrap="square" lIns="0" rIns="0" tIns="0" bIns="0">
+            <a:spAutoFit/>
+          </a:bodyPr>
+          <a:lstStyle/>
+          <a:p>
+            <a:pPr>
+              <a:spcAft>
+                <a:spcPts val="400"/>
+              </a:spcAft>
+              <a:defRPr sz="1400" b="1">
                 <a:solidFill>
                   <a:srgbClr val="0284C7"/>
                 </a:solidFill>
               </a:defRPr>
             </a:pPr>
             <a:r>
-              <a:t>🚀 Future Enhancements</a:t>
-            </a:r>
-          </a:p>
-          <a:p>
-            <a:pPr>
-              <a:spcBef>
-                <a:spcPts val="1200"/>
-              </a:spcBef>
-              <a:defRPr sz="1200">
-                <a:solidFill>
-                  <a:srgbClr val="1E293B"/>
-                </a:solidFill>
-              </a:defRPr>
-            </a:pPr>
-            <a:r>
-              <a:t>★ QR Code scanning at pickup counter</a:t>
-            </a:r>
-          </a:p>
-          <a:p>
-            <a:pPr>
-              <a:spcBef>
-                <a:spcPts val="1200"/>
-              </a:spcBef>
-              <a:defRPr sz="1200">
-                <a:solidFill>
-                  <a:srgbClr val="1E293B"/>
-                </a:solidFill>
-              </a:defRPr>
-            </a:pPr>
-            <a:r>
-              <a:t>★ Direct UPI payment (GPay, PhonePe, Paytm)</a:t>
-            </a:r>
-          </a:p>
-          <a:p>
-            <a:pPr>
-              <a:spcBef>
-                <a:spcPts val="1200"/>
-              </a:spcBef>
-              <a:defRPr sz="1200">
-                <a:solidFill>
-                  <a:srgbClr val="1E293B"/>
-                </a:solidFill>
-              </a:defRPr>
-            </a:pPr>
-            <a:r>
-              <a:t>★ WhatsApp / SMS notifications when ready</a:t>
-            </a:r>
-          </a:p>
-          <a:p>
-            <a:pPr>
-              <a:spcBef>
-                <a:spcPts val="1200"/>
-              </a:spcBef>
-              <a:defRPr sz="1200">
-                <a:solidFill>
-                  <a:srgbClr val="1E293B"/>
-                </a:solidFill>
-              </a:defRPr>
-            </a:pPr>
-            <a:r>
-              <a:t>★ AI-based combo meal recommendations</a:t>
-            </a:r>
-          </a:p>
-          <a:p>
-            <a:pPr>
-              <a:spcBef>
-                <a:spcPts val="1200"/>
-              </a:spcBef>
-              <a:defRPr sz="1200">
-                <a:solidFill>
-                  <a:srgbClr val="1E293B"/>
-                </a:solidFill>
-              </a:defRPr>
-            </a:pPr>
-            <a:r>
-              <a:t>★ Campus wallet student ID card integration</a:t>
-            </a:r>
-          </a:p>
-        </p:txBody>
-      </p:sp>
+              <a:t>👑  Super Admin Master View (Deepak)</a:t>
+            </a:r>
+          </a:p>
+          <a:p>
+            <a:pPr>
+              <a:defRPr sz="1100">
+                <a:solidFill>
+                  <a:srgbClr val="94A3B8"/>
+                </a:solidFill>
+              </a:defRPr>
+            </a:pPr>
+            <a:r>
+              <a:t>Deepak Sharma has omniscient master view with an instant shop filter switcher and live revenue charts.</a:t>
+            </a:r>
+          </a:p>
+        </p:txBody>
+      </p:sp>
+      <p:sp>
+        <p:nvSpPr>
+          <p:cNvPr id="10" name="Rounded Rectangle 9"/>
+          <p:cNvSpPr/>
+          <p:nvPr/>
+        </p:nvSpPr>
+        <p:spPr>
+          <a:xfrm>
+            <a:off x="731520" y="4297680"/>
+            <a:ext cx="5669280" cy="1234440"/>
+          </a:xfrm>
+          <a:prstGeom prst="roundRect">
+            <a:avLst/>
+          </a:prstGeom>
+          <a:solidFill>
+            <a:srgbClr val="1E293B"/>
+          </a:solidFill>
+          <a:ln w="12700">
+            <a:solidFill>
+              <a:srgbClr val="334155"/>
+            </a:solidFill>
+          </a:ln>
+        </p:spPr>
+        <p:style>
+          <a:lnRef idx="1">
+            <a:schemeClr val="accent1"/>
+          </a:lnRef>
+          <a:fillRef idx="3">
+            <a:schemeClr val="accent1"/>
+          </a:fillRef>
+          <a:effectRef idx="2">
+            <a:schemeClr val="accent1"/>
+          </a:effectRef>
+          <a:fontRef idx="minor">
+            <a:schemeClr val="lt1"/>
+          </a:fontRef>
+        </p:style>
+        <p:txBody>
+          <a:bodyPr rtlCol="0" anchor="ctr"/>
+          <a:lstStyle/>
+          <a:p>
+            <a:pPr algn="ctr"/>
+          </a:p>
+        </p:txBody>
+      </p:sp>
+      <p:sp>
+        <p:nvSpPr>
+          <p:cNvPr id="11" name="TextBox 10"/>
+          <p:cNvSpPr txBox="1"/>
+          <p:nvPr/>
+        </p:nvSpPr>
+        <p:spPr>
+          <a:xfrm>
+            <a:off x="896112" y="4425696"/>
+            <a:ext cx="5340096" cy="978408"/>
+          </a:xfrm>
+          <a:prstGeom prst="rect">
+            <a:avLst/>
+          </a:prstGeom>
+          <a:noFill/>
+        </p:spPr>
+        <p:txBody>
+          <a:bodyPr wrap="square" lIns="0" rIns="0" tIns="0" bIns="0">
+            <a:spAutoFit/>
+          </a:bodyPr>
+          <a:lstStyle/>
+          <a:p>
+            <a:pPr>
+              <a:spcAft>
+                <a:spcPts val="400"/>
+              </a:spcAft>
+              <a:defRPr sz="1400" b="1">
+                <a:solidFill>
+                  <a:srgbClr val="10B981"/>
+                </a:solidFill>
+              </a:defRPr>
+            </a:pPr>
+            <a:r>
+              <a:t>🔑  23 Dedicated Shop Admin Logins</a:t>
+            </a:r>
+          </a:p>
+          <a:p>
+            <a:pPr>
+              <a:defRPr sz="1100">
+                <a:solidFill>
+                  <a:srgbClr val="94A3B8"/>
+                </a:solidFill>
+              </a:defRPr>
+            </a:pPr>
+            <a:r>
+              <a:t>Stored securely in Shop_Admin_Credentials/ folder for each shop manager (e.g. rainbow@campusmart.in).</a:t>
+            </a:r>
+          </a:p>
+        </p:txBody>
+      </p:sp>
+      <p:sp>
+        <p:nvSpPr>
+          <p:cNvPr id="12" name="Rounded Rectangle 11"/>
+          <p:cNvSpPr/>
+          <p:nvPr/>
+        </p:nvSpPr>
+        <p:spPr>
+          <a:xfrm>
+            <a:off x="731520" y="5623560"/>
+            <a:ext cx="5669280" cy="868680"/>
+          </a:xfrm>
+          <a:prstGeom prst="roundRect">
+            <a:avLst/>
+          </a:prstGeom>
+          <a:solidFill>
+            <a:srgbClr val="1E293B"/>
+          </a:solidFill>
+          <a:ln w="12700">
+            <a:solidFill>
+              <a:srgbClr val="334155"/>
+            </a:solidFill>
+          </a:ln>
+        </p:spPr>
+        <p:style>
+          <a:lnRef idx="1">
+            <a:schemeClr val="accent1"/>
+          </a:lnRef>
+          <a:fillRef idx="3">
+            <a:schemeClr val="accent1"/>
+          </a:fillRef>
+          <a:effectRef idx="2">
+            <a:schemeClr val="accent1"/>
+          </a:effectRef>
+          <a:fontRef idx="minor">
+            <a:schemeClr val="lt1"/>
+          </a:fontRef>
+        </p:style>
+        <p:txBody>
+          <a:bodyPr rtlCol="0" anchor="ctr"/>
+          <a:lstStyle/>
+          <a:p>
+            <a:pPr algn="ctr"/>
+          </a:p>
+        </p:txBody>
+      </p:sp>
+      <p:sp>
+        <p:nvSpPr>
+          <p:cNvPr id="13" name="TextBox 12"/>
+          <p:cNvSpPr txBox="1"/>
+          <p:nvPr/>
+        </p:nvSpPr>
+        <p:spPr>
+          <a:xfrm>
+            <a:off x="896112" y="5751576"/>
+            <a:ext cx="5340096" cy="612647"/>
+          </a:xfrm>
+          <a:prstGeom prst="rect">
+            <a:avLst/>
+          </a:prstGeom>
+          <a:noFill/>
+        </p:spPr>
+        <p:txBody>
+          <a:bodyPr wrap="square" lIns="0" rIns="0" tIns="0" bIns="0">
+            <a:spAutoFit/>
+          </a:bodyPr>
+          <a:lstStyle/>
+          <a:p>
+            <a:pPr>
+              <a:spcAft>
+                <a:spcPts val="400"/>
+              </a:spcAft>
+              <a:defRPr sz="1400" b="1">
+                <a:solidFill>
+                  <a:srgbClr val="A855F7"/>
+                </a:solidFill>
+              </a:defRPr>
+            </a:pPr>
+            <a:r>
+              <a:t>🛡️  Staff Approval Workflow</a:t>
+            </a:r>
+          </a:p>
+          <a:p>
+            <a:pPr>
+              <a:defRPr sz="1100">
+                <a:solidFill>
+                  <a:srgbClr val="94A3B8"/>
+                </a:solidFill>
+              </a:defRPr>
+            </a:pPr>
+            <a:r>
+              <a:t>New counter staff registrations require explicit Super Admin approval before dashboard access.</a:t>
+            </a:r>
+          </a:p>
+        </p:txBody>
+      </p:sp>
+      <p:pic>
+        <p:nvPicPr>
+          <p:cNvPr id="14" name="Picture 13" descr="admin.jpg"/>
+          <p:cNvPicPr>
+            <a:picLocks noChangeAspect="1"/>
+          </p:cNvPicPr>
+          <p:nvPr/>
+        </p:nvPicPr>
+        <p:blipFill>
+          <a:blip r:embed="rId2"/>
+          <a:stretch>
+            <a:fillRect/>
+          </a:stretch>
+        </p:blipFill>
+        <p:spPr>
+          <a:xfrm>
+            <a:off x="6766560" y="1645920"/>
+            <a:ext cx="4663440" cy="4846320"/>
+          </a:xfrm>
+          <a:prstGeom prst="rect">
+            <a:avLst/>
+          </a:prstGeom>
+        </p:spPr>
+      </p:pic>
     </p:spTree>
   </p:cSld>
   <p:clrMapOvr>

--- a/Campus_Mart_Presentation.pptx
+++ b/Campus_Mart_Presentation.pptx
@@ -3226,7 +3226,7 @@
             </a:r>
             <a:br/>
             <a:r>
-              <a:t>• Multi-shop counter order isolation (23 Outlets &amp; 1,555 Pure Veg items)</a:t>
+              <a:t>• Multi-shop counter order isolation (23 Outlets &amp; 1,974+ Pure Veg items)</a:t>
             </a:r>
             <a:br/>
             <a:r>
@@ -4215,7 +4215,7 @@
               </a:defRPr>
             </a:pPr>
             <a:r>
-              <a:t>24/7 Render Cloud API serving 1,555+ items, orders pipeline, split engine &amp; RBAC.</a:t>
+              <a:t>24/7 Render Cloud API serving 1,974+ items, orders pipeline, split engine &amp; RBAC.</a:t>
             </a:r>
           </a:p>
         </p:txBody>
@@ -4310,7 +4310,7 @@
               </a:defRPr>
             </a:pPr>
             <a:r>
-              <a:t>Flexible JSON document persistence for 26 accounts, 1,555 pure veg food items &amp; 23 shops.</a:t>
+              <a:t>Flexible JSON document persistence for 26 accounts, 1,974+ pure veg food items &amp; 23 shops.</a:t>
             </a:r>
           </a:p>
         </p:txBody>
@@ -6665,7 +6665,7 @@
               </a:defRPr>
             </a:pPr>
             <a:r>
-              <a:t>Campus Scale: 1,555 Pure Veg Items Across 23 Outlets</a:t>
+              <a:t>Campus Scale: 1,974+ Pure Veg Items Across 23 Outlets</a:t>
             </a:r>
           </a:p>
         </p:txBody>

--- a/Campus_Mart_Presentation.pptx
+++ b/Campus_Mart_Presentation.pptx
@@ -3226,7 +3226,7 @@
             </a:r>
             <a:br/>
             <a:r>
-              <a:t>• Multi-shop counter order isolation (23 Outlets &amp; 1,974+ Pure Veg items)</a:t>
+              <a:t>• Multi-shop counter order isolation (23 Outlets &amp; 1,963+ Pure Veg items)</a:t>
             </a:r>
             <a:br/>
             <a:r>
@@ -4215,7 +4215,7 @@
               </a:defRPr>
             </a:pPr>
             <a:r>
-              <a:t>24/7 Render Cloud API serving 1,974+ items, orders pipeline, split engine &amp; RBAC.</a:t>
+              <a:t>24/7 Render Cloud API serving 1,963+ items, orders pipeline, split engine &amp; RBAC.</a:t>
             </a:r>
           </a:p>
         </p:txBody>
@@ -4310,7 +4310,7 @@
               </a:defRPr>
             </a:pPr>
             <a:r>
-              <a:t>Flexible JSON document persistence for 26 accounts, 1,974+ pure veg food items &amp; 23 shops.</a:t>
+              <a:t>Flexible JSON document persistence for 26 accounts, 1,963+ pure veg food items &amp; 23 shops.</a:t>
             </a:r>
           </a:p>
         </p:txBody>
@@ -6665,7 +6665,7 @@
               </a:defRPr>
             </a:pPr>
             <a:r>
-              <a:t>Campus Scale: 1,974+ Pure Veg Items Across 23 Outlets</a:t>
+              <a:t>Campus Scale: 1,963+ Pure Veg Items Across 23 Outlets</a:t>
             </a:r>
           </a:p>
         </p:txBody>
